--- a/projects/drug-information-practical/slides/ch10-applied-case.pptx
+++ b/projects/drug-information-practical/slides/ch10-applied-case.pptx
@@ -29,7 +29,6 @@
     <p:sldId id="277" r:id="rId29"/>
     <p:sldId id="278" r:id="rId30"/>
     <p:sldId id="279" r:id="rId31"/>
-    <p:sldId id="280" r:id="rId32"/>
   </p:sldIdLst>
   <p:sldSz cx="12191695" cy="6858000" type="screen4x3"/>
   <p:notesSz cx="6858000" cy="9144000"/>
@@ -608,7 +607,7 @@
           <a:p/>
           <a:p>
             <a:r>
-              <a:t>About 120 s.  Next: Step 2: causality (Naranjo [3]).</a:t>
+              <a:t>About 60 s.  Next: Ten Days Later: A Suspected ADR.</a:t>
             </a:r>
           </a:p>
         </p:txBody>
@@ -684,7 +683,7 @@
           <a:p/>
           <a:p>
             <a:r>
-              <a:t>About 60 s.  Next: Ten Days Later: A Suspected ADR.</a:t>
+              <a:t>About 60 s.  Next: Your turn.</a:t>
             </a:r>
           </a:p>
         </p:txBody>
@@ -754,13 +753,13 @@
           <a:lstStyle/>
           <a:p>
             <a:r>
-              <a:t>Mr Ahmed returns. His ankles are swollen, his blood pressure is 158/96 mmHg (usually 130/80) and his creatinine has risen from 90 to 140 µmol/L. He has taken naproxen for eight days. Stop naproxen. Contact the doctor the same day. Recheck kidney function and potassium in a few days. Continue paracetamol. The reaction is Type A (predictable from pharmacology; worse with an ACE inhibitor). It is moderate in severity (treatment had to change) and not serious (no admission). Report the reaction to the EPVC, with the naproxen batch number, lisinopril as a concomitant drug, and the outcome. Record "NSAIDs: fluid retention and raised creatinine with ACE inhibitor" in his notes. Suggest that the doctor considers a corticosteroid injection instead of another NSAID.</a:t>
+              <a:t>Answer B: The need was pain control that allows exercise. A, C and D miss the point.</a:t>
             </a:r>
           </a:p>
           <a:p/>
           <a:p>
             <a:r>
-              <a:t>About 60 s.  Next: Your turn.</a:t>
+              <a:t>About 30 s.  Next: Check your answer.</a:t>
             </a:r>
           </a:p>
         </p:txBody>
@@ -830,7 +829,7 @@
           <a:lstStyle/>
           <a:p>
             <a:r>
-              <a:t>Answer B: The need was pain control that allows exercise. A, C and D miss the point.</a:t>
+              <a:t>Answer C: A systematic review of RCTs is the best evidence for a treatment effect. A, B and D do not compare treatments.</a:t>
             </a:r>
           </a:p>
           <a:p/>
@@ -906,7 +905,7 @@
           <a:lstStyle/>
           <a:p>
             <a:r>
-              <a:t>Answer C: A systematic review of RCTs is the best evidence for a treatment effect. A, B and D do not compare treatments.</a:t>
+              <a:t>Answer D: The benefit is real but short-term. A and B overstate the result; C is wrong.</a:t>
             </a:r>
           </a:p>
           <a:p/>
@@ -982,7 +981,7 @@
           <a:lstStyle/>
           <a:p>
             <a:r>
-              <a:t>Answer D: The benefit is real but short-term. A and B overstate the result; C is wrong.</a:t>
+              <a:t>Answer A: Predictable pharmacology (Type A), treatment changed (moderate), no admission (not serious). B, C and D do not fit.</a:t>
             </a:r>
           </a:p>
           <a:p/>
@@ -1058,7 +1057,7 @@
           <a:lstStyle/>
           <a:p>
             <a:r>
-              <a:t>Answer A: Predictable pharmacology (Type A), treatment changed (moderate), no admission (not serious). B, C and D do not fit.</a:t>
+              <a:t>Answer C: Patient care comes first. A and B follow; D is harmful.</a:t>
             </a:r>
           </a:p>
           <a:p/>
@@ -1134,13 +1133,13 @@
           <a:lstStyle/>
           <a:p>
             <a:r>
-              <a:t>Answer C: Patient care comes first. A and B follow; D is harmful.</a:t>
+              <a:t>Model answer: (a) Kidney function, blood pressure, other drugs (including any diuretic), stomach history, and the cause of the knee pain. (b) Avoid self-selected NSAIDs; start paracetamol, suggest topical ibuprofen or diclofenac gel, and refer to the doctor. (c) The BNF (or Lexicomp) for NSAID cautions with ACE inhibitors and diabetes; it gives a fast, reliable answer.</a:t>
             </a:r>
           </a:p>
           <a:p/>
           <a:p>
             <a:r>
-              <a:t>About 30 s.  Next: Check your answer.</a:t>
+              <a:t>About 60 s.</a:t>
             </a:r>
           </a:p>
         </p:txBody>
@@ -1210,13 +1209,7 @@
           <a:lstStyle/>
           <a:p>
             <a:r>
-              <a:t>Model answer: (a) Kidney function, blood pressure, other drugs (including any diuretic), stomach history, and the cause of the knee pain. (b) Avoid self-selected NSAIDs; start paracetamol, suggest topical ibuprofen or diclofenac gel, and refer to the doctor. (c) The BNF (or Lexicomp) for NSAID cautions with ACE inhibitors and diabetes; it gives a fast, reliable answer.</a:t>
-            </a:r>
-          </a:p>
-          <a:p/>
-          <a:p>
-            <a:r>
-              <a:t>About 60 s.</a:t>
+              <a:t>About 30 s.  Next: In This Section.</a:t>
             </a:r>
           </a:p>
         </p:txBody>
@@ -1286,7 +1279,7 @@
           <a:lstStyle/>
           <a:p>
             <a:r>
-              <a:t>About 30 s.  Next: In This Section.</a:t>
+              <a:t>About 30 s.  Next: Your turn.</a:t>
             </a:r>
           </a:p>
         </p:txBody>
@@ -1642,7 +1635,7 @@
           <a:lstStyle/>
           <a:p>
             <a:r>
-              <a:t>About 30 s.  Next: Your turn.</a:t>
+              <a:t>About 30 s.</a:t>
             </a:r>
           </a:p>
         </p:txBody>
@@ -1737,76 +1730,6 @@
 </p:notes>
 </file>
 
-<file path=ppt/notesSlides/notesSlide25.xml><?xml version="1.0" encoding="utf-8"?>
-<p:notes xmlns:a="http://schemas.openxmlformats.org/drawingml/2006/main" xmlns:p="http://schemas.openxmlformats.org/presentationml/2006/main" xmlns:r="http://schemas.openxmlformats.org/officeDocument/2006/relationships">
-  <p:cSld>
-    <p:spTree>
-      <p:nvGrpSpPr>
-        <p:cNvPr id="1" name=""/>
-        <p:cNvGrpSpPr/>
-        <p:nvPr/>
-      </p:nvGrpSpPr>
-      <p:grpSpPr>
-        <a:xfrm>
-          <a:off x="0" y="0"/>
-          <a:ext cx="0" cy="0"/>
-          <a:chOff x="0" y="0"/>
-          <a:chExt cx="0" cy="0"/>
-        </a:xfrm>
-      </p:grpSpPr>
-      <p:sp>
-        <p:nvSpPr>
-          <p:cNvPr id="2" name="Slide Image Placeholder 1"/>
-          <p:cNvSpPr>
-            <a:spLocks noGrp="1"/>
-          </p:cNvSpPr>
-          <p:nvPr>
-            <p:ph type="sldImg" idx="2"/>
-          </p:nvPr>
-        </p:nvSpPr>
-        <p:spPr/>
-      </p:sp>
-      <p:sp>
-        <p:nvSpPr>
-          <p:cNvPr id="3" name="Notes Placeholder 2"/>
-          <p:cNvSpPr>
-            <a:spLocks noGrp="1"/>
-          </p:cNvSpPr>
-          <p:nvPr>
-            <p:ph type="body" idx="3" sz="quarter"/>
-          </p:nvPr>
-        </p:nvSpPr>
-        <p:spPr/>
-        <p:txBody>
-          <a:bodyPr/>
-          <a:lstStyle/>
-          <a:p>
-            <a:r>
-              <a:t>About 30 s.</a:t>
-            </a:r>
-          </a:p>
-        </p:txBody>
-      </p:sp>
-      <p:sp>
-        <p:nvSpPr>
-          <p:cNvPr id="4" name="Slide Number Placeholder 3"/>
-          <p:cNvSpPr>
-            <a:spLocks noGrp="1"/>
-          </p:cNvSpPr>
-          <p:nvPr>
-            <p:ph type="sldNum" idx="5" sz="quarter"/>
-          </p:nvPr>
-        </p:nvSpPr>
-        <p:spPr/>
-      </p:sp>
-    </p:spTree>
-  </p:cSld>
-  <p:clrMapOvr>
-    <a:masterClrMapping/>
-  </p:clrMapOvr>
-</p:notes>
-</file>
-
 <file path=ppt/notesSlides/notesSlide3.xml><?xml version="1.0" encoding="utf-8"?>
 <p:notes xmlns:a="http://schemas.openxmlformats.org/drawingml/2006/main" xmlns:p="http://schemas.openxmlformats.org/presentationml/2006/main" xmlns:r="http://schemas.openxmlformats.org/officeDocument/2006/relationships">
   <p:cSld>
@@ -1934,7 +1857,7 @@
           <a:p/>
           <a:p>
             <a:r>
-              <a:t>About 60 s.  Next: Step by Step: The Request.</a:t>
+              <a:t>About 60 s.  Next: Appraising the review in brief.</a:t>
             </a:r>
           </a:p>
         </p:txBody>
@@ -2004,13 +1927,13 @@
           <a:lstStyle/>
           <a:p>
             <a:r>
-              <a:t>The physiotherapist phones the hospital pharmacy: "His pain stops him doing his exercises. Which painkiller can he take? Would a steroid injection help?" The real question matters. The physiotherapist does not need a list of every painkiller. She needs a safe plan that lets exercise continue.</a:t>
+              <a:t>Tertiary (Chapter 2). The BNF and Lexicomp give doses, cautions and interactions. Paracetamol is the first choice for mild pain. NSAIDs can raise blood pressure, reduce the effect of ACE inhibitors, harm the kidneys and cause stomach ulcers. Naproxen or ibuprofen at the lowest effective dose for the shortest time carries a lower cardiovascular risk than some other NSAIDs. A proton-pump inhibitor is advised for patients with a history of dyspepsia who need an NSAID. Secondary. A PubMed search for frozen shoulder AND corticosteroid injection, filtered to systematic reviews, finds a recent meta-analysis. Primary / review evidence (Chapters 3 and 6). The review pooled randomised trials. Intra-articular corticosteroid injection gave better pain and movement in the early months than no injection. The benefit became smaller over time. Combining injection with home exercise did better than exercise alone in the short term.</a:t>
             </a:r>
           </a:p>
           <a:p/>
           <a:p>
             <a:r>
-              <a:t>About 30 s.  Next: Appraising the review in brief.</a:t>
+              <a:t>About 120 s.  Next: Appraising the review in brief.</a:t>
             </a:r>
           </a:p>
         </p:txBody>
@@ -2086,7 +2009,7 @@
           <a:p/>
           <a:p>
             <a:r>
-              <a:t>About 120 s.  Next: Appraising the review in brief.</a:t>
+              <a:t>About 60 s.  Next: The Answer.</a:t>
             </a:r>
           </a:p>
         </p:txBody>
@@ -2156,13 +2079,13 @@
           <a:lstStyle/>
           <a:p>
             <a:r>
-              <a:t>Tertiary (Chapter 2). The BNF and Lexicomp give doses, cautions and interactions. Paracetamol is the first choice for mild pain. NSAIDs can raise blood pressure, reduce the effect of ACE inhibitors, harm the kidneys and cause stomach ulcers. Naproxen or ibuprofen at the lowest effective dose for the shortest time carries a lower cardiovascular risk than some other NSAIDs. A proton-pump inhibitor is advised for patients with a history of dyspepsia who need an NSAID. Secondary. A PubMed search for frozen shoulder AND corticosteroid injection, filtered to systematic reviews, finds a recent meta-analysis. Primary / review evidence (Chapters 3 and 6). The review pooled randomised trials. Intra-articular corticosteroid injection gave better pain and movement in the early months than no injection. The benefit became smaller over time. Combining injection with home exercise did better than exercise alone in the short term.</a:t>
+              <a:t>The pharmacist writes back to the physiotherapist and the doctor:</a:t>
             </a:r>
           </a:p>
           <a:p/>
           <a:p>
             <a:r>
-              <a:t>About 60 s.  Next: The Answer.</a:t>
+              <a:t>About 60 s.  Next: Step 2: causality (Naranjo [3]).</a:t>
             </a:r>
           </a:p>
         </p:txBody>
@@ -2232,13 +2155,13 @@
           <a:lstStyle/>
           <a:p>
             <a:r>
-              <a:t>The pharmacist writes back to the physiotherapist and the doctor:</a:t>
+              <a:t>Discuss with the class: what would you ask, check and say?</a:t>
             </a:r>
           </a:p>
           <a:p/>
           <a:p>
             <a:r>
-              <a:t>About 60 s.  Next: Step 2: causality (Naranjo [3]).</a:t>
+              <a:t>About 30 s.  Next: Step 2: causality (Naranjo [3]).</a:t>
             </a:r>
           </a:p>
         </p:txBody>
@@ -2308,13 +2231,13 @@
           <a:lstStyle/>
           <a:p>
             <a:r>
-              <a:t>Discuss with the class: what would you ask, check and say?</a:t>
+              <a:t>Mr Ahmed returns. His ankles are swollen, his blood pressure is 158/96 mmHg (usually 130/80) and his creatinine has risen from 90 to 140 µmol/L. He has taken naproxen for eight days. Stop naproxen. Contact the doctor the same day. Recheck kidney function and potassium in a few days. Continue paracetamol. The reaction is Type A (predictable from pharmacology; worse with an ACE inhibitor). It is moderate in severity (treatment had to change) and not serious (no admission). Report the reaction to the EPVC, with the naproxen batch number, lisinopril as a concomitant drug, and the outcome. Record "NSAIDs: fluid retention and raised creatinine with ACE inhibitor" in his notes. Suggest that the doctor considers a corticosteroid injection instead of another NSAID.</a:t>
             </a:r>
           </a:p>
           <a:p/>
           <a:p>
             <a:r>
-              <a:t>About 30 s.  Next: Step 2: causality (Naranjo [3]).</a:t>
+              <a:t>About 120 s.  Next: Step 2: causality (Naranjo [3]).</a:t>
             </a:r>
           </a:p>
         </p:txBody>
@@ -5584,16 +5507,16 @@
       <p:grpSpPr/>
       <p:sp>
         <p:nvSpPr>
-          <p:cNvPr id="2" name="Rectangle 1"/>
+          <p:cNvPr id="2" name="Oval 1"/>
           <p:cNvSpPr/>
           <p:nvPr/>
         </p:nvSpPr>
         <p:spPr>
           <a:xfrm>
-            <a:off x="0" y="0"/>
-            <a:ext cx="3931920" cy="6858000"/>
-          </a:xfrm>
-          <a:prstGeom prst="rect">
+            <a:off x="548640" y="475488"/>
+            <a:ext cx="658368" cy="658368"/>
+          </a:xfrm>
+          <a:prstGeom prst="ellipse">
             <a:avLst/>
           </a:prstGeom>
           <a:solidFill>
@@ -5619,10 +5542,19 @@
           </a:fontRef>
         </p:style>
         <p:txBody>
-          <a:bodyPr rtlCol="0" anchor="ctr"/>
+          <a:bodyPr rtlCol="0" anchor="ctr" lIns="0" rIns="0" tIns="0" bIns="0"/>
           <a:lstStyle/>
           <a:p>
             <a:pPr algn="ctr"/>
+            <a:r>
+              <a:rPr sz="1800" i="0" b="1">
+                <a:solidFill>
+                  <a:srgbClr val="FFFFFF"/>
+                </a:solidFill>
+                <a:latin typeface="Cambria"/>
+              </a:rPr>
+              <a:t>10</a:t>
+            </a:r>
           </a:p>
         </p:txBody>
       </p:sp>
@@ -5634,8 +5566,8 @@
         </p:nvSpPr>
         <p:spPr>
           <a:xfrm>
-            <a:off x="548640" y="1188720"/>
-            <a:ext cx="2926080" cy="2377440"/>
+            <a:off x="1417319" y="438912"/>
+            <a:ext cx="10180015" cy="292608"/>
           </a:xfrm>
           <a:prstGeom prst="rect">
             <a:avLst/>
@@ -5649,13 +5581,13 @@
           <a:lstStyle/>
           <a:p>
             <a:r>
-              <a:rPr sz="13000" i="0" b="1">
-                <a:solidFill>
-                  <a:srgbClr val="E6EEEF"/>
-                </a:solidFill>
-                <a:latin typeface="Cambria"/>
-              </a:rPr>
-              <a:t>℞</a:t>
+              <a:rPr sz="1200" i="0" b="1" spc="150">
+                <a:solidFill>
+                  <a:srgbClr val="2F6F7A"/>
+                </a:solidFill>
+                <a:latin typeface="Calibri"/>
+              </a:rPr>
+              <a:t>SECTION 10</a:t>
             </a:r>
           </a:p>
         </p:txBody>
@@ -5668,8 +5600,8 @@
         </p:nvSpPr>
         <p:spPr>
           <a:xfrm>
-            <a:off x="548640" y="3977639"/>
-            <a:ext cx="3017520" cy="1280160"/>
+            <a:off x="1417319" y="676656"/>
+            <a:ext cx="10180015" cy="640080"/>
           </a:xfrm>
           <a:prstGeom prst="rect">
             <a:avLst/>
@@ -5683,24 +5615,13 @@
           <a:lstStyle/>
           <a:p>
             <a:r>
-              <a:rPr sz="3000" i="0" b="1">
-                <a:solidFill>
-                  <a:srgbClr val="FFFFFF"/>
+              <a:rPr sz="3200" i="0" b="1">
+                <a:solidFill>
+                  <a:srgbClr val="2B211C"/>
                 </a:solidFill>
                 <a:latin typeface="Cambria"/>
               </a:rPr>
-              <a:t>At the Pharmacy</a:t>
-            </a:r>
-          </a:p>
-          <a:p>
-            <a:r>
-              <a:rPr sz="1400" i="0" b="1" spc="150">
-                <a:solidFill>
-                  <a:srgbClr val="E6EEEF"/>
-                </a:solidFill>
-                <a:latin typeface="Calibri"/>
-              </a:rPr>
-              <a:t>Section 10</a:t>
+              <a:t>Step 2: causality (Naranjo)</a:t>
             </a:r>
           </a:p>
         </p:txBody>
@@ -5713,41 +5634,7 @@
         </p:nvSpPr>
         <p:spPr>
           <a:xfrm>
-            <a:off x="4526280" y="822960"/>
-            <a:ext cx="7132320" cy="5120640"/>
-          </a:xfrm>
-          <a:prstGeom prst="rect">
-            <a:avLst/>
-          </a:prstGeom>
-          <a:noFill/>
-        </p:spPr>
-        <p:txBody>
-          <a:bodyPr wrap="square" anchor="ctr" lIns="0" rIns="0" tIns="0" bIns="0">
-            <a:spAutoFit/>
-          </a:bodyPr>
-          <a:lstStyle/>
-          <a:p>
-            <a:r>
-              <a:rPr sz="2200" i="0" b="0">
-                <a:solidFill>
-                  <a:srgbClr val="2B211C"/>
-                </a:solidFill>
-                <a:latin typeface="Calibri"/>
-              </a:rPr>
-              <a:t>Mr Ahmed comes in with his prescription. You explain how to take naproxen with food and omeprazole. You also tell him to stop naproxen and call if he notices black stools, ankle swelling or much less urine. You record the counselling in the pharmacy notes.</a:t>
-            </a:r>
-          </a:p>
-        </p:txBody>
-      </p:sp>
-      <p:sp>
-        <p:nvSpPr>
-          <p:cNvPr id="6" name="TextBox 5"/>
-          <p:cNvSpPr txBox="1"/>
-          <p:nvPr/>
-        </p:nvSpPr>
-        <p:spPr>
-          <a:xfrm>
-            <a:off x="4526280" y="6419088"/>
+            <a:off x="548640" y="6419088"/>
             <a:ext cx="8229600" cy="274320"/>
           </a:xfrm>
           <a:prstGeom prst="rect">
@@ -5768,14 +5655,14 @@
                 </a:solidFill>
                 <a:latin typeface="Calibri"/>
               </a:rPr>
-              <a:t>Drug Information  ·  Applied Case: Answering a Real Drug Question</a:t>
-            </a:r>
-          </a:p>
-        </p:txBody>
-      </p:sp>
-      <p:sp>
-        <p:nvSpPr>
-          <p:cNvPr id="7" name="TextBox 6"/>
+              <a:t>Drug Information  ·  Section 10  ·  Applied Case: Answering a Real Drug Question</a:t>
+            </a:r>
+          </a:p>
+        </p:txBody>
+      </p:sp>
+      <p:sp>
+        <p:nvSpPr>
+          <p:cNvPr id="6" name="TextBox 5"/>
           <p:cNvSpPr txBox="1"/>
           <p:nvPr/>
         </p:nvSpPr>
@@ -5803,14 +5690,14 @@
                 </a:solidFill>
                 <a:latin typeface="Calibri"/>
               </a:rPr>
-              <a:t>10 / 25</a:t>
+              <a:t>10 / 24</a:t>
             </a:r>
           </a:p>
         </p:txBody>
       </p:sp>
       <p:pic>
         <p:nvPicPr>
-          <p:cNvPr id="8" name="Picture 7" descr="logo"/>
+          <p:cNvPr id="7" name="Picture 6" descr="logo"/>
           <p:cNvPicPr>
             <a:picLocks noChangeAspect="1"/>
           </p:cNvPicPr>
@@ -5832,6 +5719,147 @@
           </a:prstGeom>
         </p:spPr>
       </p:pic>
+      <p:sp>
+        <p:nvSpPr>
+          <p:cNvPr id="8" name="TextBox 7"/>
+          <p:cNvSpPr txBox="1"/>
+          <p:nvPr/>
+        </p:nvSpPr>
+        <p:spPr>
+          <a:xfrm>
+            <a:off x="548640" y="1554480"/>
+            <a:ext cx="11094415" cy="4617720"/>
+          </a:xfrm>
+          <a:prstGeom prst="rect">
+            <a:avLst/>
+          </a:prstGeom>
+          <a:noFill/>
+        </p:spPr>
+        <p:txBody>
+          <a:bodyPr wrap="square" anchor="t" lIns="0" rIns="0" tIns="0" bIns="0">
+            <a:spAutoFit/>
+          </a:bodyPr>
+          <a:lstStyle/>
+          <a:p>
+            <a:pPr>
+              <a:spcAft>
+                <a:spcPts val="800"/>
+              </a:spcAft>
+            </a:pPr>
+            <a:r>
+              <a:rPr sz="2100" i="0" b="0">
+                <a:solidFill>
+                  <a:srgbClr val="2B211C"/>
+                </a:solidFill>
+                <a:latin typeface="Calibri"/>
+              </a:rPr>
+              <a:t>Mr Ahmed returns. His ankles are swollen, his blood pressure is 158/96 mmHg (usually 130/80) and his creatinine has risen from 90 to 140 µmol/L. He has taken naproxen for eight days.</a:t>
+            </a:r>
+          </a:p>
+          <a:p>
+            <a:pPr>
+              <a:spcAft>
+                <a:spcPts val="800"/>
+              </a:spcAft>
+            </a:pPr>
+            <a:r>
+              <a:rPr sz="2100" i="0" b="0">
+                <a:solidFill>
+                  <a:srgbClr val="2B211C"/>
+                </a:solidFill>
+                <a:latin typeface="Calibri"/>
+              </a:rPr>
+              <a:t>Stop naproxen. Contact the doctor the same day. Recheck kidney function and potassium in a few days. Continue paracetamol.</a:t>
+            </a:r>
+          </a:p>
+          <a:p>
+            <a:pPr>
+              <a:spcAft>
+                <a:spcPts val="800"/>
+              </a:spcAft>
+            </a:pPr>
+            <a:r>
+              <a:rPr sz="2100" i="0" b="0">
+                <a:solidFill>
+                  <a:srgbClr val="2B211C"/>
+                </a:solidFill>
+                <a:latin typeface="Calibri"/>
+              </a:rPr>
+              <a:t>The reaction is </a:t>
+            </a:r>
+            <a:r>
+              <a:rPr sz="2100" i="0" b="1">
+                <a:solidFill>
+                  <a:srgbClr val="2B211C"/>
+                </a:solidFill>
+                <a:latin typeface="Calibri"/>
+              </a:rPr>
+              <a:t>Type A</a:t>
+            </a:r>
+            <a:r>
+              <a:rPr sz="2100" i="0" b="0">
+                <a:solidFill>
+                  <a:srgbClr val="2B211C"/>
+                </a:solidFill>
+                <a:latin typeface="Calibri"/>
+              </a:rPr>
+              <a:t> (predictable from pharmacology; worse with an ACE inhibitor). It is </a:t>
+            </a:r>
+            <a:r>
+              <a:rPr sz="2100" i="0" b="1">
+                <a:solidFill>
+                  <a:srgbClr val="2B211C"/>
+                </a:solidFill>
+                <a:latin typeface="Calibri"/>
+              </a:rPr>
+              <a:t>moderate</a:t>
+            </a:r>
+            <a:r>
+              <a:rPr sz="2100" i="0" b="0">
+                <a:solidFill>
+                  <a:srgbClr val="2B211C"/>
+                </a:solidFill>
+                <a:latin typeface="Calibri"/>
+              </a:rPr>
+              <a:t> in severity (treatment had to change) and </a:t>
+            </a:r>
+            <a:r>
+              <a:rPr sz="2100" i="0" b="1">
+                <a:solidFill>
+                  <a:srgbClr val="2B211C"/>
+                </a:solidFill>
+                <a:latin typeface="Calibri"/>
+              </a:rPr>
+              <a:t>not serious</a:t>
+            </a:r>
+            <a:r>
+              <a:rPr sz="2100" i="0" b="0">
+                <a:solidFill>
+                  <a:srgbClr val="2B211C"/>
+                </a:solidFill>
+                <a:latin typeface="Calibri"/>
+              </a:rPr>
+              <a:t> (no admission).</a:t>
+            </a:r>
+          </a:p>
+          <a:p>
+            <a:pPr>
+              <a:spcAft>
+                <a:spcPts val="800"/>
+              </a:spcAft>
+            </a:pPr>
+            <a:r>
+              <a:rPr sz="2100" i="0" b="0">
+                <a:solidFill>
+                  <a:srgbClr val="2B211C"/>
+                </a:solidFill>
+                <a:latin typeface="Calibri"/>
+              </a:rPr>
+              <a:t>Report the reaction to the EPVC, with the naproxen batch number, lisinopril as a concomitant drug, and the outcome. Record "NSAIDs: fluid retention and raised creatinine with ACE inhibitor" in his notes. Suggest that the doctor considers a corticosteroid injection instead of another NSAID.</a:t>
+            </a:r>
+          </a:p>
+        </p:txBody>
+      </p:sp>
     </p:spTree>
   </p:cSld>
   <p:clrMapOvr>
@@ -6043,388 +6071,7 @@
                 </a:solidFill>
                 <a:latin typeface="Calibri"/>
               </a:rPr>
-              <a:t>11 / 25</a:t>
-            </a:r>
-          </a:p>
-        </p:txBody>
-      </p:sp>
-      <p:pic>
-        <p:nvPicPr>
-          <p:cNvPr id="7" name="Picture 6" descr="logo"/>
-          <p:cNvPicPr>
-            <a:picLocks noChangeAspect="1"/>
-          </p:cNvPicPr>
-          <p:nvPr/>
-        </p:nvPicPr>
-        <p:blipFill>
-          <a:blip r:embed="rId3"/>
-          <a:stretch>
-            <a:fillRect/>
-          </a:stretch>
-        </p:blipFill>
-        <p:spPr>
-          <a:xfrm>
-            <a:off x="11247120" y="6309360"/>
-            <a:ext cx="384048" cy="384048"/>
-          </a:xfrm>
-          <a:prstGeom prst="rect">
-            <a:avLst/>
-          </a:prstGeom>
-        </p:spPr>
-      </p:pic>
-      <p:sp>
-        <p:nvSpPr>
-          <p:cNvPr id="8" name="TextBox 7"/>
-          <p:cNvSpPr txBox="1"/>
-          <p:nvPr/>
-        </p:nvSpPr>
-        <p:spPr>
-          <a:xfrm>
-            <a:off x="548640" y="1554480"/>
-            <a:ext cx="11094415" cy="4617720"/>
-          </a:xfrm>
-          <a:prstGeom prst="rect">
-            <a:avLst/>
-          </a:prstGeom>
-          <a:noFill/>
-        </p:spPr>
-        <p:txBody>
-          <a:bodyPr wrap="square" anchor="t" lIns="0" rIns="0" tIns="0" bIns="0">
-            <a:spAutoFit/>
-          </a:bodyPr>
-          <a:lstStyle/>
-          <a:p>
-            <a:pPr>
-              <a:spcAft>
-                <a:spcPts val="800"/>
-              </a:spcAft>
-            </a:pPr>
-            <a:r>
-              <a:rPr sz="2100" i="0" b="0">
-                <a:solidFill>
-                  <a:srgbClr val="2B211C"/>
-                </a:solidFill>
-                <a:latin typeface="Calibri"/>
-              </a:rPr>
-              <a:t>Mr Ahmed returns. His ankles are swollen, his blood pressure is 158/96 mmHg (usually 130/80) and his creatinine has risen from 90 to 140 µmol/L. He has taken naproxen for eight days.</a:t>
-            </a:r>
-          </a:p>
-          <a:p>
-            <a:pPr>
-              <a:spcAft>
-                <a:spcPts val="800"/>
-              </a:spcAft>
-            </a:pPr>
-            <a:r>
-              <a:rPr sz="2100" i="0" b="0">
-                <a:solidFill>
-                  <a:srgbClr val="2B211C"/>
-                </a:solidFill>
-                <a:latin typeface="Calibri"/>
-              </a:rPr>
-              <a:t>Stop naproxen. Contact the doctor the same day. Recheck kidney function and potassium in a few days. Continue paracetamol.</a:t>
-            </a:r>
-          </a:p>
-          <a:p>
-            <a:pPr>
-              <a:spcAft>
-                <a:spcPts val="800"/>
-              </a:spcAft>
-            </a:pPr>
-            <a:r>
-              <a:rPr sz="2100" i="0" b="0">
-                <a:solidFill>
-                  <a:srgbClr val="2B211C"/>
-                </a:solidFill>
-                <a:latin typeface="Calibri"/>
-              </a:rPr>
-              <a:t>The reaction is </a:t>
-            </a:r>
-            <a:r>
-              <a:rPr sz="2100" i="0" b="1">
-                <a:solidFill>
-                  <a:srgbClr val="2B211C"/>
-                </a:solidFill>
-                <a:latin typeface="Calibri"/>
-              </a:rPr>
-              <a:t>Type A</a:t>
-            </a:r>
-            <a:r>
-              <a:rPr sz="2100" i="0" b="0">
-                <a:solidFill>
-                  <a:srgbClr val="2B211C"/>
-                </a:solidFill>
-                <a:latin typeface="Calibri"/>
-              </a:rPr>
-              <a:t> (predictable from pharmacology; worse with an ACE inhibitor). It is </a:t>
-            </a:r>
-            <a:r>
-              <a:rPr sz="2100" i="0" b="1">
-                <a:solidFill>
-                  <a:srgbClr val="2B211C"/>
-                </a:solidFill>
-                <a:latin typeface="Calibri"/>
-              </a:rPr>
-              <a:t>moderate</a:t>
-            </a:r>
-            <a:r>
-              <a:rPr sz="2100" i="0" b="0">
-                <a:solidFill>
-                  <a:srgbClr val="2B211C"/>
-                </a:solidFill>
-                <a:latin typeface="Calibri"/>
-              </a:rPr>
-              <a:t> in severity (treatment had to change) and </a:t>
-            </a:r>
-            <a:r>
-              <a:rPr sz="2100" i="0" b="1">
-                <a:solidFill>
-                  <a:srgbClr val="2B211C"/>
-                </a:solidFill>
-                <a:latin typeface="Calibri"/>
-              </a:rPr>
-              <a:t>not serious</a:t>
-            </a:r>
-            <a:r>
-              <a:rPr sz="2100" i="0" b="0">
-                <a:solidFill>
-                  <a:srgbClr val="2B211C"/>
-                </a:solidFill>
-                <a:latin typeface="Calibri"/>
-              </a:rPr>
-              <a:t> (no admission).</a:t>
-            </a:r>
-          </a:p>
-          <a:p>
-            <a:pPr>
-              <a:spcAft>
-                <a:spcPts val="800"/>
-              </a:spcAft>
-            </a:pPr>
-            <a:r>
-              <a:rPr sz="2100" i="0" b="0">
-                <a:solidFill>
-                  <a:srgbClr val="2B211C"/>
-                </a:solidFill>
-                <a:latin typeface="Calibri"/>
-              </a:rPr>
-              <a:t>Report the reaction to the EPVC, with the naproxen batch number, lisinopril as a concomitant drug, and the outcome. Record "NSAIDs: fluid retention and raised creatinine with ACE inhibitor" in his notes. Suggest that the doctor considers a corticosteroid injection instead of another NSAID.</a:t>
-            </a:r>
-          </a:p>
-        </p:txBody>
-      </p:sp>
-    </p:spTree>
-  </p:cSld>
-  <p:clrMapOvr>
-    <a:masterClrMapping/>
-  </p:clrMapOvr>
-</p:sld>
-</file>
-
-<file path=ppt/slides/slide12.xml><?xml version="1.0" encoding="utf-8"?>
-<p:sld xmlns:a="http://schemas.openxmlformats.org/drawingml/2006/main" xmlns:p="http://schemas.openxmlformats.org/presentationml/2006/main" xmlns:r="http://schemas.openxmlformats.org/officeDocument/2006/relationships">
-  <p:cSld>
-    <p:bg>
-      <p:bgPr>
-        <a:solidFill>
-          <a:srgbClr val="FFFFFF"/>
-        </a:solidFill>
-        <a:effectLst/>
-      </p:bgPr>
-    </p:bg>
-    <p:spTree>
-      <p:nvGrpSpPr>
-        <p:cNvPr id="1" name=""/>
-        <p:cNvGrpSpPr/>
-        <p:nvPr/>
-      </p:nvGrpSpPr>
-      <p:grpSpPr/>
-      <p:sp>
-        <p:nvSpPr>
-          <p:cNvPr id="2" name="Oval 1"/>
-          <p:cNvSpPr/>
-          <p:nvPr/>
-        </p:nvSpPr>
-        <p:spPr>
-          <a:xfrm>
-            <a:off x="548640" y="475488"/>
-            <a:ext cx="658368" cy="658368"/>
-          </a:xfrm>
-          <a:prstGeom prst="ellipse">
-            <a:avLst/>
-          </a:prstGeom>
-          <a:solidFill>
-            <a:srgbClr val="2F6F7A"/>
-          </a:solidFill>
-          <a:ln>
-            <a:noFill/>
-          </a:ln>
-          <a:effectLst/>
-        </p:spPr>
-        <p:style>
-          <a:lnRef idx="1">
-            <a:schemeClr val="accent1"/>
-          </a:lnRef>
-          <a:fillRef idx="3">
-            <a:schemeClr val="accent1"/>
-          </a:fillRef>
-          <a:effectRef idx="2">
-            <a:schemeClr val="accent1"/>
-          </a:effectRef>
-          <a:fontRef idx="minor">
-            <a:schemeClr val="lt1"/>
-          </a:fontRef>
-        </p:style>
-        <p:txBody>
-          <a:bodyPr rtlCol="0" anchor="ctr" lIns="0" rIns="0" tIns="0" bIns="0"/>
-          <a:lstStyle/>
-          <a:p>
-            <a:pPr algn="ctr"/>
-            <a:r>
-              <a:rPr sz="1800" i="0" b="1">
-                <a:solidFill>
-                  <a:srgbClr val="FFFFFF"/>
-                </a:solidFill>
-                <a:latin typeface="Cambria"/>
-              </a:rPr>
-              <a:t>10</a:t>
-            </a:r>
-          </a:p>
-        </p:txBody>
-      </p:sp>
-      <p:sp>
-        <p:nvSpPr>
-          <p:cNvPr id="3" name="TextBox 2"/>
-          <p:cNvSpPr txBox="1"/>
-          <p:nvPr/>
-        </p:nvSpPr>
-        <p:spPr>
-          <a:xfrm>
-            <a:off x="1417319" y="438912"/>
-            <a:ext cx="10180015" cy="292608"/>
-          </a:xfrm>
-          <a:prstGeom prst="rect">
-            <a:avLst/>
-          </a:prstGeom>
-          <a:noFill/>
-        </p:spPr>
-        <p:txBody>
-          <a:bodyPr wrap="square" anchor="t" lIns="0" rIns="0" tIns="0" bIns="0">
-            <a:spAutoFit/>
-          </a:bodyPr>
-          <a:lstStyle/>
-          <a:p>
-            <a:r>
-              <a:rPr sz="1200" i="0" b="1" spc="150">
-                <a:solidFill>
-                  <a:srgbClr val="2F6F7A"/>
-                </a:solidFill>
-                <a:latin typeface="Calibri"/>
-              </a:rPr>
-              <a:t>SECTION 10</a:t>
-            </a:r>
-          </a:p>
-        </p:txBody>
-      </p:sp>
-      <p:sp>
-        <p:nvSpPr>
-          <p:cNvPr id="4" name="TextBox 3"/>
-          <p:cNvSpPr txBox="1"/>
-          <p:nvPr/>
-        </p:nvSpPr>
-        <p:spPr>
-          <a:xfrm>
-            <a:off x="1417319" y="676656"/>
-            <a:ext cx="10180015" cy="640080"/>
-          </a:xfrm>
-          <a:prstGeom prst="rect">
-            <a:avLst/>
-          </a:prstGeom>
-          <a:noFill/>
-        </p:spPr>
-        <p:txBody>
-          <a:bodyPr wrap="square" anchor="t" lIns="0" rIns="0" tIns="0" bIns="0">
-            <a:spAutoFit/>
-          </a:bodyPr>
-          <a:lstStyle/>
-          <a:p>
-            <a:r>
-              <a:rPr sz="3200" i="0" b="1">
-                <a:solidFill>
-                  <a:srgbClr val="2B211C"/>
-                </a:solidFill>
-                <a:latin typeface="Cambria"/>
-              </a:rPr>
-              <a:t>Step 2: causality (Naranjo)</a:t>
-            </a:r>
-          </a:p>
-        </p:txBody>
-      </p:sp>
-      <p:sp>
-        <p:nvSpPr>
-          <p:cNvPr id="5" name="TextBox 4"/>
-          <p:cNvSpPr txBox="1"/>
-          <p:nvPr/>
-        </p:nvSpPr>
-        <p:spPr>
-          <a:xfrm>
-            <a:off x="548640" y="6419088"/>
-            <a:ext cx="8229600" cy="274320"/>
-          </a:xfrm>
-          <a:prstGeom prst="rect">
-            <a:avLst/>
-          </a:prstGeom>
-          <a:noFill/>
-        </p:spPr>
-        <p:txBody>
-          <a:bodyPr wrap="square" anchor="t" lIns="0" rIns="0" tIns="0" bIns="0">
-            <a:spAutoFit/>
-          </a:bodyPr>
-          <a:lstStyle/>
-          <a:p>
-            <a:r>
-              <a:rPr sz="1200" i="0" b="0">
-                <a:solidFill>
-                  <a:srgbClr val="6E625B"/>
-                </a:solidFill>
-                <a:latin typeface="Calibri"/>
-              </a:rPr>
-              <a:t>Drug Information  ·  Section 10  ·  Applied Case: Answering a Real Drug Question</a:t>
-            </a:r>
-          </a:p>
-        </p:txBody>
-      </p:sp>
-      <p:sp>
-        <p:nvSpPr>
-          <p:cNvPr id="6" name="TextBox 5"/>
-          <p:cNvSpPr txBox="1"/>
-          <p:nvPr/>
-        </p:nvSpPr>
-        <p:spPr>
-          <a:xfrm>
-            <a:off x="10058400" y="6419088"/>
-            <a:ext cx="1097280" cy="274320"/>
-          </a:xfrm>
-          <a:prstGeom prst="rect">
-            <a:avLst/>
-          </a:prstGeom>
-          <a:noFill/>
-        </p:spPr>
-        <p:txBody>
-          <a:bodyPr wrap="square" anchor="t" lIns="0" rIns="0" tIns="0" bIns="0">
-            <a:spAutoFit/>
-          </a:bodyPr>
-          <a:lstStyle/>
-          <a:p>
-            <a:pPr algn="r"/>
-            <a:r>
-              <a:rPr sz="1200" i="0" b="1">
-                <a:solidFill>
-                  <a:srgbClr val="6E625B"/>
-                </a:solidFill>
-                <a:latin typeface="Calibri"/>
-              </a:rPr>
-              <a:t>12 / 25</a:t>
+              <a:t>11 / 24</a:t>
             </a:r>
           </a:p>
         </p:txBody>
@@ -6483,7 +6130,7 @@
                     <a:lstStyle/>
                     <a:p>
                       <a:r>
-                        <a:rPr sz="1600" i="0" b="1">
+                        <a:rPr sz="1700" i="0" b="1">
                           <a:solidFill>
                             <a:srgbClr val="FFFFFF"/>
                           </a:solidFill>
@@ -6505,7 +6152,7 @@
                     <a:lstStyle/>
                     <a:p>
                       <a:r>
-                        <a:rPr sz="1600" i="0" b="1">
+                        <a:rPr sz="1700" i="0" b="1">
                           <a:solidFill>
                             <a:srgbClr val="FFFFFF"/>
                           </a:solidFill>
@@ -6527,7 +6174,7 @@
                     <a:lstStyle/>
                     <a:p>
                       <a:r>
-                        <a:rPr sz="1600" i="0" b="1">
+                        <a:rPr sz="1700" i="0" b="1">
                           <a:solidFill>
                             <a:srgbClr val="FFFFFF"/>
                           </a:solidFill>
@@ -6551,7 +6198,7 @@
                     <a:lstStyle/>
                     <a:p>
                       <a:r>
-                        <a:rPr sz="1700" i="0" b="1">
+                        <a:rPr sz="1800" i="0" b="1">
                           <a:solidFill>
                             <a:srgbClr val="2B211C"/>
                           </a:solidFill>
@@ -6573,7 +6220,7 @@
                     <a:lstStyle/>
                     <a:p>
                       <a:r>
-                        <a:rPr sz="1700" i="0" b="0">
+                        <a:rPr sz="1800" i="0" b="0">
                           <a:solidFill>
                             <a:srgbClr val="2B211C"/>
                           </a:solidFill>
@@ -6595,7 +6242,7 @@
                     <a:lstStyle/>
                     <a:p>
                       <a:r>
-                        <a:rPr sz="1700" i="0" b="0">
+                        <a:rPr sz="1800" i="0" b="0">
                           <a:solidFill>
                             <a:srgbClr val="2B211C"/>
                           </a:solidFill>
@@ -6619,7 +6266,7 @@
                     <a:lstStyle/>
                     <a:p>
                       <a:r>
-                        <a:rPr sz="1700" i="0" b="1">
+                        <a:rPr sz="1800" i="0" b="1">
                           <a:solidFill>
                             <a:srgbClr val="2B211C"/>
                           </a:solidFill>
@@ -6641,7 +6288,7 @@
                     <a:lstStyle/>
                     <a:p>
                       <a:r>
-                        <a:rPr sz="1700" i="0" b="0">
+                        <a:rPr sz="1800" i="0" b="0">
                           <a:solidFill>
                             <a:srgbClr val="2B211C"/>
                           </a:solidFill>
@@ -6663,7 +6310,7 @@
                     <a:lstStyle/>
                     <a:p>
                       <a:r>
-                        <a:rPr sz="1700" i="0" b="0">
+                        <a:rPr sz="1800" i="0" b="0">
                           <a:solidFill>
                             <a:srgbClr val="2B211C"/>
                           </a:solidFill>
@@ -6687,7 +6334,7 @@
                     <a:lstStyle/>
                     <a:p>
                       <a:r>
-                        <a:rPr sz="1700" i="0" b="1">
+                        <a:rPr sz="1800" i="0" b="1">
                           <a:solidFill>
                             <a:srgbClr val="2B211C"/>
                           </a:solidFill>
@@ -6709,7 +6356,7 @@
                     <a:lstStyle/>
                     <a:p>
                       <a:r>
-                        <a:rPr sz="1700" i="0" b="0">
+                        <a:rPr sz="1800" i="0" b="0">
                           <a:solidFill>
                             <a:srgbClr val="2B211C"/>
                           </a:solidFill>
@@ -6731,7 +6378,7 @@
                     <a:lstStyle/>
                     <a:p>
                       <a:r>
-                        <a:rPr sz="1700" i="0" b="0">
+                        <a:rPr sz="1800" i="0" b="0">
                           <a:solidFill>
                             <a:srgbClr val="2B211C"/>
                           </a:solidFill>
@@ -6755,7 +6402,7 @@
                     <a:lstStyle/>
                     <a:p>
                       <a:r>
-                        <a:rPr sz="1700" i="0" b="1">
+                        <a:rPr sz="1800" i="0" b="1">
                           <a:solidFill>
                             <a:srgbClr val="2B211C"/>
                           </a:solidFill>
@@ -6777,7 +6424,7 @@
                     <a:lstStyle/>
                     <a:p>
                       <a:r>
-                        <a:rPr sz="1700" i="0" b="0">
+                        <a:rPr sz="1800" i="0" b="0">
                           <a:solidFill>
                             <a:srgbClr val="2B211C"/>
                           </a:solidFill>
@@ -6799,7 +6446,7 @@
                     <a:lstStyle/>
                     <a:p>
                       <a:r>
-                        <a:rPr sz="1700" i="0" b="0">
+                        <a:rPr sz="1800" i="0" b="0">
                           <a:solidFill>
                             <a:srgbClr val="2B211C"/>
                           </a:solidFill>
@@ -6823,7 +6470,7 @@
                     <a:lstStyle/>
                     <a:p>
                       <a:r>
-                        <a:rPr sz="1700" i="0" b="1">
+                        <a:rPr sz="1800" i="0" b="1">
                           <a:solidFill>
                             <a:srgbClr val="2B211C"/>
                           </a:solidFill>
@@ -6845,7 +6492,7 @@
                     <a:lstStyle/>
                     <a:p>
                       <a:r>
-                        <a:rPr sz="1700" i="0" b="0">
+                        <a:rPr sz="1800" i="0" b="0">
                           <a:solidFill>
                             <a:srgbClr val="2B211C"/>
                           </a:solidFill>
@@ -6867,7 +6514,7 @@
                     <a:lstStyle/>
                     <a:p>
                       <a:r>
-                        <a:rPr sz="1700" i="0" b="0">
+                        <a:rPr sz="1800" i="0" b="0">
                           <a:solidFill>
                             <a:srgbClr val="2B211C"/>
                           </a:solidFill>
@@ -6891,7 +6538,7 @@
                     <a:lstStyle/>
                     <a:p>
                       <a:r>
-                        <a:rPr sz="1700" i="0" b="1">
+                        <a:rPr sz="1800" i="0" b="1">
                           <a:solidFill>
                             <a:srgbClr val="2B211C"/>
                           </a:solidFill>
@@ -6913,7 +6560,7 @@
                     <a:lstStyle/>
                     <a:p>
                       <a:r>
-                        <a:rPr sz="1700" i="0" b="0">
+                        <a:rPr sz="1800" i="0" b="0">
                           <a:solidFill>
                             <a:srgbClr val="2B211C"/>
                           </a:solidFill>
@@ -6935,7 +6582,7 @@
                     <a:lstStyle/>
                     <a:p>
                       <a:r>
-                        <a:rPr sz="1700" i="0" b="0">
+                        <a:rPr sz="1800" i="0" b="0">
                           <a:solidFill>
                             <a:srgbClr val="2B211C"/>
                           </a:solidFill>
@@ -6959,7 +6606,7 @@
                     <a:lstStyle/>
                     <a:p>
                       <a:r>
-                        <a:rPr sz="1700" i="0" b="1">
+                        <a:rPr sz="1800" i="0" b="1">
                           <a:solidFill>
                             <a:srgbClr val="2B211C"/>
                           </a:solidFill>
@@ -6993,7 +6640,7 @@
                     <a:lstStyle/>
                     <a:p>
                       <a:r>
-                        <a:rPr sz="1700" i="0" b="1">
+                        <a:rPr sz="1800" i="0" b="1">
                           <a:solidFill>
                             <a:srgbClr val="2B211C"/>
                           </a:solidFill>
@@ -7022,6 +6669,381 @@
 </p:sld>
 </file>
 
+<file path=ppt/slides/slide12.xml><?xml version="1.0" encoding="utf-8"?>
+<p:sld xmlns:a="http://schemas.openxmlformats.org/drawingml/2006/main" xmlns:p="http://schemas.openxmlformats.org/presentationml/2006/main" xmlns:r="http://schemas.openxmlformats.org/officeDocument/2006/relationships">
+  <p:cSld>
+    <p:bg>
+      <p:bgPr>
+        <a:solidFill>
+          <a:srgbClr val="FFFFFF"/>
+        </a:solidFill>
+        <a:effectLst/>
+      </p:bgPr>
+    </p:bg>
+    <p:spTree>
+      <p:nvGrpSpPr>
+        <p:cNvPr id="1" name=""/>
+        <p:cNvGrpSpPr/>
+        <p:nvPr/>
+      </p:nvGrpSpPr>
+      <p:grpSpPr/>
+      <p:sp>
+        <p:nvSpPr>
+          <p:cNvPr id="2" name="Oval 1"/>
+          <p:cNvSpPr/>
+          <p:nvPr/>
+        </p:nvSpPr>
+        <p:spPr>
+          <a:xfrm>
+            <a:off x="548640" y="475488"/>
+            <a:ext cx="658368" cy="658368"/>
+          </a:xfrm>
+          <a:prstGeom prst="ellipse">
+            <a:avLst/>
+          </a:prstGeom>
+          <a:solidFill>
+            <a:srgbClr val="2F6F7A"/>
+          </a:solidFill>
+          <a:ln>
+            <a:noFill/>
+          </a:ln>
+          <a:effectLst/>
+        </p:spPr>
+        <p:style>
+          <a:lnRef idx="1">
+            <a:schemeClr val="accent1"/>
+          </a:lnRef>
+          <a:fillRef idx="3">
+            <a:schemeClr val="accent1"/>
+          </a:fillRef>
+          <a:effectRef idx="2">
+            <a:schemeClr val="accent1"/>
+          </a:effectRef>
+          <a:fontRef idx="minor">
+            <a:schemeClr val="lt1"/>
+          </a:fontRef>
+        </p:style>
+        <p:txBody>
+          <a:bodyPr rtlCol="0" anchor="ctr" lIns="0" rIns="0" tIns="0" bIns="0"/>
+          <a:lstStyle/>
+          <a:p>
+            <a:pPr algn="ctr"/>
+            <a:r>
+              <a:rPr sz="1800" i="0" b="1">
+                <a:solidFill>
+                  <a:srgbClr val="FFFFFF"/>
+                </a:solidFill>
+                <a:latin typeface="Cambria"/>
+              </a:rPr>
+              <a:t>10</a:t>
+            </a:r>
+          </a:p>
+        </p:txBody>
+      </p:sp>
+      <p:sp>
+        <p:nvSpPr>
+          <p:cNvPr id="3" name="TextBox 2"/>
+          <p:cNvSpPr txBox="1"/>
+          <p:nvPr/>
+        </p:nvSpPr>
+        <p:spPr>
+          <a:xfrm>
+            <a:off x="1417319" y="438912"/>
+            <a:ext cx="10180015" cy="292608"/>
+          </a:xfrm>
+          <a:prstGeom prst="rect">
+            <a:avLst/>
+          </a:prstGeom>
+          <a:noFill/>
+        </p:spPr>
+        <p:txBody>
+          <a:bodyPr wrap="square" anchor="t" lIns="0" rIns="0" tIns="0" bIns="0">
+            <a:spAutoFit/>
+          </a:bodyPr>
+          <a:lstStyle/>
+          <a:p>
+            <a:r>
+              <a:rPr sz="1200" i="0" b="1" spc="150">
+                <a:solidFill>
+                  <a:srgbClr val="2F6F7A"/>
+                </a:solidFill>
+                <a:latin typeface="Calibri"/>
+              </a:rPr>
+              <a:t>SECTION 10</a:t>
+            </a:r>
+          </a:p>
+        </p:txBody>
+      </p:sp>
+      <p:sp>
+        <p:nvSpPr>
+          <p:cNvPr id="4" name="TextBox 3"/>
+          <p:cNvSpPr txBox="1"/>
+          <p:nvPr/>
+        </p:nvSpPr>
+        <p:spPr>
+          <a:xfrm>
+            <a:off x="1417319" y="676656"/>
+            <a:ext cx="10180015" cy="640080"/>
+          </a:xfrm>
+          <a:prstGeom prst="rect">
+            <a:avLst/>
+          </a:prstGeom>
+          <a:noFill/>
+        </p:spPr>
+        <p:txBody>
+          <a:bodyPr wrap="square" anchor="t" lIns="0" rIns="0" tIns="0" bIns="0">
+            <a:spAutoFit/>
+          </a:bodyPr>
+          <a:lstStyle/>
+          <a:p>
+            <a:r>
+              <a:rPr sz="3200" i="0" b="1">
+                <a:solidFill>
+                  <a:srgbClr val="2B211C"/>
+                </a:solidFill>
+                <a:latin typeface="Cambria"/>
+              </a:rPr>
+              <a:t>Ten Days Later: A Suspected ADR</a:t>
+            </a:r>
+          </a:p>
+        </p:txBody>
+      </p:sp>
+      <p:sp>
+        <p:nvSpPr>
+          <p:cNvPr id="5" name="TextBox 4"/>
+          <p:cNvSpPr txBox="1"/>
+          <p:nvPr/>
+        </p:nvSpPr>
+        <p:spPr>
+          <a:xfrm>
+            <a:off x="548640" y="6419088"/>
+            <a:ext cx="8229600" cy="274320"/>
+          </a:xfrm>
+          <a:prstGeom prst="rect">
+            <a:avLst/>
+          </a:prstGeom>
+          <a:noFill/>
+        </p:spPr>
+        <p:txBody>
+          <a:bodyPr wrap="square" anchor="t" lIns="0" rIns="0" tIns="0" bIns="0">
+            <a:spAutoFit/>
+          </a:bodyPr>
+          <a:lstStyle/>
+          <a:p>
+            <a:r>
+              <a:rPr sz="1200" i="0" b="0">
+                <a:solidFill>
+                  <a:srgbClr val="6E625B"/>
+                </a:solidFill>
+                <a:latin typeface="Calibri"/>
+              </a:rPr>
+              <a:t>Drug Information  ·  Section 10  ·  Applied Case: Answering a Real Drug Question</a:t>
+            </a:r>
+          </a:p>
+        </p:txBody>
+      </p:sp>
+      <p:sp>
+        <p:nvSpPr>
+          <p:cNvPr id="6" name="TextBox 5"/>
+          <p:cNvSpPr txBox="1"/>
+          <p:nvPr/>
+        </p:nvSpPr>
+        <p:spPr>
+          <a:xfrm>
+            <a:off x="10058400" y="6419088"/>
+            <a:ext cx="1097280" cy="274320"/>
+          </a:xfrm>
+          <a:prstGeom prst="rect">
+            <a:avLst/>
+          </a:prstGeom>
+          <a:noFill/>
+        </p:spPr>
+        <p:txBody>
+          <a:bodyPr wrap="square" anchor="t" lIns="0" rIns="0" tIns="0" bIns="0">
+            <a:spAutoFit/>
+          </a:bodyPr>
+          <a:lstStyle/>
+          <a:p>
+            <a:pPr algn="r"/>
+            <a:r>
+              <a:rPr sz="1200" i="0" b="1">
+                <a:solidFill>
+                  <a:srgbClr val="6E625B"/>
+                </a:solidFill>
+                <a:latin typeface="Calibri"/>
+              </a:rPr>
+              <a:t>12 / 24</a:t>
+            </a:r>
+          </a:p>
+        </p:txBody>
+      </p:sp>
+      <p:pic>
+        <p:nvPicPr>
+          <p:cNvPr id="7" name="Picture 6" descr="logo"/>
+          <p:cNvPicPr>
+            <a:picLocks noChangeAspect="1"/>
+          </p:cNvPicPr>
+          <p:nvPr/>
+        </p:nvPicPr>
+        <p:blipFill>
+          <a:blip r:embed="rId3"/>
+          <a:stretch>
+            <a:fillRect/>
+          </a:stretch>
+        </p:blipFill>
+        <p:spPr>
+          <a:xfrm>
+            <a:off x="11247120" y="6309360"/>
+            <a:ext cx="384048" cy="384048"/>
+          </a:xfrm>
+          <a:prstGeom prst="rect">
+            <a:avLst/>
+          </a:prstGeom>
+        </p:spPr>
+      </p:pic>
+      <p:sp>
+        <p:nvSpPr>
+          <p:cNvPr id="8" name="Rounded Rectangle 7"/>
+          <p:cNvSpPr/>
+          <p:nvPr/>
+        </p:nvSpPr>
+        <p:spPr>
+          <a:xfrm>
+            <a:off x="1645919" y="2103120"/>
+            <a:ext cx="8899855" cy="2377440"/>
+          </a:xfrm>
+          <a:prstGeom prst="roundRect">
+            <a:avLst>
+              <a:gd name="adj" fmla="val 6000"/>
+            </a:avLst>
+          </a:prstGeom>
+          <a:solidFill>
+            <a:srgbClr val="FBEAEA"/>
+          </a:solidFill>
+          <a:ln>
+            <a:noFill/>
+          </a:ln>
+          <a:effectLst/>
+        </p:spPr>
+        <p:style>
+          <a:lnRef idx="1">
+            <a:schemeClr val="accent1"/>
+          </a:lnRef>
+          <a:fillRef idx="3">
+            <a:schemeClr val="accent1"/>
+          </a:fillRef>
+          <a:effectRef idx="2">
+            <a:schemeClr val="accent1"/>
+          </a:effectRef>
+          <a:fontRef idx="minor">
+            <a:schemeClr val="lt1"/>
+          </a:fontRef>
+        </p:style>
+        <p:txBody>
+          <a:bodyPr rtlCol="0" anchor="ctr"/>
+          <a:lstStyle/>
+          <a:p>
+            <a:pPr algn="ctr"/>
+          </a:p>
+        </p:txBody>
+      </p:sp>
+      <p:sp>
+        <p:nvSpPr>
+          <p:cNvPr id="9" name="Rounded Rectangle 8"/>
+          <p:cNvSpPr/>
+          <p:nvPr/>
+        </p:nvSpPr>
+        <p:spPr>
+          <a:xfrm>
+            <a:off x="1920239" y="2331720"/>
+            <a:ext cx="1074420" cy="347472"/>
+          </a:xfrm>
+          <a:prstGeom prst="roundRect">
+            <a:avLst>
+              <a:gd name="adj" fmla="val 50000"/>
+            </a:avLst>
+          </a:prstGeom>
+          <a:solidFill>
+            <a:srgbClr val="B3261E"/>
+          </a:solidFill>
+          <a:ln>
+            <a:noFill/>
+          </a:ln>
+          <a:effectLst/>
+        </p:spPr>
+        <p:style>
+          <a:lnRef idx="1">
+            <a:schemeClr val="accent1"/>
+          </a:lnRef>
+          <a:fillRef idx="3">
+            <a:schemeClr val="accent1"/>
+          </a:fillRef>
+          <a:effectRef idx="2">
+            <a:schemeClr val="accent1"/>
+          </a:effectRef>
+          <a:fontRef idx="minor">
+            <a:schemeClr val="lt1"/>
+          </a:fontRef>
+        </p:style>
+        <p:txBody>
+          <a:bodyPr rtlCol="0" anchor="ctr" lIns="0" rIns="0" tIns="0" bIns="0"/>
+          <a:lstStyle/>
+          <a:p>
+            <a:pPr algn="ctr"/>
+            <a:r>
+              <a:rPr sz="1200" i="0" b="1">
+                <a:solidFill>
+                  <a:srgbClr val="FFFFFF"/>
+                </a:solidFill>
+                <a:latin typeface="Calibri"/>
+              </a:rPr>
+              <a:t>CAUTION</a:t>
+            </a:r>
+          </a:p>
+        </p:txBody>
+      </p:sp>
+      <p:sp>
+        <p:nvSpPr>
+          <p:cNvPr id="10" name="TextBox 9"/>
+          <p:cNvSpPr txBox="1"/>
+          <p:nvPr/>
+        </p:nvSpPr>
+        <p:spPr>
+          <a:xfrm>
+            <a:off x="1920239" y="2788920"/>
+            <a:ext cx="8351215" cy="1508760"/>
+          </a:xfrm>
+          <a:prstGeom prst="rect">
+            <a:avLst/>
+          </a:prstGeom>
+          <a:noFill/>
+        </p:spPr>
+        <p:txBody>
+          <a:bodyPr wrap="square" anchor="t" lIns="0" rIns="0" tIns="0" bIns="0">
+            <a:spAutoFit/>
+          </a:bodyPr>
+          <a:lstStyle/>
+          <a:p>
+            <a:r>
+              <a:rPr sz="2600" i="0" b="0">
+                <a:solidFill>
+                  <a:srgbClr val="2B211C"/>
+                </a:solidFill>
+                <a:latin typeface="Calibri"/>
+              </a:rPr>
+              <a:t>The combination of an NSAID, an ACE inhibitor or ARB, and a diuretic is especially risky for the kidneys ("triple whammy"). Avoid it, or monitor closely.</a:t>
+            </a:r>
+          </a:p>
+        </p:txBody>
+      </p:sp>
+    </p:spTree>
+  </p:cSld>
+  <p:clrMapOvr>
+    <a:masterClrMapping/>
+  </p:clrMapOvr>
+</p:sld>
+</file>
+
 <file path=ppt/slides/slide13.xml><?xml version="1.0" encoding="utf-8"?>
 <p:sld xmlns:a="http://schemas.openxmlformats.org/drawingml/2006/main" xmlns:p="http://schemas.openxmlformats.org/presentationml/2006/main" xmlns:r="http://schemas.openxmlformats.org/officeDocument/2006/relationships">
   <p:cSld>
@@ -7122,7 +7144,7 @@
                 </a:solidFill>
                 <a:latin typeface="Calibri"/>
               </a:rPr>
-              <a:t>SECTION 10</a:t>
+              <a:t>SECTION 10  ·  QUESTION 1 OF 5</a:t>
             </a:r>
           </a:p>
         </p:txBody>
@@ -7156,7 +7178,7 @@
                 </a:solidFill>
                 <a:latin typeface="Cambria"/>
               </a:rPr>
-              <a:t>Ten Days Later: A Suspected ADR</a:t>
+              <a:t>Your turn</a:t>
             </a:r>
           </a:p>
         </p:txBody>
@@ -7225,7 +7247,7 @@
                 </a:solidFill>
                 <a:latin typeface="Calibri"/>
               </a:rPr>
-              <a:t>13 / 25</a:t>
+              <a:t>13 / 24</a:t>
             </a:r>
           </a:p>
         </p:txBody>
@@ -7256,22 +7278,56 @@
       </p:pic>
       <p:sp>
         <p:nvSpPr>
-          <p:cNvPr id="8" name="Rounded Rectangle 7"/>
+          <p:cNvPr id="8" name="TextBox 7"/>
+          <p:cNvSpPr txBox="1"/>
+          <p:nvPr/>
+        </p:nvSpPr>
+        <p:spPr>
+          <a:xfrm>
+            <a:off x="548640" y="1554480"/>
+            <a:ext cx="11094415" cy="1005840"/>
+          </a:xfrm>
+          <a:prstGeom prst="rect">
+            <a:avLst/>
+          </a:prstGeom>
+          <a:noFill/>
+        </p:spPr>
+        <p:txBody>
+          <a:bodyPr wrap="square" anchor="t" lIns="0" rIns="0" tIns="0" bIns="0">
+            <a:spAutoFit/>
+          </a:bodyPr>
+          <a:lstStyle/>
+          <a:p>
+            <a:r>
+              <a:rPr sz="2400" i="0" b="1">
+                <a:solidFill>
+                  <a:srgbClr val="2B211C"/>
+                </a:solidFill>
+                <a:latin typeface="Calibri"/>
+              </a:rPr>
+              <a:t>What was the real question behind the physiotherapist's call?</a:t>
+            </a:r>
+          </a:p>
+        </p:txBody>
+      </p:sp>
+      <p:sp>
+        <p:nvSpPr>
+          <p:cNvPr id="9" name="Rounded Rectangle 8"/>
           <p:cNvSpPr/>
           <p:nvPr/>
         </p:nvSpPr>
         <p:spPr>
           <a:xfrm>
-            <a:off x="1645919" y="2103120"/>
-            <a:ext cx="8899855" cy="2377440"/>
+            <a:off x="548640" y="2697480"/>
+            <a:ext cx="11094415" cy="640080"/>
           </a:xfrm>
           <a:prstGeom prst="roundRect">
             <a:avLst>
-              <a:gd name="adj" fmla="val 6000"/>
+              <a:gd name="adj" fmla="val 18000"/>
             </a:avLst>
           </a:prstGeom>
           <a:solidFill>
-            <a:srgbClr val="FBEAEA"/>
+            <a:srgbClr val="FAF4F2"/>
           </a:solidFill>
           <a:ln>
             <a:noFill/>
@@ -7302,22 +7358,20 @@
       </p:sp>
       <p:sp>
         <p:nvSpPr>
-          <p:cNvPr id="9" name="Rounded Rectangle 8"/>
+          <p:cNvPr id="10" name="Oval 9"/>
           <p:cNvSpPr/>
           <p:nvPr/>
         </p:nvSpPr>
         <p:spPr>
           <a:xfrm>
-            <a:off x="1920239" y="2331720"/>
-            <a:ext cx="1074420" cy="347472"/>
-          </a:xfrm>
-          <a:prstGeom prst="roundRect">
-            <a:avLst>
-              <a:gd name="adj" fmla="val 50000"/>
-            </a:avLst>
+            <a:off x="713232" y="2807208"/>
+            <a:ext cx="420624" cy="420624"/>
+          </a:xfrm>
+          <a:prstGeom prst="ellipse">
+            <a:avLst/>
           </a:prstGeom>
           <a:solidFill>
-            <a:srgbClr val="B3261E"/>
+            <a:srgbClr val="A4472B"/>
           </a:solidFill>
           <a:ln>
             <a:noFill/>
@@ -7344,27 +7398,27 @@
           <a:p>
             <a:pPr algn="ctr"/>
             <a:r>
-              <a:rPr sz="1200" i="0" b="1">
+              <a:rPr sz="1500" i="0" b="1">
                 <a:solidFill>
                   <a:srgbClr val="FFFFFF"/>
                 </a:solidFill>
                 <a:latin typeface="Calibri"/>
               </a:rPr>
-              <a:t>CAUTION</a:t>
-            </a:r>
-          </a:p>
-        </p:txBody>
-      </p:sp>
-      <p:sp>
-        <p:nvSpPr>
-          <p:cNvPr id="10" name="TextBox 9"/>
+              <a:t>A</a:t>
+            </a:r>
+          </a:p>
+        </p:txBody>
+      </p:sp>
+      <p:sp>
+        <p:nvSpPr>
+          <p:cNvPr id="11" name="TextBox 10"/>
           <p:cNvSpPr txBox="1"/>
           <p:nvPr/>
         </p:nvSpPr>
         <p:spPr>
           <a:xfrm>
-            <a:off x="1920239" y="2788920"/>
-            <a:ext cx="8351215" cy="1508760"/>
+            <a:off x="1371600" y="2697480"/>
+            <a:ext cx="10088575" cy="640080"/>
           </a:xfrm>
           <a:prstGeom prst="rect">
             <a:avLst/>
@@ -7372,19 +7426,418 @@
           <a:noFill/>
         </p:spPr>
         <p:txBody>
-          <a:bodyPr wrap="square" anchor="t" lIns="0" rIns="0" tIns="0" bIns="0">
+          <a:bodyPr wrap="square" anchor="ctr" lIns="0" rIns="0" tIns="0" bIns="0">
             <a:spAutoFit/>
           </a:bodyPr>
           <a:lstStyle/>
           <a:p>
             <a:r>
-              <a:rPr sz="2600" i="0" b="0">
+              <a:rPr sz="1900" i="0" b="0">
                 <a:solidFill>
                   <a:srgbClr val="2B211C"/>
                 </a:solidFill>
                 <a:latin typeface="Calibri"/>
               </a:rPr>
-              <a:t>The combination of an NSAID, an ACE inhibitor or ARB, and a diuretic is especially risky for the kidneys ("triple whammy"). Avoid it, or monitor closely.</a:t>
+              <a:t>A list of every painkiller</a:t>
+            </a:r>
+          </a:p>
+        </p:txBody>
+      </p:sp>
+      <p:sp>
+        <p:nvSpPr>
+          <p:cNvPr id="12" name="Rounded Rectangle 11"/>
+          <p:cNvSpPr/>
+          <p:nvPr/>
+        </p:nvSpPr>
+        <p:spPr>
+          <a:xfrm>
+            <a:off x="548640" y="3465576"/>
+            <a:ext cx="11094415" cy="640080"/>
+          </a:xfrm>
+          <a:prstGeom prst="roundRect">
+            <a:avLst>
+              <a:gd name="adj" fmla="val 18000"/>
+            </a:avLst>
+          </a:prstGeom>
+          <a:solidFill>
+            <a:srgbClr val="FAF4F2"/>
+          </a:solidFill>
+          <a:ln>
+            <a:noFill/>
+          </a:ln>
+          <a:effectLst/>
+        </p:spPr>
+        <p:style>
+          <a:lnRef idx="1">
+            <a:schemeClr val="accent1"/>
+          </a:lnRef>
+          <a:fillRef idx="3">
+            <a:schemeClr val="accent1"/>
+          </a:fillRef>
+          <a:effectRef idx="2">
+            <a:schemeClr val="accent1"/>
+          </a:effectRef>
+          <a:fontRef idx="minor">
+            <a:schemeClr val="lt1"/>
+          </a:fontRef>
+        </p:style>
+        <p:txBody>
+          <a:bodyPr rtlCol="0" anchor="ctr"/>
+          <a:lstStyle/>
+          <a:p>
+            <a:pPr algn="ctr"/>
+          </a:p>
+        </p:txBody>
+      </p:sp>
+      <p:sp>
+        <p:nvSpPr>
+          <p:cNvPr id="13" name="Oval 12"/>
+          <p:cNvSpPr/>
+          <p:nvPr/>
+        </p:nvSpPr>
+        <p:spPr>
+          <a:xfrm>
+            <a:off x="713232" y="3575304"/>
+            <a:ext cx="420624" cy="420624"/>
+          </a:xfrm>
+          <a:prstGeom prst="ellipse">
+            <a:avLst/>
+          </a:prstGeom>
+          <a:solidFill>
+            <a:srgbClr val="A4472B"/>
+          </a:solidFill>
+          <a:ln>
+            <a:noFill/>
+          </a:ln>
+          <a:effectLst/>
+        </p:spPr>
+        <p:style>
+          <a:lnRef idx="1">
+            <a:schemeClr val="accent1"/>
+          </a:lnRef>
+          <a:fillRef idx="3">
+            <a:schemeClr val="accent1"/>
+          </a:fillRef>
+          <a:effectRef idx="2">
+            <a:schemeClr val="accent1"/>
+          </a:effectRef>
+          <a:fontRef idx="minor">
+            <a:schemeClr val="lt1"/>
+          </a:fontRef>
+        </p:style>
+        <p:txBody>
+          <a:bodyPr rtlCol="0" anchor="ctr" lIns="0" rIns="0" tIns="0" bIns="0"/>
+          <a:lstStyle/>
+          <a:p>
+            <a:pPr algn="ctr"/>
+            <a:r>
+              <a:rPr sz="1500" i="0" b="1">
+                <a:solidFill>
+                  <a:srgbClr val="FFFFFF"/>
+                </a:solidFill>
+                <a:latin typeface="Calibri"/>
+              </a:rPr>
+              <a:t>B</a:t>
+            </a:r>
+          </a:p>
+        </p:txBody>
+      </p:sp>
+      <p:sp>
+        <p:nvSpPr>
+          <p:cNvPr id="14" name="TextBox 13"/>
+          <p:cNvSpPr txBox="1"/>
+          <p:nvPr/>
+        </p:nvSpPr>
+        <p:spPr>
+          <a:xfrm>
+            <a:off x="1371600" y="3465576"/>
+            <a:ext cx="10088575" cy="640080"/>
+          </a:xfrm>
+          <a:prstGeom prst="rect">
+            <a:avLst/>
+          </a:prstGeom>
+          <a:noFill/>
+        </p:spPr>
+        <p:txBody>
+          <a:bodyPr wrap="square" anchor="ctr" lIns="0" rIns="0" tIns="0" bIns="0">
+            <a:spAutoFit/>
+          </a:bodyPr>
+          <a:lstStyle/>
+          <a:p>
+            <a:r>
+              <a:rPr sz="1900" i="0" b="0">
+                <a:solidFill>
+                  <a:srgbClr val="2B211C"/>
+                </a:solidFill>
+                <a:latin typeface="Calibri"/>
+              </a:rPr>
+              <a:t>Safe pain control so the patient can exercise</a:t>
+            </a:r>
+          </a:p>
+        </p:txBody>
+      </p:sp>
+      <p:sp>
+        <p:nvSpPr>
+          <p:cNvPr id="15" name="Rounded Rectangle 14"/>
+          <p:cNvSpPr/>
+          <p:nvPr/>
+        </p:nvSpPr>
+        <p:spPr>
+          <a:xfrm>
+            <a:off x="548640" y="4233672"/>
+            <a:ext cx="11094415" cy="640080"/>
+          </a:xfrm>
+          <a:prstGeom prst="roundRect">
+            <a:avLst>
+              <a:gd name="adj" fmla="val 18000"/>
+            </a:avLst>
+          </a:prstGeom>
+          <a:solidFill>
+            <a:srgbClr val="FAF4F2"/>
+          </a:solidFill>
+          <a:ln>
+            <a:noFill/>
+          </a:ln>
+          <a:effectLst/>
+        </p:spPr>
+        <p:style>
+          <a:lnRef idx="1">
+            <a:schemeClr val="accent1"/>
+          </a:lnRef>
+          <a:fillRef idx="3">
+            <a:schemeClr val="accent1"/>
+          </a:fillRef>
+          <a:effectRef idx="2">
+            <a:schemeClr val="accent1"/>
+          </a:effectRef>
+          <a:fontRef idx="minor">
+            <a:schemeClr val="lt1"/>
+          </a:fontRef>
+        </p:style>
+        <p:txBody>
+          <a:bodyPr rtlCol="0" anchor="ctr"/>
+          <a:lstStyle/>
+          <a:p>
+            <a:pPr algn="ctr"/>
+          </a:p>
+        </p:txBody>
+      </p:sp>
+      <p:sp>
+        <p:nvSpPr>
+          <p:cNvPr id="16" name="Oval 15"/>
+          <p:cNvSpPr/>
+          <p:nvPr/>
+        </p:nvSpPr>
+        <p:spPr>
+          <a:xfrm>
+            <a:off x="713232" y="4343400"/>
+            <a:ext cx="420624" cy="420624"/>
+          </a:xfrm>
+          <a:prstGeom prst="ellipse">
+            <a:avLst/>
+          </a:prstGeom>
+          <a:solidFill>
+            <a:srgbClr val="A4472B"/>
+          </a:solidFill>
+          <a:ln>
+            <a:noFill/>
+          </a:ln>
+          <a:effectLst/>
+        </p:spPr>
+        <p:style>
+          <a:lnRef idx="1">
+            <a:schemeClr val="accent1"/>
+          </a:lnRef>
+          <a:fillRef idx="3">
+            <a:schemeClr val="accent1"/>
+          </a:fillRef>
+          <a:effectRef idx="2">
+            <a:schemeClr val="accent1"/>
+          </a:effectRef>
+          <a:fontRef idx="minor">
+            <a:schemeClr val="lt1"/>
+          </a:fontRef>
+        </p:style>
+        <p:txBody>
+          <a:bodyPr rtlCol="0" anchor="ctr" lIns="0" rIns="0" tIns="0" bIns="0"/>
+          <a:lstStyle/>
+          <a:p>
+            <a:pPr algn="ctr"/>
+            <a:r>
+              <a:rPr sz="1500" i="0" b="1">
+                <a:solidFill>
+                  <a:srgbClr val="FFFFFF"/>
+                </a:solidFill>
+                <a:latin typeface="Calibri"/>
+              </a:rPr>
+              <a:t>C</a:t>
+            </a:r>
+          </a:p>
+        </p:txBody>
+      </p:sp>
+      <p:sp>
+        <p:nvSpPr>
+          <p:cNvPr id="17" name="TextBox 16"/>
+          <p:cNvSpPr txBox="1"/>
+          <p:nvPr/>
+        </p:nvSpPr>
+        <p:spPr>
+          <a:xfrm>
+            <a:off x="1371600" y="4233672"/>
+            <a:ext cx="10088575" cy="640080"/>
+          </a:xfrm>
+          <a:prstGeom prst="rect">
+            <a:avLst/>
+          </a:prstGeom>
+          <a:noFill/>
+        </p:spPr>
+        <p:txBody>
+          <a:bodyPr wrap="square" anchor="ctr" lIns="0" rIns="0" tIns="0" bIns="0">
+            <a:spAutoFit/>
+          </a:bodyPr>
+          <a:lstStyle/>
+          <a:p>
+            <a:r>
+              <a:rPr sz="1900" i="0" b="0">
+                <a:solidFill>
+                  <a:srgbClr val="2B211C"/>
+                </a:solidFill>
+                <a:latin typeface="Calibri"/>
+              </a:rPr>
+              <a:t>The price of naproxen</a:t>
+            </a:r>
+          </a:p>
+        </p:txBody>
+      </p:sp>
+      <p:sp>
+        <p:nvSpPr>
+          <p:cNvPr id="18" name="Rounded Rectangle 17"/>
+          <p:cNvSpPr/>
+          <p:nvPr/>
+        </p:nvSpPr>
+        <p:spPr>
+          <a:xfrm>
+            <a:off x="548640" y="5001768"/>
+            <a:ext cx="11094415" cy="640080"/>
+          </a:xfrm>
+          <a:prstGeom prst="roundRect">
+            <a:avLst>
+              <a:gd name="adj" fmla="val 18000"/>
+            </a:avLst>
+          </a:prstGeom>
+          <a:solidFill>
+            <a:srgbClr val="FAF4F2"/>
+          </a:solidFill>
+          <a:ln>
+            <a:noFill/>
+          </a:ln>
+          <a:effectLst/>
+        </p:spPr>
+        <p:style>
+          <a:lnRef idx="1">
+            <a:schemeClr val="accent1"/>
+          </a:lnRef>
+          <a:fillRef idx="3">
+            <a:schemeClr val="accent1"/>
+          </a:fillRef>
+          <a:effectRef idx="2">
+            <a:schemeClr val="accent1"/>
+          </a:effectRef>
+          <a:fontRef idx="minor">
+            <a:schemeClr val="lt1"/>
+          </a:fontRef>
+        </p:style>
+        <p:txBody>
+          <a:bodyPr rtlCol="0" anchor="ctr"/>
+          <a:lstStyle/>
+          <a:p>
+            <a:pPr algn="ctr"/>
+          </a:p>
+        </p:txBody>
+      </p:sp>
+      <p:sp>
+        <p:nvSpPr>
+          <p:cNvPr id="19" name="Oval 18"/>
+          <p:cNvSpPr/>
+          <p:nvPr/>
+        </p:nvSpPr>
+        <p:spPr>
+          <a:xfrm>
+            <a:off x="713232" y="5111496"/>
+            <a:ext cx="420624" cy="420624"/>
+          </a:xfrm>
+          <a:prstGeom prst="ellipse">
+            <a:avLst/>
+          </a:prstGeom>
+          <a:solidFill>
+            <a:srgbClr val="A4472B"/>
+          </a:solidFill>
+          <a:ln>
+            <a:noFill/>
+          </a:ln>
+          <a:effectLst/>
+        </p:spPr>
+        <p:style>
+          <a:lnRef idx="1">
+            <a:schemeClr val="accent1"/>
+          </a:lnRef>
+          <a:fillRef idx="3">
+            <a:schemeClr val="accent1"/>
+          </a:fillRef>
+          <a:effectRef idx="2">
+            <a:schemeClr val="accent1"/>
+          </a:effectRef>
+          <a:fontRef idx="minor">
+            <a:schemeClr val="lt1"/>
+          </a:fontRef>
+        </p:style>
+        <p:txBody>
+          <a:bodyPr rtlCol="0" anchor="ctr" lIns="0" rIns="0" tIns="0" bIns="0"/>
+          <a:lstStyle/>
+          <a:p>
+            <a:pPr algn="ctr"/>
+            <a:r>
+              <a:rPr sz="1500" i="0" b="1">
+                <a:solidFill>
+                  <a:srgbClr val="FFFFFF"/>
+                </a:solidFill>
+                <a:latin typeface="Calibri"/>
+              </a:rPr>
+              <a:t>D</a:t>
+            </a:r>
+          </a:p>
+        </p:txBody>
+      </p:sp>
+      <p:sp>
+        <p:nvSpPr>
+          <p:cNvPr id="20" name="TextBox 19"/>
+          <p:cNvSpPr txBox="1"/>
+          <p:nvPr/>
+        </p:nvSpPr>
+        <p:spPr>
+          <a:xfrm>
+            <a:off x="1371600" y="5001768"/>
+            <a:ext cx="10088575" cy="640080"/>
+          </a:xfrm>
+          <a:prstGeom prst="rect">
+            <a:avLst/>
+          </a:prstGeom>
+          <a:noFill/>
+        </p:spPr>
+        <p:txBody>
+          <a:bodyPr wrap="square" anchor="ctr" lIns="0" rIns="0" tIns="0" bIns="0">
+            <a:spAutoFit/>
+          </a:bodyPr>
+          <a:lstStyle/>
+          <a:p>
+            <a:r>
+              <a:rPr sz="1900" i="0" b="0">
+                <a:solidFill>
+                  <a:srgbClr val="2B211C"/>
+                </a:solidFill>
+                <a:latin typeface="Calibri"/>
+              </a:rPr>
+              <a:t>Whether surgery is needed</a:t>
             </a:r>
           </a:p>
         </p:txBody>
@@ -7497,7 +7950,7 @@
                 </a:solidFill>
                 <a:latin typeface="Calibri"/>
               </a:rPr>
-              <a:t>SECTION 10  ·  QUESTION 1 OF 5</a:t>
+              <a:t>SECTION 10  ·  QUESTION 1 OF 5  ·  ANSWER</a:t>
             </a:r>
           </a:p>
         </p:txBody>
@@ -7531,7 +7984,7 @@
                 </a:solidFill>
                 <a:latin typeface="Cambria"/>
               </a:rPr>
-              <a:t>Your turn</a:t>
+              <a:t>Check your answer</a:t>
             </a:r>
           </a:p>
         </p:txBody>
@@ -7600,7 +8053,7 @@
                 </a:solidFill>
                 <a:latin typeface="Calibri"/>
               </a:rPr>
-              <a:t>14 / 25</a:t>
+              <a:t>14 / 24</a:t>
             </a:r>
           </a:p>
         </p:txBody>
@@ -7614,7 +8067,7 @@
           <p:nvPr/>
         </p:nvPicPr>
         <p:blipFill>
-          <a:blip r:embed="rId3"/>
+          <a:blip r:embed="rId2"/>
           <a:stretch>
             <a:fillRect/>
           </a:stretch>
@@ -7671,8 +8124,8 @@
         </p:nvSpPr>
         <p:spPr>
           <a:xfrm>
-            <a:off x="548640" y="2697480"/>
-            <a:ext cx="11094415" cy="640080"/>
+            <a:off x="548640" y="2606040"/>
+            <a:ext cx="11094415" cy="548640"/>
           </a:xfrm>
           <a:prstGeom prst="roundRect">
             <a:avLst>
@@ -7680,7 +8133,7 @@
             </a:avLst>
           </a:prstGeom>
           <a:solidFill>
-            <a:srgbClr val="FAF4F2"/>
+            <a:srgbClr val="F5F4F4"/>
           </a:solidFill>
           <a:ln>
             <a:noFill/>
@@ -7717,14 +8170,14 @@
         </p:nvSpPr>
         <p:spPr>
           <a:xfrm>
-            <a:off x="713232" y="2807208"/>
+            <a:off x="713232" y="2670048"/>
             <a:ext cx="420624" cy="420624"/>
           </a:xfrm>
           <a:prstGeom prst="ellipse">
             <a:avLst/>
           </a:prstGeom>
           <a:solidFill>
-            <a:srgbClr val="A4472B"/>
+            <a:srgbClr val="E2E0DE"/>
           </a:solidFill>
           <a:ln>
             <a:noFill/>
@@ -7753,7 +8206,7 @@
             <a:r>
               <a:rPr sz="1500" i="0" b="1">
                 <a:solidFill>
-                  <a:srgbClr val="FFFFFF"/>
+                  <a:srgbClr val="6E625B"/>
                 </a:solidFill>
                 <a:latin typeface="Calibri"/>
               </a:rPr>
@@ -7770,8 +8223,8 @@
         </p:nvSpPr>
         <p:spPr>
           <a:xfrm>
-            <a:off x="1371600" y="2697480"/>
-            <a:ext cx="10088575" cy="640080"/>
+            <a:off x="1371600" y="2606040"/>
+            <a:ext cx="10088575" cy="548640"/>
           </a:xfrm>
           <a:prstGeom prst="rect">
             <a:avLst/>
@@ -7787,7 +8240,7 @@
             <a:r>
               <a:rPr sz="1900" i="0" b="0">
                 <a:solidFill>
-                  <a:srgbClr val="2B211C"/>
+                  <a:srgbClr val="6E625B"/>
                 </a:solidFill>
                 <a:latin typeface="Calibri"/>
               </a:rPr>
@@ -7804,8 +8257,8 @@
         </p:nvSpPr>
         <p:spPr>
           <a:xfrm>
-            <a:off x="548640" y="3465576"/>
-            <a:ext cx="11094415" cy="640080"/>
+            <a:off x="548640" y="3282696"/>
+            <a:ext cx="11094415" cy="548640"/>
           </a:xfrm>
           <a:prstGeom prst="roundRect">
             <a:avLst>
@@ -7813,7 +8266,7 @@
             </a:avLst>
           </a:prstGeom>
           <a:solidFill>
-            <a:srgbClr val="FAF4F2"/>
+            <a:srgbClr val="2F6F7A"/>
           </a:solidFill>
           <a:ln>
             <a:noFill/>
@@ -7850,14 +8303,14 @@
         </p:nvSpPr>
         <p:spPr>
           <a:xfrm>
-            <a:off x="713232" y="3575304"/>
+            <a:off x="713232" y="3346703"/>
             <a:ext cx="420624" cy="420624"/>
           </a:xfrm>
           <a:prstGeom prst="ellipse">
             <a:avLst/>
           </a:prstGeom>
           <a:solidFill>
-            <a:srgbClr val="A4472B"/>
+            <a:srgbClr val="FFFFFF"/>
           </a:solidFill>
           <a:ln>
             <a:noFill/>
@@ -7886,7 +8339,7 @@
             <a:r>
               <a:rPr sz="1500" i="0" b="1">
                 <a:solidFill>
-                  <a:srgbClr val="FFFFFF"/>
+                  <a:srgbClr val="2F6F7A"/>
                 </a:solidFill>
                 <a:latin typeface="Calibri"/>
               </a:rPr>
@@ -7903,8 +8356,8 @@
         </p:nvSpPr>
         <p:spPr>
           <a:xfrm>
-            <a:off x="1371600" y="3465576"/>
-            <a:ext cx="10088575" cy="640080"/>
+            <a:off x="1371600" y="3282696"/>
+            <a:ext cx="10088575" cy="548640"/>
           </a:xfrm>
           <a:prstGeom prst="rect">
             <a:avLst/>
@@ -7918,9 +8371,9 @@
           <a:lstStyle/>
           <a:p>
             <a:r>
-              <a:rPr sz="1900" i="0" b="0">
-                <a:solidFill>
-                  <a:srgbClr val="2B211C"/>
+              <a:rPr sz="1900" i="0" b="1">
+                <a:solidFill>
+                  <a:srgbClr val="FFFFFF"/>
                 </a:solidFill>
                 <a:latin typeface="Calibri"/>
               </a:rPr>
@@ -7937,8 +8390,8 @@
         </p:nvSpPr>
         <p:spPr>
           <a:xfrm>
-            <a:off x="548640" y="4233672"/>
-            <a:ext cx="11094415" cy="640080"/>
+            <a:off x="548640" y="3959352"/>
+            <a:ext cx="11094415" cy="548640"/>
           </a:xfrm>
           <a:prstGeom prst="roundRect">
             <a:avLst>
@@ -7946,7 +8399,7 @@
             </a:avLst>
           </a:prstGeom>
           <a:solidFill>
-            <a:srgbClr val="FAF4F2"/>
+            <a:srgbClr val="F5F4F4"/>
           </a:solidFill>
           <a:ln>
             <a:noFill/>
@@ -7983,14 +8436,14 @@
         </p:nvSpPr>
         <p:spPr>
           <a:xfrm>
-            <a:off x="713232" y="4343400"/>
+            <a:off x="713232" y="4023360"/>
             <a:ext cx="420624" cy="420624"/>
           </a:xfrm>
           <a:prstGeom prst="ellipse">
             <a:avLst/>
           </a:prstGeom>
           <a:solidFill>
-            <a:srgbClr val="A4472B"/>
+            <a:srgbClr val="E2E0DE"/>
           </a:solidFill>
           <a:ln>
             <a:noFill/>
@@ -8019,7 +8472,7 @@
             <a:r>
               <a:rPr sz="1500" i="0" b="1">
                 <a:solidFill>
-                  <a:srgbClr val="FFFFFF"/>
+                  <a:srgbClr val="6E625B"/>
                 </a:solidFill>
                 <a:latin typeface="Calibri"/>
               </a:rPr>
@@ -8036,8 +8489,8 @@
         </p:nvSpPr>
         <p:spPr>
           <a:xfrm>
-            <a:off x="1371600" y="4233672"/>
-            <a:ext cx="10088575" cy="640080"/>
+            <a:off x="1371600" y="3959352"/>
+            <a:ext cx="10088575" cy="548640"/>
           </a:xfrm>
           <a:prstGeom prst="rect">
             <a:avLst/>
@@ -8053,7 +8506,7 @@
             <a:r>
               <a:rPr sz="1900" i="0" b="0">
                 <a:solidFill>
-                  <a:srgbClr val="2B211C"/>
+                  <a:srgbClr val="6E625B"/>
                 </a:solidFill>
                 <a:latin typeface="Calibri"/>
               </a:rPr>
@@ -8070,8 +8523,8 @@
         </p:nvSpPr>
         <p:spPr>
           <a:xfrm>
-            <a:off x="548640" y="5001768"/>
-            <a:ext cx="11094415" cy="640080"/>
+            <a:off x="548640" y="4636008"/>
+            <a:ext cx="11094415" cy="548640"/>
           </a:xfrm>
           <a:prstGeom prst="roundRect">
             <a:avLst>
@@ -8079,7 +8532,7 @@
             </a:avLst>
           </a:prstGeom>
           <a:solidFill>
-            <a:srgbClr val="FAF4F2"/>
+            <a:srgbClr val="F5F4F4"/>
           </a:solidFill>
           <a:ln>
             <a:noFill/>
@@ -8116,14 +8569,14 @@
         </p:nvSpPr>
         <p:spPr>
           <a:xfrm>
-            <a:off x="713232" y="5111496"/>
+            <a:off x="713232" y="4700016"/>
             <a:ext cx="420624" cy="420624"/>
           </a:xfrm>
           <a:prstGeom prst="ellipse">
             <a:avLst/>
           </a:prstGeom>
           <a:solidFill>
-            <a:srgbClr val="A4472B"/>
+            <a:srgbClr val="E2E0DE"/>
           </a:solidFill>
           <a:ln>
             <a:noFill/>
@@ -8152,7 +8605,7 @@
             <a:r>
               <a:rPr sz="1500" i="0" b="1">
                 <a:solidFill>
-                  <a:srgbClr val="FFFFFF"/>
+                  <a:srgbClr val="6E625B"/>
                 </a:solidFill>
                 <a:latin typeface="Calibri"/>
               </a:rPr>
@@ -8169,8 +8622,8 @@
         </p:nvSpPr>
         <p:spPr>
           <a:xfrm>
-            <a:off x="1371600" y="5001768"/>
-            <a:ext cx="10088575" cy="640080"/>
+            <a:off x="1371600" y="4636008"/>
+            <a:ext cx="10088575" cy="548640"/>
           </a:xfrm>
           <a:prstGeom prst="rect">
             <a:avLst/>
@@ -8186,11 +8639,54 @@
             <a:r>
               <a:rPr sz="1900" i="0" b="0">
                 <a:solidFill>
+                  <a:srgbClr val="6E625B"/>
+                </a:solidFill>
+                <a:latin typeface="Calibri"/>
+              </a:rPr>
+              <a:t>Whether surgery is needed</a:t>
+            </a:r>
+          </a:p>
+        </p:txBody>
+      </p:sp>
+      <p:sp>
+        <p:nvSpPr>
+          <p:cNvPr id="21" name="TextBox 20"/>
+          <p:cNvSpPr txBox="1"/>
+          <p:nvPr/>
+        </p:nvSpPr>
+        <p:spPr>
+          <a:xfrm>
+            <a:off x="548640" y="5358384"/>
+            <a:ext cx="11094415" cy="685800"/>
+          </a:xfrm>
+          <a:prstGeom prst="rect">
+            <a:avLst/>
+          </a:prstGeom>
+          <a:noFill/>
+        </p:spPr>
+        <p:txBody>
+          <a:bodyPr wrap="square" anchor="t" lIns="0" rIns="0" tIns="0" bIns="0">
+            <a:spAutoFit/>
+          </a:bodyPr>
+          <a:lstStyle/>
+          <a:p>
+            <a:r>
+              <a:rPr sz="1500" i="0" b="1">
+                <a:solidFill>
+                  <a:srgbClr val="2F6F7A"/>
+                </a:solidFill>
+                <a:latin typeface="Calibri"/>
+              </a:rPr>
+              <a:t>Why:  </a:t>
+            </a:r>
+            <a:r>
+              <a:rPr sz="1500" i="0" b="0">
+                <a:solidFill>
                   <a:srgbClr val="2B211C"/>
                 </a:solidFill>
                 <a:latin typeface="Calibri"/>
               </a:rPr>
-              <a:t>Whether surgery is needed</a:t>
+              <a:t>The need was pain control that allows exercise. A, C and D miss the point.</a:t>
             </a:r>
           </a:p>
         </p:txBody>
@@ -8303,7 +8799,7 @@
                 </a:solidFill>
                 <a:latin typeface="Calibri"/>
               </a:rPr>
-              <a:t>SECTION 10  ·  QUESTION 1 OF 5  ·  ANSWER</a:t>
+              <a:t>SECTION 10  ·  QUESTION 2 OF 5</a:t>
             </a:r>
           </a:p>
         </p:txBody>
@@ -8337,7 +8833,7 @@
                 </a:solidFill>
                 <a:latin typeface="Cambria"/>
               </a:rPr>
-              <a:t>Check your answer</a:t>
+              <a:t>Your turn</a:t>
             </a:r>
           </a:p>
         </p:txBody>
@@ -8406,7 +8902,7 @@
                 </a:solidFill>
                 <a:latin typeface="Calibri"/>
               </a:rPr>
-              <a:t>15 / 25</a:t>
+              <a:t>15 / 24</a:t>
             </a:r>
           </a:p>
         </p:txBody>
@@ -8420,7 +8916,7 @@
           <p:nvPr/>
         </p:nvPicPr>
         <p:blipFill>
-          <a:blip r:embed="rId2"/>
+          <a:blip r:embed="rId3"/>
           <a:stretch>
             <a:fillRect/>
           </a:stretch>
@@ -8464,7 +8960,7 @@
                 </a:solidFill>
                 <a:latin typeface="Calibri"/>
               </a:rPr>
-              <a:t>What was the real question behind the physiotherapist's call?</a:t>
+              <a:t>Which source type answered the question about corticosteroid injection best?</a:t>
             </a:r>
           </a:p>
         </p:txBody>
@@ -8477,8 +8973,8 @@
         </p:nvSpPr>
         <p:spPr>
           <a:xfrm>
-            <a:off x="548640" y="2606040"/>
-            <a:ext cx="11094415" cy="548640"/>
+            <a:off x="548640" y="2697480"/>
+            <a:ext cx="11094415" cy="640080"/>
           </a:xfrm>
           <a:prstGeom prst="roundRect">
             <a:avLst>
@@ -8486,7 +8982,7 @@
             </a:avLst>
           </a:prstGeom>
           <a:solidFill>
-            <a:srgbClr val="F5F4F4"/>
+            <a:srgbClr val="FAF4F2"/>
           </a:solidFill>
           <a:ln>
             <a:noFill/>
@@ -8523,14 +9019,14 @@
         </p:nvSpPr>
         <p:spPr>
           <a:xfrm>
-            <a:off x="713232" y="2670048"/>
+            <a:off x="713232" y="2807208"/>
             <a:ext cx="420624" cy="420624"/>
           </a:xfrm>
           <a:prstGeom prst="ellipse">
             <a:avLst/>
           </a:prstGeom>
           <a:solidFill>
-            <a:srgbClr val="E2E0DE"/>
+            <a:srgbClr val="A4472B"/>
           </a:solidFill>
           <a:ln>
             <a:noFill/>
@@ -8559,7 +9055,7 @@
             <a:r>
               <a:rPr sz="1500" i="0" b="1">
                 <a:solidFill>
-                  <a:srgbClr val="6E625B"/>
+                  <a:srgbClr val="FFFFFF"/>
                 </a:solidFill>
                 <a:latin typeface="Calibri"/>
               </a:rPr>
@@ -8576,8 +9072,8 @@
         </p:nvSpPr>
         <p:spPr>
           <a:xfrm>
-            <a:off x="1371600" y="2606040"/>
-            <a:ext cx="10088575" cy="548640"/>
+            <a:off x="1371600" y="2697480"/>
+            <a:ext cx="10088575" cy="640080"/>
           </a:xfrm>
           <a:prstGeom prst="rect">
             <a:avLst/>
@@ -8593,11 +9089,11 @@
             <a:r>
               <a:rPr sz="1900" i="0" b="0">
                 <a:solidFill>
-                  <a:srgbClr val="6E625B"/>
-                </a:solidFill>
-                <a:latin typeface="Calibri"/>
-              </a:rPr>
-              <a:t>A list of every painkiller</a:t>
+                  <a:srgbClr val="2B211C"/>
+                </a:solidFill>
+                <a:latin typeface="Calibri"/>
+              </a:rPr>
+              <a:t>A drug label</a:t>
             </a:r>
           </a:p>
         </p:txBody>
@@ -8610,8 +9106,8 @@
         </p:nvSpPr>
         <p:spPr>
           <a:xfrm>
-            <a:off x="548640" y="3282696"/>
-            <a:ext cx="11094415" cy="548640"/>
+            <a:off x="548640" y="3465576"/>
+            <a:ext cx="11094415" cy="640080"/>
           </a:xfrm>
           <a:prstGeom prst="roundRect">
             <a:avLst>
@@ -8619,7 +9115,7 @@
             </a:avLst>
           </a:prstGeom>
           <a:solidFill>
-            <a:srgbClr val="2F6F7A"/>
+            <a:srgbClr val="FAF4F2"/>
           </a:solidFill>
           <a:ln>
             <a:noFill/>
@@ -8656,14 +9152,14 @@
         </p:nvSpPr>
         <p:spPr>
           <a:xfrm>
-            <a:off x="713232" y="3346703"/>
+            <a:off x="713232" y="3575304"/>
             <a:ext cx="420624" cy="420624"/>
           </a:xfrm>
           <a:prstGeom prst="ellipse">
             <a:avLst/>
           </a:prstGeom>
           <a:solidFill>
-            <a:srgbClr val="FFFFFF"/>
+            <a:srgbClr val="A4472B"/>
           </a:solidFill>
           <a:ln>
             <a:noFill/>
@@ -8692,7 +9188,7 @@
             <a:r>
               <a:rPr sz="1500" i="0" b="1">
                 <a:solidFill>
-                  <a:srgbClr val="2F6F7A"/>
+                  <a:srgbClr val="FFFFFF"/>
                 </a:solidFill>
                 <a:latin typeface="Calibri"/>
               </a:rPr>
@@ -8709,8 +9205,8 @@
         </p:nvSpPr>
         <p:spPr>
           <a:xfrm>
-            <a:off x="1371600" y="3282696"/>
-            <a:ext cx="10088575" cy="548640"/>
+            <a:off x="1371600" y="3465576"/>
+            <a:ext cx="10088575" cy="640080"/>
           </a:xfrm>
           <a:prstGeom prst="rect">
             <a:avLst/>
@@ -8724,13 +9220,13 @@
           <a:lstStyle/>
           <a:p>
             <a:r>
-              <a:rPr sz="1900" i="0" b="1">
-                <a:solidFill>
-                  <a:srgbClr val="FFFFFF"/>
-                </a:solidFill>
-                <a:latin typeface="Calibri"/>
-              </a:rPr>
-              <a:t>Safe pain control so the patient can exercise</a:t>
+              <a:rPr sz="1900" i="0" b="0">
+                <a:solidFill>
+                  <a:srgbClr val="2B211C"/>
+                </a:solidFill>
+                <a:latin typeface="Calibri"/>
+              </a:rPr>
+              <a:t>A textbook dose table</a:t>
             </a:r>
           </a:p>
         </p:txBody>
@@ -8743,8 +9239,8 @@
         </p:nvSpPr>
         <p:spPr>
           <a:xfrm>
-            <a:off x="548640" y="3959352"/>
-            <a:ext cx="11094415" cy="548640"/>
+            <a:off x="548640" y="4233672"/>
+            <a:ext cx="11094415" cy="640080"/>
           </a:xfrm>
           <a:prstGeom prst="roundRect">
             <a:avLst>
@@ -8752,7 +9248,7 @@
             </a:avLst>
           </a:prstGeom>
           <a:solidFill>
-            <a:srgbClr val="F5F4F4"/>
+            <a:srgbClr val="FAF4F2"/>
           </a:solidFill>
           <a:ln>
             <a:noFill/>
@@ -8789,14 +9285,14 @@
         </p:nvSpPr>
         <p:spPr>
           <a:xfrm>
-            <a:off x="713232" y="4023360"/>
+            <a:off x="713232" y="4343400"/>
             <a:ext cx="420624" cy="420624"/>
           </a:xfrm>
           <a:prstGeom prst="ellipse">
             <a:avLst/>
           </a:prstGeom>
           <a:solidFill>
-            <a:srgbClr val="E2E0DE"/>
+            <a:srgbClr val="A4472B"/>
           </a:solidFill>
           <a:ln>
             <a:noFill/>
@@ -8825,7 +9321,7 @@
             <a:r>
               <a:rPr sz="1500" i="0" b="1">
                 <a:solidFill>
-                  <a:srgbClr val="6E625B"/>
+                  <a:srgbClr val="FFFFFF"/>
                 </a:solidFill>
                 <a:latin typeface="Calibri"/>
               </a:rPr>
@@ -8842,8 +9338,8 @@
         </p:nvSpPr>
         <p:spPr>
           <a:xfrm>
-            <a:off x="1371600" y="3959352"/>
-            <a:ext cx="10088575" cy="548640"/>
+            <a:off x="1371600" y="4233672"/>
+            <a:ext cx="10088575" cy="640080"/>
           </a:xfrm>
           <a:prstGeom prst="rect">
             <a:avLst/>
@@ -8859,11 +9355,11 @@
             <a:r>
               <a:rPr sz="1900" i="0" b="0">
                 <a:solidFill>
-                  <a:srgbClr val="6E625B"/>
-                </a:solidFill>
-                <a:latin typeface="Calibri"/>
-              </a:rPr>
-              <a:t>The price of naproxen</a:t>
+                  <a:srgbClr val="2B211C"/>
+                </a:solidFill>
+                <a:latin typeface="Calibri"/>
+              </a:rPr>
+              <a:t>A systematic review found through PubMed</a:t>
             </a:r>
           </a:p>
         </p:txBody>
@@ -8876,8 +9372,8 @@
         </p:nvSpPr>
         <p:spPr>
           <a:xfrm>
-            <a:off x="548640" y="4636008"/>
-            <a:ext cx="11094415" cy="548640"/>
+            <a:off x="548640" y="5001768"/>
+            <a:ext cx="11094415" cy="640080"/>
           </a:xfrm>
           <a:prstGeom prst="roundRect">
             <a:avLst>
@@ -8885,7 +9381,7 @@
             </a:avLst>
           </a:prstGeom>
           <a:solidFill>
-            <a:srgbClr val="F5F4F4"/>
+            <a:srgbClr val="FAF4F2"/>
           </a:solidFill>
           <a:ln>
             <a:noFill/>
@@ -8922,14 +9418,14 @@
         </p:nvSpPr>
         <p:spPr>
           <a:xfrm>
-            <a:off x="713232" y="4700016"/>
+            <a:off x="713232" y="5111496"/>
             <a:ext cx="420624" cy="420624"/>
           </a:xfrm>
           <a:prstGeom prst="ellipse">
             <a:avLst/>
           </a:prstGeom>
           <a:solidFill>
-            <a:srgbClr val="E2E0DE"/>
+            <a:srgbClr val="A4472B"/>
           </a:solidFill>
           <a:ln>
             <a:noFill/>
@@ -8958,7 +9454,7 @@
             <a:r>
               <a:rPr sz="1500" i="0" b="1">
                 <a:solidFill>
-                  <a:srgbClr val="6E625B"/>
+                  <a:srgbClr val="FFFFFF"/>
                 </a:solidFill>
                 <a:latin typeface="Calibri"/>
               </a:rPr>
@@ -8975,8 +9471,8 @@
         </p:nvSpPr>
         <p:spPr>
           <a:xfrm>
-            <a:off x="1371600" y="4636008"/>
-            <a:ext cx="10088575" cy="548640"/>
+            <a:off x="1371600" y="5001768"/>
+            <a:ext cx="10088575" cy="640080"/>
           </a:xfrm>
           <a:prstGeom prst="rect">
             <a:avLst/>
@@ -8992,54 +9488,11 @@
             <a:r>
               <a:rPr sz="1900" i="0" b="0">
                 <a:solidFill>
-                  <a:srgbClr val="6E625B"/>
-                </a:solidFill>
-                <a:latin typeface="Calibri"/>
-              </a:rPr>
-              <a:t>Whether surgery is needed</a:t>
-            </a:r>
-          </a:p>
-        </p:txBody>
-      </p:sp>
-      <p:sp>
-        <p:nvSpPr>
-          <p:cNvPr id="21" name="TextBox 20"/>
-          <p:cNvSpPr txBox="1"/>
-          <p:nvPr/>
-        </p:nvSpPr>
-        <p:spPr>
-          <a:xfrm>
-            <a:off x="548640" y="5358384"/>
-            <a:ext cx="11094415" cy="685800"/>
-          </a:xfrm>
-          <a:prstGeom prst="rect">
-            <a:avLst/>
-          </a:prstGeom>
-          <a:noFill/>
-        </p:spPr>
-        <p:txBody>
-          <a:bodyPr wrap="square" anchor="t" lIns="0" rIns="0" tIns="0" bIns="0">
-            <a:spAutoFit/>
-          </a:bodyPr>
-          <a:lstStyle/>
-          <a:p>
-            <a:r>
-              <a:rPr sz="1500" i="0" b="1">
-                <a:solidFill>
-                  <a:srgbClr val="2F6F7A"/>
-                </a:solidFill>
-                <a:latin typeface="Calibri"/>
-              </a:rPr>
-              <a:t>Why:  </a:t>
-            </a:r>
-            <a:r>
-              <a:rPr sz="1500" i="0" b="0">
-                <a:solidFill>
                   <a:srgbClr val="2B211C"/>
                 </a:solidFill>
                 <a:latin typeface="Calibri"/>
               </a:rPr>
-              <a:t>The need was pain control that allows exercise. A, C and D miss the point.</a:t>
+              <a:t>A company leaflet</a:t>
             </a:r>
           </a:p>
         </p:txBody>
@@ -9152,7 +9605,7 @@
                 </a:solidFill>
                 <a:latin typeface="Calibri"/>
               </a:rPr>
-              <a:t>SECTION 10  ·  QUESTION 2 OF 5</a:t>
+              <a:t>SECTION 10  ·  QUESTION 2 OF 5  ·  ANSWER</a:t>
             </a:r>
           </a:p>
         </p:txBody>
@@ -9186,7 +9639,7 @@
                 </a:solidFill>
                 <a:latin typeface="Cambria"/>
               </a:rPr>
-              <a:t>Your turn</a:t>
+              <a:t>Check your answer</a:t>
             </a:r>
           </a:p>
         </p:txBody>
@@ -9255,7 +9708,7 @@
                 </a:solidFill>
                 <a:latin typeface="Calibri"/>
               </a:rPr>
-              <a:t>16 / 25</a:t>
+              <a:t>16 / 24</a:t>
             </a:r>
           </a:p>
         </p:txBody>
@@ -9269,7 +9722,7 @@
           <p:nvPr/>
         </p:nvPicPr>
         <p:blipFill>
-          <a:blip r:embed="rId3"/>
+          <a:blip r:embed="rId2"/>
           <a:stretch>
             <a:fillRect/>
           </a:stretch>
@@ -9326,8 +9779,8 @@
         </p:nvSpPr>
         <p:spPr>
           <a:xfrm>
-            <a:off x="548640" y="2697480"/>
-            <a:ext cx="11094415" cy="640080"/>
+            <a:off x="548640" y="2606040"/>
+            <a:ext cx="11094415" cy="548640"/>
           </a:xfrm>
           <a:prstGeom prst="roundRect">
             <a:avLst>
@@ -9335,7 +9788,7 @@
             </a:avLst>
           </a:prstGeom>
           <a:solidFill>
-            <a:srgbClr val="FAF4F2"/>
+            <a:srgbClr val="F5F4F4"/>
           </a:solidFill>
           <a:ln>
             <a:noFill/>
@@ -9372,14 +9825,14 @@
         </p:nvSpPr>
         <p:spPr>
           <a:xfrm>
-            <a:off x="713232" y="2807208"/>
+            <a:off x="713232" y="2670048"/>
             <a:ext cx="420624" cy="420624"/>
           </a:xfrm>
           <a:prstGeom prst="ellipse">
             <a:avLst/>
           </a:prstGeom>
           <a:solidFill>
-            <a:srgbClr val="A4472B"/>
+            <a:srgbClr val="E2E0DE"/>
           </a:solidFill>
           <a:ln>
             <a:noFill/>
@@ -9408,7 +9861,7 @@
             <a:r>
               <a:rPr sz="1500" i="0" b="1">
                 <a:solidFill>
-                  <a:srgbClr val="FFFFFF"/>
+                  <a:srgbClr val="6E625B"/>
                 </a:solidFill>
                 <a:latin typeface="Calibri"/>
               </a:rPr>
@@ -9425,8 +9878,8 @@
         </p:nvSpPr>
         <p:spPr>
           <a:xfrm>
-            <a:off x="1371600" y="2697480"/>
-            <a:ext cx="10088575" cy="640080"/>
+            <a:off x="1371600" y="2606040"/>
+            <a:ext cx="10088575" cy="548640"/>
           </a:xfrm>
           <a:prstGeom prst="rect">
             <a:avLst/>
@@ -9442,7 +9895,7 @@
             <a:r>
               <a:rPr sz="1900" i="0" b="0">
                 <a:solidFill>
-                  <a:srgbClr val="2B211C"/>
+                  <a:srgbClr val="6E625B"/>
                 </a:solidFill>
                 <a:latin typeface="Calibri"/>
               </a:rPr>
@@ -9459,8 +9912,8 @@
         </p:nvSpPr>
         <p:spPr>
           <a:xfrm>
-            <a:off x="548640" y="3465576"/>
-            <a:ext cx="11094415" cy="640080"/>
+            <a:off x="548640" y="3282696"/>
+            <a:ext cx="11094415" cy="548640"/>
           </a:xfrm>
           <a:prstGeom prst="roundRect">
             <a:avLst>
@@ -9468,7 +9921,7 @@
             </a:avLst>
           </a:prstGeom>
           <a:solidFill>
-            <a:srgbClr val="FAF4F2"/>
+            <a:srgbClr val="F5F4F4"/>
           </a:solidFill>
           <a:ln>
             <a:noFill/>
@@ -9505,14 +9958,14 @@
         </p:nvSpPr>
         <p:spPr>
           <a:xfrm>
-            <a:off x="713232" y="3575304"/>
+            <a:off x="713232" y="3346703"/>
             <a:ext cx="420624" cy="420624"/>
           </a:xfrm>
           <a:prstGeom prst="ellipse">
             <a:avLst/>
           </a:prstGeom>
           <a:solidFill>
-            <a:srgbClr val="A4472B"/>
+            <a:srgbClr val="E2E0DE"/>
           </a:solidFill>
           <a:ln>
             <a:noFill/>
@@ -9541,7 +9994,7 @@
             <a:r>
               <a:rPr sz="1500" i="0" b="1">
                 <a:solidFill>
-                  <a:srgbClr val="FFFFFF"/>
+                  <a:srgbClr val="6E625B"/>
                 </a:solidFill>
                 <a:latin typeface="Calibri"/>
               </a:rPr>
@@ -9558,8 +10011,8 @@
         </p:nvSpPr>
         <p:spPr>
           <a:xfrm>
-            <a:off x="1371600" y="3465576"/>
-            <a:ext cx="10088575" cy="640080"/>
+            <a:off x="1371600" y="3282696"/>
+            <a:ext cx="10088575" cy="548640"/>
           </a:xfrm>
           <a:prstGeom prst="rect">
             <a:avLst/>
@@ -9575,7 +10028,7 @@
             <a:r>
               <a:rPr sz="1900" i="0" b="0">
                 <a:solidFill>
-                  <a:srgbClr val="2B211C"/>
+                  <a:srgbClr val="6E625B"/>
                 </a:solidFill>
                 <a:latin typeface="Calibri"/>
               </a:rPr>
@@ -9592,8 +10045,8 @@
         </p:nvSpPr>
         <p:spPr>
           <a:xfrm>
-            <a:off x="548640" y="4233672"/>
-            <a:ext cx="11094415" cy="640080"/>
+            <a:off x="548640" y="3959352"/>
+            <a:ext cx="11094415" cy="548640"/>
           </a:xfrm>
           <a:prstGeom prst="roundRect">
             <a:avLst>
@@ -9601,7 +10054,7 @@
             </a:avLst>
           </a:prstGeom>
           <a:solidFill>
-            <a:srgbClr val="FAF4F2"/>
+            <a:srgbClr val="2F6F7A"/>
           </a:solidFill>
           <a:ln>
             <a:noFill/>
@@ -9638,14 +10091,14 @@
         </p:nvSpPr>
         <p:spPr>
           <a:xfrm>
-            <a:off x="713232" y="4343400"/>
+            <a:off x="713232" y="4023360"/>
             <a:ext cx="420624" cy="420624"/>
           </a:xfrm>
           <a:prstGeom prst="ellipse">
             <a:avLst/>
           </a:prstGeom>
           <a:solidFill>
-            <a:srgbClr val="A4472B"/>
+            <a:srgbClr val="FFFFFF"/>
           </a:solidFill>
           <a:ln>
             <a:noFill/>
@@ -9674,7 +10127,7 @@
             <a:r>
               <a:rPr sz="1500" i="0" b="1">
                 <a:solidFill>
-                  <a:srgbClr val="FFFFFF"/>
+                  <a:srgbClr val="2F6F7A"/>
                 </a:solidFill>
                 <a:latin typeface="Calibri"/>
               </a:rPr>
@@ -9691,8 +10144,8 @@
         </p:nvSpPr>
         <p:spPr>
           <a:xfrm>
-            <a:off x="1371600" y="4233672"/>
-            <a:ext cx="10088575" cy="640080"/>
+            <a:off x="1371600" y="3959352"/>
+            <a:ext cx="10088575" cy="548640"/>
           </a:xfrm>
           <a:prstGeom prst="rect">
             <a:avLst/>
@@ -9706,9 +10159,9 @@
           <a:lstStyle/>
           <a:p>
             <a:r>
-              <a:rPr sz="1900" i="0" b="0">
-                <a:solidFill>
-                  <a:srgbClr val="2B211C"/>
+              <a:rPr sz="1900" i="0" b="1">
+                <a:solidFill>
+                  <a:srgbClr val="FFFFFF"/>
                 </a:solidFill>
                 <a:latin typeface="Calibri"/>
               </a:rPr>
@@ -9725,8 +10178,8 @@
         </p:nvSpPr>
         <p:spPr>
           <a:xfrm>
-            <a:off x="548640" y="5001768"/>
-            <a:ext cx="11094415" cy="640080"/>
+            <a:off x="548640" y="4636008"/>
+            <a:ext cx="11094415" cy="548640"/>
           </a:xfrm>
           <a:prstGeom prst="roundRect">
             <a:avLst>
@@ -9734,7 +10187,7 @@
             </a:avLst>
           </a:prstGeom>
           <a:solidFill>
-            <a:srgbClr val="FAF4F2"/>
+            <a:srgbClr val="F5F4F4"/>
           </a:solidFill>
           <a:ln>
             <a:noFill/>
@@ -9771,14 +10224,14 @@
         </p:nvSpPr>
         <p:spPr>
           <a:xfrm>
-            <a:off x="713232" y="5111496"/>
+            <a:off x="713232" y="4700016"/>
             <a:ext cx="420624" cy="420624"/>
           </a:xfrm>
           <a:prstGeom prst="ellipse">
             <a:avLst/>
           </a:prstGeom>
           <a:solidFill>
-            <a:srgbClr val="A4472B"/>
+            <a:srgbClr val="E2E0DE"/>
           </a:solidFill>
           <a:ln>
             <a:noFill/>
@@ -9807,7 +10260,7 @@
             <a:r>
               <a:rPr sz="1500" i="0" b="1">
                 <a:solidFill>
-                  <a:srgbClr val="FFFFFF"/>
+                  <a:srgbClr val="6E625B"/>
                 </a:solidFill>
                 <a:latin typeface="Calibri"/>
               </a:rPr>
@@ -9824,8 +10277,8 @@
         </p:nvSpPr>
         <p:spPr>
           <a:xfrm>
-            <a:off x="1371600" y="5001768"/>
-            <a:ext cx="10088575" cy="640080"/>
+            <a:off x="1371600" y="4636008"/>
+            <a:ext cx="10088575" cy="548640"/>
           </a:xfrm>
           <a:prstGeom prst="rect">
             <a:avLst/>
@@ -9841,11 +10294,54 @@
             <a:r>
               <a:rPr sz="1900" i="0" b="0">
                 <a:solidFill>
+                  <a:srgbClr val="6E625B"/>
+                </a:solidFill>
+                <a:latin typeface="Calibri"/>
+              </a:rPr>
+              <a:t>A company leaflet</a:t>
+            </a:r>
+          </a:p>
+        </p:txBody>
+      </p:sp>
+      <p:sp>
+        <p:nvSpPr>
+          <p:cNvPr id="21" name="TextBox 20"/>
+          <p:cNvSpPr txBox="1"/>
+          <p:nvPr/>
+        </p:nvSpPr>
+        <p:spPr>
+          <a:xfrm>
+            <a:off x="548640" y="5358384"/>
+            <a:ext cx="11094415" cy="685800"/>
+          </a:xfrm>
+          <a:prstGeom prst="rect">
+            <a:avLst/>
+          </a:prstGeom>
+          <a:noFill/>
+        </p:spPr>
+        <p:txBody>
+          <a:bodyPr wrap="square" anchor="t" lIns="0" rIns="0" tIns="0" bIns="0">
+            <a:spAutoFit/>
+          </a:bodyPr>
+          <a:lstStyle/>
+          <a:p>
+            <a:r>
+              <a:rPr sz="1500" i="0" b="1">
+                <a:solidFill>
+                  <a:srgbClr val="2F6F7A"/>
+                </a:solidFill>
+                <a:latin typeface="Calibri"/>
+              </a:rPr>
+              <a:t>Why:  </a:t>
+            </a:r>
+            <a:r>
+              <a:rPr sz="1500" i="0" b="0">
+                <a:solidFill>
                   <a:srgbClr val="2B211C"/>
                 </a:solidFill>
                 <a:latin typeface="Calibri"/>
               </a:rPr>
-              <a:t>A company leaflet</a:t>
+              <a:t>A systematic review of RCTs is the best evidence for a treatment effect. A, B and D do not compare treatments.</a:t>
             </a:r>
           </a:p>
         </p:txBody>
@@ -9958,7 +10454,7 @@
                 </a:solidFill>
                 <a:latin typeface="Calibri"/>
               </a:rPr>
-              <a:t>SECTION 10  ·  QUESTION 2 OF 5  ·  ANSWER</a:t>
+              <a:t>SECTION 10  ·  QUESTION 3 OF 5</a:t>
             </a:r>
           </a:p>
         </p:txBody>
@@ -9992,7 +10488,7 @@
                 </a:solidFill>
                 <a:latin typeface="Cambria"/>
               </a:rPr>
-              <a:t>Check your answer</a:t>
+              <a:t>Your turn</a:t>
             </a:r>
           </a:p>
         </p:txBody>
@@ -10061,7 +10557,7 @@
                 </a:solidFill>
                 <a:latin typeface="Calibri"/>
               </a:rPr>
-              <a:t>17 / 25</a:t>
+              <a:t>17 / 24</a:t>
             </a:r>
           </a:p>
         </p:txBody>
@@ -10075,7 +10571,7 @@
           <p:nvPr/>
         </p:nvPicPr>
         <p:blipFill>
-          <a:blip r:embed="rId2"/>
+          <a:blip r:embed="rId3"/>
           <a:stretch>
             <a:fillRect/>
           </a:stretch>
@@ -10119,7 +10615,7 @@
                 </a:solidFill>
                 <a:latin typeface="Calibri"/>
               </a:rPr>
-              <a:t>Which source type answered the question about corticosteroid injection best?</a:t>
+              <a:t>The review showed a clear benefit at six weeks but little at one year. What should you tell the doctor?</a:t>
             </a:r>
           </a:p>
         </p:txBody>
@@ -10132,8 +10628,8 @@
         </p:nvSpPr>
         <p:spPr>
           <a:xfrm>
-            <a:off x="548640" y="2606040"/>
-            <a:ext cx="11094415" cy="548640"/>
+            <a:off x="548640" y="2697480"/>
+            <a:ext cx="11094415" cy="640080"/>
           </a:xfrm>
           <a:prstGeom prst="roundRect">
             <a:avLst>
@@ -10141,7 +10637,7 @@
             </a:avLst>
           </a:prstGeom>
           <a:solidFill>
-            <a:srgbClr val="F5F4F4"/>
+            <a:srgbClr val="FAF4F2"/>
           </a:solidFill>
           <a:ln>
             <a:noFill/>
@@ -10178,14 +10674,14 @@
         </p:nvSpPr>
         <p:spPr>
           <a:xfrm>
-            <a:off x="713232" y="2670048"/>
+            <a:off x="713232" y="2807208"/>
             <a:ext cx="420624" cy="420624"/>
           </a:xfrm>
           <a:prstGeom prst="ellipse">
             <a:avLst/>
           </a:prstGeom>
           <a:solidFill>
-            <a:srgbClr val="E2E0DE"/>
+            <a:srgbClr val="A4472B"/>
           </a:solidFill>
           <a:ln>
             <a:noFill/>
@@ -10214,7 +10710,7 @@
             <a:r>
               <a:rPr sz="1500" i="0" b="1">
                 <a:solidFill>
-                  <a:srgbClr val="6E625B"/>
+                  <a:srgbClr val="FFFFFF"/>
                 </a:solidFill>
                 <a:latin typeface="Calibri"/>
               </a:rPr>
@@ -10231,8 +10727,8 @@
         </p:nvSpPr>
         <p:spPr>
           <a:xfrm>
-            <a:off x="1371600" y="2606040"/>
-            <a:ext cx="10088575" cy="548640"/>
+            <a:off x="1371600" y="2697480"/>
+            <a:ext cx="10088575" cy="640080"/>
           </a:xfrm>
           <a:prstGeom prst="rect">
             <a:avLst/>
@@ -10248,11 +10744,11 @@
             <a:r>
               <a:rPr sz="1900" i="0" b="0">
                 <a:solidFill>
-                  <a:srgbClr val="6E625B"/>
-                </a:solidFill>
-                <a:latin typeface="Calibri"/>
-              </a:rPr>
-              <a:t>A drug label</a:t>
+                  <a:srgbClr val="2B211C"/>
+                </a:solidFill>
+                <a:latin typeface="Calibri"/>
+              </a:rPr>
+              <a:t>The injection has no value</a:t>
             </a:r>
           </a:p>
         </p:txBody>
@@ -10265,8 +10761,8 @@
         </p:nvSpPr>
         <p:spPr>
           <a:xfrm>
-            <a:off x="548640" y="3282696"/>
-            <a:ext cx="11094415" cy="548640"/>
+            <a:off x="548640" y="3465576"/>
+            <a:ext cx="11094415" cy="640080"/>
           </a:xfrm>
           <a:prstGeom prst="roundRect">
             <a:avLst>
@@ -10274,7 +10770,7 @@
             </a:avLst>
           </a:prstGeom>
           <a:solidFill>
-            <a:srgbClr val="F5F4F4"/>
+            <a:srgbClr val="FAF4F2"/>
           </a:solidFill>
           <a:ln>
             <a:noFill/>
@@ -10311,14 +10807,14 @@
         </p:nvSpPr>
         <p:spPr>
           <a:xfrm>
-            <a:off x="713232" y="3346703"/>
+            <a:off x="713232" y="3575304"/>
             <a:ext cx="420624" cy="420624"/>
           </a:xfrm>
           <a:prstGeom prst="ellipse">
             <a:avLst/>
           </a:prstGeom>
           <a:solidFill>
-            <a:srgbClr val="E2E0DE"/>
+            <a:srgbClr val="A4472B"/>
           </a:solidFill>
           <a:ln>
             <a:noFill/>
@@ -10347,7 +10843,7 @@
             <a:r>
               <a:rPr sz="1500" i="0" b="1">
                 <a:solidFill>
-                  <a:srgbClr val="6E625B"/>
+                  <a:srgbClr val="FFFFFF"/>
                 </a:solidFill>
                 <a:latin typeface="Calibri"/>
               </a:rPr>
@@ -10364,8 +10860,8 @@
         </p:nvSpPr>
         <p:spPr>
           <a:xfrm>
-            <a:off x="1371600" y="3282696"/>
-            <a:ext cx="10088575" cy="548640"/>
+            <a:off x="1371600" y="3465576"/>
+            <a:ext cx="10088575" cy="640080"/>
           </a:xfrm>
           <a:prstGeom prst="rect">
             <a:avLst/>
@@ -10381,11 +10877,11 @@
             <a:r>
               <a:rPr sz="1900" i="0" b="0">
                 <a:solidFill>
-                  <a:srgbClr val="6E625B"/>
-                </a:solidFill>
-                <a:latin typeface="Calibri"/>
-              </a:rPr>
-              <a:t>A textbook dose table</a:t>
+                  <a:srgbClr val="2B211C"/>
+                </a:solidFill>
+                <a:latin typeface="Calibri"/>
+              </a:rPr>
+              <a:t>The injection cures frozen shoulder</a:t>
             </a:r>
           </a:p>
         </p:txBody>
@@ -10398,8 +10894,8 @@
         </p:nvSpPr>
         <p:spPr>
           <a:xfrm>
-            <a:off x="548640" y="3959352"/>
-            <a:ext cx="11094415" cy="548640"/>
+            <a:off x="548640" y="4233672"/>
+            <a:ext cx="11094415" cy="640080"/>
           </a:xfrm>
           <a:prstGeom prst="roundRect">
             <a:avLst>
@@ -10407,7 +10903,7 @@
             </a:avLst>
           </a:prstGeom>
           <a:solidFill>
-            <a:srgbClr val="2F6F7A"/>
+            <a:srgbClr val="FAF4F2"/>
           </a:solidFill>
           <a:ln>
             <a:noFill/>
@@ -10444,14 +10940,14 @@
         </p:nvSpPr>
         <p:spPr>
           <a:xfrm>
-            <a:off x="713232" y="4023360"/>
+            <a:off x="713232" y="4343400"/>
             <a:ext cx="420624" cy="420624"/>
           </a:xfrm>
           <a:prstGeom prst="ellipse">
             <a:avLst/>
           </a:prstGeom>
           <a:solidFill>
-            <a:srgbClr val="FFFFFF"/>
+            <a:srgbClr val="A4472B"/>
           </a:solidFill>
           <a:ln>
             <a:noFill/>
@@ -10480,7 +10976,7 @@
             <a:r>
               <a:rPr sz="1500" i="0" b="1">
                 <a:solidFill>
-                  <a:srgbClr val="2F6F7A"/>
+                  <a:srgbClr val="FFFFFF"/>
                 </a:solidFill>
                 <a:latin typeface="Calibri"/>
               </a:rPr>
@@ -10497,8 +10993,8 @@
         </p:nvSpPr>
         <p:spPr>
           <a:xfrm>
-            <a:off x="1371600" y="3959352"/>
-            <a:ext cx="10088575" cy="548640"/>
+            <a:off x="1371600" y="4233672"/>
+            <a:ext cx="10088575" cy="640080"/>
           </a:xfrm>
           <a:prstGeom prst="rect">
             <a:avLst/>
@@ -10512,13 +11008,13 @@
           <a:lstStyle/>
           <a:p>
             <a:r>
-              <a:rPr sz="1900" i="0" b="1">
-                <a:solidFill>
-                  <a:srgbClr val="FFFFFF"/>
-                </a:solidFill>
-                <a:latin typeface="Calibri"/>
-              </a:rPr>
-              <a:t>A systematic review found through PubMed</a:t>
+              <a:rPr sz="1900" i="0" b="0">
+                <a:solidFill>
+                  <a:srgbClr val="2B211C"/>
+                </a:solidFill>
+                <a:latin typeface="Calibri"/>
+              </a:rPr>
+              <a:t>The review is not relevant</a:t>
             </a:r>
           </a:p>
         </p:txBody>
@@ -10531,8 +11027,8 @@
         </p:nvSpPr>
         <p:spPr>
           <a:xfrm>
-            <a:off x="548640" y="4636008"/>
-            <a:ext cx="11094415" cy="548640"/>
+            <a:off x="548640" y="5001768"/>
+            <a:ext cx="11094415" cy="640080"/>
           </a:xfrm>
           <a:prstGeom prst="roundRect">
             <a:avLst>
@@ -10540,7 +11036,7 @@
             </a:avLst>
           </a:prstGeom>
           <a:solidFill>
-            <a:srgbClr val="F5F4F4"/>
+            <a:srgbClr val="FAF4F2"/>
           </a:solidFill>
           <a:ln>
             <a:noFill/>
@@ -10577,14 +11073,14 @@
         </p:nvSpPr>
         <p:spPr>
           <a:xfrm>
-            <a:off x="713232" y="4700016"/>
+            <a:off x="713232" y="5111496"/>
             <a:ext cx="420624" cy="420624"/>
           </a:xfrm>
           <a:prstGeom prst="ellipse">
             <a:avLst/>
           </a:prstGeom>
           <a:solidFill>
-            <a:srgbClr val="E2E0DE"/>
+            <a:srgbClr val="A4472B"/>
           </a:solidFill>
           <a:ln>
             <a:noFill/>
@@ -10613,7 +11109,7 @@
             <a:r>
               <a:rPr sz="1500" i="0" b="1">
                 <a:solidFill>
-                  <a:srgbClr val="6E625B"/>
+                  <a:srgbClr val="FFFFFF"/>
                 </a:solidFill>
                 <a:latin typeface="Calibri"/>
               </a:rPr>
@@ -10630,8 +11126,8 @@
         </p:nvSpPr>
         <p:spPr>
           <a:xfrm>
-            <a:off x="1371600" y="4636008"/>
-            <a:ext cx="10088575" cy="548640"/>
+            <a:off x="1371600" y="5001768"/>
+            <a:ext cx="10088575" cy="640080"/>
           </a:xfrm>
           <a:prstGeom prst="rect">
             <a:avLst/>
@@ -10647,54 +11143,11 @@
             <a:r>
               <a:rPr sz="1900" i="0" b="0">
                 <a:solidFill>
-                  <a:srgbClr val="6E625B"/>
-                </a:solidFill>
-                <a:latin typeface="Calibri"/>
-              </a:rPr>
-              <a:t>A company leaflet</a:t>
-            </a:r>
-          </a:p>
-        </p:txBody>
-      </p:sp>
-      <p:sp>
-        <p:nvSpPr>
-          <p:cNvPr id="21" name="TextBox 20"/>
-          <p:cNvSpPr txBox="1"/>
-          <p:nvPr/>
-        </p:nvSpPr>
-        <p:spPr>
-          <a:xfrm>
-            <a:off x="548640" y="5358384"/>
-            <a:ext cx="11094415" cy="685800"/>
-          </a:xfrm>
-          <a:prstGeom prst="rect">
-            <a:avLst/>
-          </a:prstGeom>
-          <a:noFill/>
-        </p:spPr>
-        <p:txBody>
-          <a:bodyPr wrap="square" anchor="t" lIns="0" rIns="0" tIns="0" bIns="0">
-            <a:spAutoFit/>
-          </a:bodyPr>
-          <a:lstStyle/>
-          <a:p>
-            <a:r>
-              <a:rPr sz="1500" i="0" b="1">
-                <a:solidFill>
-                  <a:srgbClr val="2F6F7A"/>
-                </a:solidFill>
-                <a:latin typeface="Calibri"/>
-              </a:rPr>
-              <a:t>Why:  </a:t>
-            </a:r>
-            <a:r>
-              <a:rPr sz="1500" i="0" b="0">
-                <a:solidFill>
                   <a:srgbClr val="2B211C"/>
                 </a:solidFill>
                 <a:latin typeface="Calibri"/>
               </a:rPr>
-              <a:t>A systematic review of RCTs is the best evidence for a treatment effect. A, B and D do not compare treatments.</a:t>
+              <a:t>The injection helps in the short term, mainly to support exercise</a:t>
             </a:r>
           </a:p>
         </p:txBody>
@@ -10807,7 +11260,7 @@
                 </a:solidFill>
                 <a:latin typeface="Calibri"/>
               </a:rPr>
-              <a:t>SECTION 10  ·  QUESTION 3 OF 5</a:t>
+              <a:t>SECTION 10  ·  QUESTION 3 OF 5  ·  ANSWER</a:t>
             </a:r>
           </a:p>
         </p:txBody>
@@ -10841,7 +11294,7 @@
                 </a:solidFill>
                 <a:latin typeface="Cambria"/>
               </a:rPr>
-              <a:t>Your turn</a:t>
+              <a:t>Check your answer</a:t>
             </a:r>
           </a:p>
         </p:txBody>
@@ -10910,7 +11363,7 @@
                 </a:solidFill>
                 <a:latin typeface="Calibri"/>
               </a:rPr>
-              <a:t>18 / 25</a:t>
+              <a:t>18 / 24</a:t>
             </a:r>
           </a:p>
         </p:txBody>
@@ -10924,7 +11377,7 @@
           <p:nvPr/>
         </p:nvPicPr>
         <p:blipFill>
-          <a:blip r:embed="rId3"/>
+          <a:blip r:embed="rId2"/>
           <a:stretch>
             <a:fillRect/>
           </a:stretch>
@@ -10981,8 +11434,8 @@
         </p:nvSpPr>
         <p:spPr>
           <a:xfrm>
-            <a:off x="548640" y="2697480"/>
-            <a:ext cx="11094415" cy="640080"/>
+            <a:off x="548640" y="2606040"/>
+            <a:ext cx="11094415" cy="548640"/>
           </a:xfrm>
           <a:prstGeom prst="roundRect">
             <a:avLst>
@@ -10990,7 +11443,7 @@
             </a:avLst>
           </a:prstGeom>
           <a:solidFill>
-            <a:srgbClr val="FAF4F2"/>
+            <a:srgbClr val="F5F4F4"/>
           </a:solidFill>
           <a:ln>
             <a:noFill/>
@@ -11027,14 +11480,14 @@
         </p:nvSpPr>
         <p:spPr>
           <a:xfrm>
-            <a:off x="713232" y="2807208"/>
+            <a:off x="713232" y="2670048"/>
             <a:ext cx="420624" cy="420624"/>
           </a:xfrm>
           <a:prstGeom prst="ellipse">
             <a:avLst/>
           </a:prstGeom>
           <a:solidFill>
-            <a:srgbClr val="A4472B"/>
+            <a:srgbClr val="E2E0DE"/>
           </a:solidFill>
           <a:ln>
             <a:noFill/>
@@ -11063,7 +11516,7 @@
             <a:r>
               <a:rPr sz="1500" i="0" b="1">
                 <a:solidFill>
-                  <a:srgbClr val="FFFFFF"/>
+                  <a:srgbClr val="6E625B"/>
                 </a:solidFill>
                 <a:latin typeface="Calibri"/>
               </a:rPr>
@@ -11080,8 +11533,8 @@
         </p:nvSpPr>
         <p:spPr>
           <a:xfrm>
-            <a:off x="1371600" y="2697480"/>
-            <a:ext cx="10088575" cy="640080"/>
+            <a:off x="1371600" y="2606040"/>
+            <a:ext cx="10088575" cy="548640"/>
           </a:xfrm>
           <a:prstGeom prst="rect">
             <a:avLst/>
@@ -11097,7 +11550,7 @@
             <a:r>
               <a:rPr sz="1900" i="0" b="0">
                 <a:solidFill>
-                  <a:srgbClr val="2B211C"/>
+                  <a:srgbClr val="6E625B"/>
                 </a:solidFill>
                 <a:latin typeface="Calibri"/>
               </a:rPr>
@@ -11114,8 +11567,8 @@
         </p:nvSpPr>
         <p:spPr>
           <a:xfrm>
-            <a:off x="548640" y="3465576"/>
-            <a:ext cx="11094415" cy="640080"/>
+            <a:off x="548640" y="3282696"/>
+            <a:ext cx="11094415" cy="548640"/>
           </a:xfrm>
           <a:prstGeom prst="roundRect">
             <a:avLst>
@@ -11123,7 +11576,7 @@
             </a:avLst>
           </a:prstGeom>
           <a:solidFill>
-            <a:srgbClr val="FAF4F2"/>
+            <a:srgbClr val="F5F4F4"/>
           </a:solidFill>
           <a:ln>
             <a:noFill/>
@@ -11160,14 +11613,14 @@
         </p:nvSpPr>
         <p:spPr>
           <a:xfrm>
-            <a:off x="713232" y="3575304"/>
+            <a:off x="713232" y="3346703"/>
             <a:ext cx="420624" cy="420624"/>
           </a:xfrm>
           <a:prstGeom prst="ellipse">
             <a:avLst/>
           </a:prstGeom>
           <a:solidFill>
-            <a:srgbClr val="A4472B"/>
+            <a:srgbClr val="E2E0DE"/>
           </a:solidFill>
           <a:ln>
             <a:noFill/>
@@ -11196,7 +11649,7 @@
             <a:r>
               <a:rPr sz="1500" i="0" b="1">
                 <a:solidFill>
-                  <a:srgbClr val="FFFFFF"/>
+                  <a:srgbClr val="6E625B"/>
                 </a:solidFill>
                 <a:latin typeface="Calibri"/>
               </a:rPr>
@@ -11213,8 +11666,8 @@
         </p:nvSpPr>
         <p:spPr>
           <a:xfrm>
-            <a:off x="1371600" y="3465576"/>
-            <a:ext cx="10088575" cy="640080"/>
+            <a:off x="1371600" y="3282696"/>
+            <a:ext cx="10088575" cy="548640"/>
           </a:xfrm>
           <a:prstGeom prst="rect">
             <a:avLst/>
@@ -11230,7 +11683,7 @@
             <a:r>
               <a:rPr sz="1900" i="0" b="0">
                 <a:solidFill>
-                  <a:srgbClr val="2B211C"/>
+                  <a:srgbClr val="6E625B"/>
                 </a:solidFill>
                 <a:latin typeface="Calibri"/>
               </a:rPr>
@@ -11247,8 +11700,8 @@
         </p:nvSpPr>
         <p:spPr>
           <a:xfrm>
-            <a:off x="548640" y="4233672"/>
-            <a:ext cx="11094415" cy="640080"/>
+            <a:off x="548640" y="3959352"/>
+            <a:ext cx="11094415" cy="548640"/>
           </a:xfrm>
           <a:prstGeom prst="roundRect">
             <a:avLst>
@@ -11256,7 +11709,7 @@
             </a:avLst>
           </a:prstGeom>
           <a:solidFill>
-            <a:srgbClr val="FAF4F2"/>
+            <a:srgbClr val="F5F4F4"/>
           </a:solidFill>
           <a:ln>
             <a:noFill/>
@@ -11293,14 +11746,14 @@
         </p:nvSpPr>
         <p:spPr>
           <a:xfrm>
-            <a:off x="713232" y="4343400"/>
+            <a:off x="713232" y="4023360"/>
             <a:ext cx="420624" cy="420624"/>
           </a:xfrm>
           <a:prstGeom prst="ellipse">
             <a:avLst/>
           </a:prstGeom>
           <a:solidFill>
-            <a:srgbClr val="A4472B"/>
+            <a:srgbClr val="E2E0DE"/>
           </a:solidFill>
           <a:ln>
             <a:noFill/>
@@ -11329,7 +11782,7 @@
             <a:r>
               <a:rPr sz="1500" i="0" b="1">
                 <a:solidFill>
-                  <a:srgbClr val="FFFFFF"/>
+                  <a:srgbClr val="6E625B"/>
                 </a:solidFill>
                 <a:latin typeface="Calibri"/>
               </a:rPr>
@@ -11346,8 +11799,8 @@
         </p:nvSpPr>
         <p:spPr>
           <a:xfrm>
-            <a:off x="1371600" y="4233672"/>
-            <a:ext cx="10088575" cy="640080"/>
+            <a:off x="1371600" y="3959352"/>
+            <a:ext cx="10088575" cy="548640"/>
           </a:xfrm>
           <a:prstGeom prst="rect">
             <a:avLst/>
@@ -11363,7 +11816,7 @@
             <a:r>
               <a:rPr sz="1900" i="0" b="0">
                 <a:solidFill>
-                  <a:srgbClr val="2B211C"/>
+                  <a:srgbClr val="6E625B"/>
                 </a:solidFill>
                 <a:latin typeface="Calibri"/>
               </a:rPr>
@@ -11380,8 +11833,8 @@
         </p:nvSpPr>
         <p:spPr>
           <a:xfrm>
-            <a:off x="548640" y="5001768"/>
-            <a:ext cx="11094415" cy="640080"/>
+            <a:off x="548640" y="4636008"/>
+            <a:ext cx="11094415" cy="548640"/>
           </a:xfrm>
           <a:prstGeom prst="roundRect">
             <a:avLst>
@@ -11389,7 +11842,7 @@
             </a:avLst>
           </a:prstGeom>
           <a:solidFill>
-            <a:srgbClr val="FAF4F2"/>
+            <a:srgbClr val="2F6F7A"/>
           </a:solidFill>
           <a:ln>
             <a:noFill/>
@@ -11426,14 +11879,14 @@
         </p:nvSpPr>
         <p:spPr>
           <a:xfrm>
-            <a:off x="713232" y="5111496"/>
+            <a:off x="713232" y="4700016"/>
             <a:ext cx="420624" cy="420624"/>
           </a:xfrm>
           <a:prstGeom prst="ellipse">
             <a:avLst/>
           </a:prstGeom>
           <a:solidFill>
-            <a:srgbClr val="A4472B"/>
+            <a:srgbClr val="FFFFFF"/>
           </a:solidFill>
           <a:ln>
             <a:noFill/>
@@ -11462,7 +11915,7 @@
             <a:r>
               <a:rPr sz="1500" i="0" b="1">
                 <a:solidFill>
-                  <a:srgbClr val="FFFFFF"/>
+                  <a:srgbClr val="2F6F7A"/>
                 </a:solidFill>
                 <a:latin typeface="Calibri"/>
               </a:rPr>
@@ -11479,8 +11932,8 @@
         </p:nvSpPr>
         <p:spPr>
           <a:xfrm>
-            <a:off x="1371600" y="5001768"/>
-            <a:ext cx="10088575" cy="640080"/>
+            <a:off x="1371600" y="4636008"/>
+            <a:ext cx="10088575" cy="548640"/>
           </a:xfrm>
           <a:prstGeom prst="rect">
             <a:avLst/>
@@ -11494,13 +11947,56 @@
           <a:lstStyle/>
           <a:p>
             <a:r>
-              <a:rPr sz="1900" i="0" b="0">
+              <a:rPr sz="1900" i="0" b="1">
+                <a:solidFill>
+                  <a:srgbClr val="FFFFFF"/>
+                </a:solidFill>
+                <a:latin typeface="Calibri"/>
+              </a:rPr>
+              <a:t>The injection helps in the short term, mainly to support exercise</a:t>
+            </a:r>
+          </a:p>
+        </p:txBody>
+      </p:sp>
+      <p:sp>
+        <p:nvSpPr>
+          <p:cNvPr id="21" name="TextBox 20"/>
+          <p:cNvSpPr txBox="1"/>
+          <p:nvPr/>
+        </p:nvSpPr>
+        <p:spPr>
+          <a:xfrm>
+            <a:off x="548640" y="5358384"/>
+            <a:ext cx="11094415" cy="685800"/>
+          </a:xfrm>
+          <a:prstGeom prst="rect">
+            <a:avLst/>
+          </a:prstGeom>
+          <a:noFill/>
+        </p:spPr>
+        <p:txBody>
+          <a:bodyPr wrap="square" anchor="t" lIns="0" rIns="0" tIns="0" bIns="0">
+            <a:spAutoFit/>
+          </a:bodyPr>
+          <a:lstStyle/>
+          <a:p>
+            <a:r>
+              <a:rPr sz="1500" i="0" b="1">
+                <a:solidFill>
+                  <a:srgbClr val="2F6F7A"/>
+                </a:solidFill>
+                <a:latin typeface="Calibri"/>
+              </a:rPr>
+              <a:t>Why:  </a:t>
+            </a:r>
+            <a:r>
+              <a:rPr sz="1500" i="0" b="0">
                 <a:solidFill>
                   <a:srgbClr val="2B211C"/>
                 </a:solidFill>
                 <a:latin typeface="Calibri"/>
               </a:rPr>
-              <a:t>The injection helps in the short term, mainly to support exercise</a:t>
+              <a:t>The benefit is real but short-term. A and B overstate the result; C is wrong.</a:t>
             </a:r>
           </a:p>
         </p:txBody>
@@ -11613,7 +12109,7 @@
                 </a:solidFill>
                 <a:latin typeface="Calibri"/>
               </a:rPr>
-              <a:t>SECTION 10  ·  QUESTION 3 OF 5  ·  ANSWER</a:t>
+              <a:t>SECTION 10  ·  QUESTION 4 OF 5</a:t>
             </a:r>
           </a:p>
         </p:txBody>
@@ -11647,7 +12143,7 @@
                 </a:solidFill>
                 <a:latin typeface="Cambria"/>
               </a:rPr>
-              <a:t>Check your answer</a:t>
+              <a:t>Your turn</a:t>
             </a:r>
           </a:p>
         </p:txBody>
@@ -11716,7 +12212,7 @@
                 </a:solidFill>
                 <a:latin typeface="Calibri"/>
               </a:rPr>
-              <a:t>19 / 25</a:t>
+              <a:t>19 / 24</a:t>
             </a:r>
           </a:p>
         </p:txBody>
@@ -11730,7 +12226,7 @@
           <p:nvPr/>
         </p:nvPicPr>
         <p:blipFill>
-          <a:blip r:embed="rId2"/>
+          <a:blip r:embed="rId3"/>
           <a:stretch>
             <a:fillRect/>
           </a:stretch>
@@ -11774,7 +12270,7 @@
                 </a:solidFill>
                 <a:latin typeface="Calibri"/>
               </a:rPr>
-              <a:t>The review showed a clear benefit at six weeks but little at one year. What should you tell the doctor?</a:t>
+              <a:t>Mr Ahmed's swelling and raised creatinine after naproxen are best classified as:</a:t>
             </a:r>
           </a:p>
         </p:txBody>
@@ -11787,8 +12283,8 @@
         </p:nvSpPr>
         <p:spPr>
           <a:xfrm>
-            <a:off x="548640" y="2606040"/>
-            <a:ext cx="11094415" cy="548640"/>
+            <a:off x="548640" y="2697480"/>
+            <a:ext cx="11094415" cy="640080"/>
           </a:xfrm>
           <a:prstGeom prst="roundRect">
             <a:avLst>
@@ -11796,7 +12292,7 @@
             </a:avLst>
           </a:prstGeom>
           <a:solidFill>
-            <a:srgbClr val="F5F4F4"/>
+            <a:srgbClr val="FAF4F2"/>
           </a:solidFill>
           <a:ln>
             <a:noFill/>
@@ -11833,14 +12329,14 @@
         </p:nvSpPr>
         <p:spPr>
           <a:xfrm>
-            <a:off x="713232" y="2670048"/>
+            <a:off x="713232" y="2807208"/>
             <a:ext cx="420624" cy="420624"/>
           </a:xfrm>
           <a:prstGeom prst="ellipse">
             <a:avLst/>
           </a:prstGeom>
           <a:solidFill>
-            <a:srgbClr val="E2E0DE"/>
+            <a:srgbClr val="A4472B"/>
           </a:solidFill>
           <a:ln>
             <a:noFill/>
@@ -11869,7 +12365,7 @@
             <a:r>
               <a:rPr sz="1500" i="0" b="1">
                 <a:solidFill>
-                  <a:srgbClr val="6E625B"/>
+                  <a:srgbClr val="FFFFFF"/>
                 </a:solidFill>
                 <a:latin typeface="Calibri"/>
               </a:rPr>
@@ -11886,8 +12382,8 @@
         </p:nvSpPr>
         <p:spPr>
           <a:xfrm>
-            <a:off x="1371600" y="2606040"/>
-            <a:ext cx="10088575" cy="548640"/>
+            <a:off x="1371600" y="2697480"/>
+            <a:ext cx="10088575" cy="640080"/>
           </a:xfrm>
           <a:prstGeom prst="rect">
             <a:avLst/>
@@ -11903,11 +12399,11 @@
             <a:r>
               <a:rPr sz="1900" i="0" b="0">
                 <a:solidFill>
-                  <a:srgbClr val="6E625B"/>
-                </a:solidFill>
-                <a:latin typeface="Calibri"/>
-              </a:rPr>
-              <a:t>The injection has no value</a:t>
+                  <a:srgbClr val="2B211C"/>
+                </a:solidFill>
+                <a:latin typeface="Calibri"/>
+              </a:rPr>
+              <a:t>Type A, moderate, not serious</a:t>
             </a:r>
           </a:p>
         </p:txBody>
@@ -11920,8 +12416,8 @@
         </p:nvSpPr>
         <p:spPr>
           <a:xfrm>
-            <a:off x="548640" y="3282696"/>
-            <a:ext cx="11094415" cy="548640"/>
+            <a:off x="548640" y="3465576"/>
+            <a:ext cx="11094415" cy="640080"/>
           </a:xfrm>
           <a:prstGeom prst="roundRect">
             <a:avLst>
@@ -11929,7 +12425,7 @@
             </a:avLst>
           </a:prstGeom>
           <a:solidFill>
-            <a:srgbClr val="F5F4F4"/>
+            <a:srgbClr val="FAF4F2"/>
           </a:solidFill>
           <a:ln>
             <a:noFill/>
@@ -11966,14 +12462,14 @@
         </p:nvSpPr>
         <p:spPr>
           <a:xfrm>
-            <a:off x="713232" y="3346703"/>
+            <a:off x="713232" y="3575304"/>
             <a:ext cx="420624" cy="420624"/>
           </a:xfrm>
           <a:prstGeom prst="ellipse">
             <a:avLst/>
           </a:prstGeom>
           <a:solidFill>
-            <a:srgbClr val="E2E0DE"/>
+            <a:srgbClr val="A4472B"/>
           </a:solidFill>
           <a:ln>
             <a:noFill/>
@@ -12002,7 +12498,7 @@
             <a:r>
               <a:rPr sz="1500" i="0" b="1">
                 <a:solidFill>
-                  <a:srgbClr val="6E625B"/>
+                  <a:srgbClr val="FFFFFF"/>
                 </a:solidFill>
                 <a:latin typeface="Calibri"/>
               </a:rPr>
@@ -12019,8 +12515,8 @@
         </p:nvSpPr>
         <p:spPr>
           <a:xfrm>
-            <a:off x="1371600" y="3282696"/>
-            <a:ext cx="10088575" cy="548640"/>
+            <a:off x="1371600" y="3465576"/>
+            <a:ext cx="10088575" cy="640080"/>
           </a:xfrm>
           <a:prstGeom prst="rect">
             <a:avLst/>
@@ -12036,11 +12532,11 @@
             <a:r>
               <a:rPr sz="1900" i="0" b="0">
                 <a:solidFill>
-                  <a:srgbClr val="6E625B"/>
-                </a:solidFill>
-                <a:latin typeface="Calibri"/>
-              </a:rPr>
-              <a:t>The injection cures frozen shoulder</a:t>
+                  <a:srgbClr val="2B211C"/>
+                </a:solidFill>
+                <a:latin typeface="Calibri"/>
+              </a:rPr>
+              <a:t>Type B, severe, serious</a:t>
             </a:r>
           </a:p>
         </p:txBody>
@@ -12053,8 +12549,8 @@
         </p:nvSpPr>
         <p:spPr>
           <a:xfrm>
-            <a:off x="548640" y="3959352"/>
-            <a:ext cx="11094415" cy="548640"/>
+            <a:off x="548640" y="4233672"/>
+            <a:ext cx="11094415" cy="640080"/>
           </a:xfrm>
           <a:prstGeom prst="roundRect">
             <a:avLst>
@@ -12062,7 +12558,7 @@
             </a:avLst>
           </a:prstGeom>
           <a:solidFill>
-            <a:srgbClr val="F5F4F4"/>
+            <a:srgbClr val="FAF4F2"/>
           </a:solidFill>
           <a:ln>
             <a:noFill/>
@@ -12099,14 +12595,14 @@
         </p:nvSpPr>
         <p:spPr>
           <a:xfrm>
-            <a:off x="713232" y="4023360"/>
+            <a:off x="713232" y="4343400"/>
             <a:ext cx="420624" cy="420624"/>
           </a:xfrm>
           <a:prstGeom prst="ellipse">
             <a:avLst/>
           </a:prstGeom>
           <a:solidFill>
-            <a:srgbClr val="E2E0DE"/>
+            <a:srgbClr val="A4472B"/>
           </a:solidFill>
           <a:ln>
             <a:noFill/>
@@ -12135,7 +12631,7 @@
             <a:r>
               <a:rPr sz="1500" i="0" b="1">
                 <a:solidFill>
-                  <a:srgbClr val="6E625B"/>
+                  <a:srgbClr val="FFFFFF"/>
                 </a:solidFill>
                 <a:latin typeface="Calibri"/>
               </a:rPr>
@@ -12152,8 +12648,8 @@
         </p:nvSpPr>
         <p:spPr>
           <a:xfrm>
-            <a:off x="1371600" y="3959352"/>
-            <a:ext cx="10088575" cy="548640"/>
+            <a:off x="1371600" y="4233672"/>
+            <a:ext cx="10088575" cy="640080"/>
           </a:xfrm>
           <a:prstGeom prst="rect">
             <a:avLst/>
@@ -12169,11 +12665,11 @@
             <a:r>
               <a:rPr sz="1900" i="0" b="0">
                 <a:solidFill>
-                  <a:srgbClr val="6E625B"/>
-                </a:solidFill>
-                <a:latin typeface="Calibri"/>
-              </a:rPr>
-              <a:t>The review is not relevant</a:t>
+                  <a:srgbClr val="2B211C"/>
+                </a:solidFill>
+                <a:latin typeface="Calibri"/>
+              </a:rPr>
+              <a:t>Type E, mild, not serious</a:t>
             </a:r>
           </a:p>
         </p:txBody>
@@ -12186,8 +12682,8 @@
         </p:nvSpPr>
         <p:spPr>
           <a:xfrm>
-            <a:off x="548640" y="4636008"/>
-            <a:ext cx="11094415" cy="548640"/>
+            <a:off x="548640" y="5001768"/>
+            <a:ext cx="11094415" cy="640080"/>
           </a:xfrm>
           <a:prstGeom prst="roundRect">
             <a:avLst>
@@ -12195,7 +12691,7 @@
             </a:avLst>
           </a:prstGeom>
           <a:solidFill>
-            <a:srgbClr val="2F6F7A"/>
+            <a:srgbClr val="FAF4F2"/>
           </a:solidFill>
           <a:ln>
             <a:noFill/>
@@ -12232,14 +12728,14 @@
         </p:nvSpPr>
         <p:spPr>
           <a:xfrm>
-            <a:off x="713232" y="4700016"/>
+            <a:off x="713232" y="5111496"/>
             <a:ext cx="420624" cy="420624"/>
           </a:xfrm>
           <a:prstGeom prst="ellipse">
             <a:avLst/>
           </a:prstGeom>
           <a:solidFill>
-            <a:srgbClr val="FFFFFF"/>
+            <a:srgbClr val="A4472B"/>
           </a:solidFill>
           <a:ln>
             <a:noFill/>
@@ -12268,7 +12764,7 @@
             <a:r>
               <a:rPr sz="1500" i="0" b="1">
                 <a:solidFill>
-                  <a:srgbClr val="2F6F7A"/>
+                  <a:srgbClr val="FFFFFF"/>
                 </a:solidFill>
                 <a:latin typeface="Calibri"/>
               </a:rPr>
@@ -12285,8 +12781,8 @@
         </p:nvSpPr>
         <p:spPr>
           <a:xfrm>
-            <a:off x="1371600" y="4636008"/>
-            <a:ext cx="10088575" cy="548640"/>
+            <a:off x="1371600" y="5001768"/>
+            <a:ext cx="10088575" cy="640080"/>
           </a:xfrm>
           <a:prstGeom prst="rect">
             <a:avLst/>
@@ -12300,56 +12796,13 @@
           <a:lstStyle/>
           <a:p>
             <a:r>
-              <a:rPr sz="1900" i="0" b="1">
-                <a:solidFill>
-                  <a:srgbClr val="FFFFFF"/>
-                </a:solidFill>
-                <a:latin typeface="Calibri"/>
-              </a:rPr>
-              <a:t>The injection helps in the short term, mainly to support exercise</a:t>
-            </a:r>
-          </a:p>
-        </p:txBody>
-      </p:sp>
-      <p:sp>
-        <p:nvSpPr>
-          <p:cNvPr id="21" name="TextBox 20"/>
-          <p:cNvSpPr txBox="1"/>
-          <p:nvPr/>
-        </p:nvSpPr>
-        <p:spPr>
-          <a:xfrm>
-            <a:off x="548640" y="5358384"/>
-            <a:ext cx="11094415" cy="685800"/>
-          </a:xfrm>
-          <a:prstGeom prst="rect">
-            <a:avLst/>
-          </a:prstGeom>
-          <a:noFill/>
-        </p:spPr>
-        <p:txBody>
-          <a:bodyPr wrap="square" anchor="t" lIns="0" rIns="0" tIns="0" bIns="0">
-            <a:spAutoFit/>
-          </a:bodyPr>
-          <a:lstStyle/>
-          <a:p>
-            <a:r>
-              <a:rPr sz="1500" i="0" b="1">
-                <a:solidFill>
-                  <a:srgbClr val="2F6F7A"/>
-                </a:solidFill>
-                <a:latin typeface="Calibri"/>
-              </a:rPr>
-              <a:t>Why:  </a:t>
-            </a:r>
-            <a:r>
-              <a:rPr sz="1500" i="0" b="0">
+              <a:rPr sz="1900" i="0" b="0">
                 <a:solidFill>
                   <a:srgbClr val="2B211C"/>
                 </a:solidFill>
                 <a:latin typeface="Calibri"/>
               </a:rPr>
-              <a:t>The benefit is real but short-term. A and B overstate the result; C is wrong.</a:t>
+              <a:t>Type F, moderate, serious</a:t>
             </a:r>
           </a:p>
         </p:txBody>
@@ -12565,7 +13018,7 @@
                 </a:solidFill>
                 <a:latin typeface="Calibri"/>
               </a:rPr>
-              <a:t>02 / 25</a:t>
+              <a:t>02 / 24</a:t>
             </a:r>
           </a:p>
         </p:txBody>
@@ -13200,7 +13653,7 @@
                 </a:solidFill>
                 <a:latin typeface="Calibri"/>
               </a:rPr>
-              <a:t>SECTION 10  ·  QUESTION 4 OF 5</a:t>
+              <a:t>SECTION 10  ·  QUESTION 4 OF 5  ·  ANSWER</a:t>
             </a:r>
           </a:p>
         </p:txBody>
@@ -13234,7 +13687,7 @@
                 </a:solidFill>
                 <a:latin typeface="Cambria"/>
               </a:rPr>
-              <a:t>Your turn</a:t>
+              <a:t>Check your answer</a:t>
             </a:r>
           </a:p>
         </p:txBody>
@@ -13303,7 +13756,7 @@
                 </a:solidFill>
                 <a:latin typeface="Calibri"/>
               </a:rPr>
-              <a:t>20 / 25</a:t>
+              <a:t>20 / 24</a:t>
             </a:r>
           </a:p>
         </p:txBody>
@@ -13317,7 +13770,7 @@
           <p:nvPr/>
         </p:nvPicPr>
         <p:blipFill>
-          <a:blip r:embed="rId3"/>
+          <a:blip r:embed="rId2"/>
           <a:stretch>
             <a:fillRect/>
           </a:stretch>
@@ -13374,8 +13827,8 @@
         </p:nvSpPr>
         <p:spPr>
           <a:xfrm>
-            <a:off x="548640" y="2697480"/>
-            <a:ext cx="11094415" cy="640080"/>
+            <a:off x="548640" y="2606040"/>
+            <a:ext cx="11094415" cy="548640"/>
           </a:xfrm>
           <a:prstGeom prst="roundRect">
             <a:avLst>
@@ -13383,7 +13836,7 @@
             </a:avLst>
           </a:prstGeom>
           <a:solidFill>
-            <a:srgbClr val="FAF4F2"/>
+            <a:srgbClr val="2F6F7A"/>
           </a:solidFill>
           <a:ln>
             <a:noFill/>
@@ -13420,14 +13873,14 @@
         </p:nvSpPr>
         <p:spPr>
           <a:xfrm>
-            <a:off x="713232" y="2807208"/>
+            <a:off x="713232" y="2670048"/>
             <a:ext cx="420624" cy="420624"/>
           </a:xfrm>
           <a:prstGeom prst="ellipse">
             <a:avLst/>
           </a:prstGeom>
           <a:solidFill>
-            <a:srgbClr val="A4472B"/>
+            <a:srgbClr val="FFFFFF"/>
           </a:solidFill>
           <a:ln>
             <a:noFill/>
@@ -13456,7 +13909,7 @@
             <a:r>
               <a:rPr sz="1500" i="0" b="1">
                 <a:solidFill>
-                  <a:srgbClr val="FFFFFF"/>
+                  <a:srgbClr val="2F6F7A"/>
                 </a:solidFill>
                 <a:latin typeface="Calibri"/>
               </a:rPr>
@@ -13473,8 +13926,8 @@
         </p:nvSpPr>
         <p:spPr>
           <a:xfrm>
-            <a:off x="1371600" y="2697480"/>
-            <a:ext cx="10088575" cy="640080"/>
+            <a:off x="1371600" y="2606040"/>
+            <a:ext cx="10088575" cy="548640"/>
           </a:xfrm>
           <a:prstGeom prst="rect">
             <a:avLst/>
@@ -13488,9 +13941,9 @@
           <a:lstStyle/>
           <a:p>
             <a:r>
-              <a:rPr sz="1900" i="0" b="0">
-                <a:solidFill>
-                  <a:srgbClr val="2B211C"/>
+              <a:rPr sz="1900" i="0" b="1">
+                <a:solidFill>
+                  <a:srgbClr val="FFFFFF"/>
                 </a:solidFill>
                 <a:latin typeface="Calibri"/>
               </a:rPr>
@@ -13507,8 +13960,8 @@
         </p:nvSpPr>
         <p:spPr>
           <a:xfrm>
-            <a:off x="548640" y="3465576"/>
-            <a:ext cx="11094415" cy="640080"/>
+            <a:off x="548640" y="3282696"/>
+            <a:ext cx="11094415" cy="548640"/>
           </a:xfrm>
           <a:prstGeom prst="roundRect">
             <a:avLst>
@@ -13516,7 +13969,7 @@
             </a:avLst>
           </a:prstGeom>
           <a:solidFill>
-            <a:srgbClr val="FAF4F2"/>
+            <a:srgbClr val="F5F4F4"/>
           </a:solidFill>
           <a:ln>
             <a:noFill/>
@@ -13553,14 +14006,14 @@
         </p:nvSpPr>
         <p:spPr>
           <a:xfrm>
-            <a:off x="713232" y="3575304"/>
+            <a:off x="713232" y="3346703"/>
             <a:ext cx="420624" cy="420624"/>
           </a:xfrm>
           <a:prstGeom prst="ellipse">
             <a:avLst/>
           </a:prstGeom>
           <a:solidFill>
-            <a:srgbClr val="A4472B"/>
+            <a:srgbClr val="E2E0DE"/>
           </a:solidFill>
           <a:ln>
             <a:noFill/>
@@ -13589,7 +14042,7 @@
             <a:r>
               <a:rPr sz="1500" i="0" b="1">
                 <a:solidFill>
-                  <a:srgbClr val="FFFFFF"/>
+                  <a:srgbClr val="6E625B"/>
                 </a:solidFill>
                 <a:latin typeface="Calibri"/>
               </a:rPr>
@@ -13606,8 +14059,8 @@
         </p:nvSpPr>
         <p:spPr>
           <a:xfrm>
-            <a:off x="1371600" y="3465576"/>
-            <a:ext cx="10088575" cy="640080"/>
+            <a:off x="1371600" y="3282696"/>
+            <a:ext cx="10088575" cy="548640"/>
           </a:xfrm>
           <a:prstGeom prst="rect">
             <a:avLst/>
@@ -13623,7 +14076,7 @@
             <a:r>
               <a:rPr sz="1900" i="0" b="0">
                 <a:solidFill>
-                  <a:srgbClr val="2B211C"/>
+                  <a:srgbClr val="6E625B"/>
                 </a:solidFill>
                 <a:latin typeface="Calibri"/>
               </a:rPr>
@@ -13640,8 +14093,8 @@
         </p:nvSpPr>
         <p:spPr>
           <a:xfrm>
-            <a:off x="548640" y="4233672"/>
-            <a:ext cx="11094415" cy="640080"/>
+            <a:off x="548640" y="3959352"/>
+            <a:ext cx="11094415" cy="548640"/>
           </a:xfrm>
           <a:prstGeom prst="roundRect">
             <a:avLst>
@@ -13649,7 +14102,7 @@
             </a:avLst>
           </a:prstGeom>
           <a:solidFill>
-            <a:srgbClr val="FAF4F2"/>
+            <a:srgbClr val="F5F4F4"/>
           </a:solidFill>
           <a:ln>
             <a:noFill/>
@@ -13686,14 +14139,14 @@
         </p:nvSpPr>
         <p:spPr>
           <a:xfrm>
-            <a:off x="713232" y="4343400"/>
+            <a:off x="713232" y="4023360"/>
             <a:ext cx="420624" cy="420624"/>
           </a:xfrm>
           <a:prstGeom prst="ellipse">
             <a:avLst/>
           </a:prstGeom>
           <a:solidFill>
-            <a:srgbClr val="A4472B"/>
+            <a:srgbClr val="E2E0DE"/>
           </a:solidFill>
           <a:ln>
             <a:noFill/>
@@ -13722,7 +14175,7 @@
             <a:r>
               <a:rPr sz="1500" i="0" b="1">
                 <a:solidFill>
-                  <a:srgbClr val="FFFFFF"/>
+                  <a:srgbClr val="6E625B"/>
                 </a:solidFill>
                 <a:latin typeface="Calibri"/>
               </a:rPr>
@@ -13739,8 +14192,8 @@
         </p:nvSpPr>
         <p:spPr>
           <a:xfrm>
-            <a:off x="1371600" y="4233672"/>
-            <a:ext cx="10088575" cy="640080"/>
+            <a:off x="1371600" y="3959352"/>
+            <a:ext cx="10088575" cy="548640"/>
           </a:xfrm>
           <a:prstGeom prst="rect">
             <a:avLst/>
@@ -13756,7 +14209,7 @@
             <a:r>
               <a:rPr sz="1900" i="0" b="0">
                 <a:solidFill>
-                  <a:srgbClr val="2B211C"/>
+                  <a:srgbClr val="6E625B"/>
                 </a:solidFill>
                 <a:latin typeface="Calibri"/>
               </a:rPr>
@@ -13773,8 +14226,8 @@
         </p:nvSpPr>
         <p:spPr>
           <a:xfrm>
-            <a:off x="548640" y="5001768"/>
-            <a:ext cx="11094415" cy="640080"/>
+            <a:off x="548640" y="4636008"/>
+            <a:ext cx="11094415" cy="548640"/>
           </a:xfrm>
           <a:prstGeom prst="roundRect">
             <a:avLst>
@@ -13782,7 +14235,7 @@
             </a:avLst>
           </a:prstGeom>
           <a:solidFill>
-            <a:srgbClr val="FAF4F2"/>
+            <a:srgbClr val="F5F4F4"/>
           </a:solidFill>
           <a:ln>
             <a:noFill/>
@@ -13819,14 +14272,14 @@
         </p:nvSpPr>
         <p:spPr>
           <a:xfrm>
-            <a:off x="713232" y="5111496"/>
+            <a:off x="713232" y="4700016"/>
             <a:ext cx="420624" cy="420624"/>
           </a:xfrm>
           <a:prstGeom prst="ellipse">
             <a:avLst/>
           </a:prstGeom>
           <a:solidFill>
-            <a:srgbClr val="A4472B"/>
+            <a:srgbClr val="E2E0DE"/>
           </a:solidFill>
           <a:ln>
             <a:noFill/>
@@ -13855,7 +14308,7 @@
             <a:r>
               <a:rPr sz="1500" i="0" b="1">
                 <a:solidFill>
-                  <a:srgbClr val="FFFFFF"/>
+                  <a:srgbClr val="6E625B"/>
                 </a:solidFill>
                 <a:latin typeface="Calibri"/>
               </a:rPr>
@@ -13872,8 +14325,8 @@
         </p:nvSpPr>
         <p:spPr>
           <a:xfrm>
-            <a:off x="1371600" y="5001768"/>
-            <a:ext cx="10088575" cy="640080"/>
+            <a:off x="1371600" y="4636008"/>
+            <a:ext cx="10088575" cy="548640"/>
           </a:xfrm>
           <a:prstGeom prst="rect">
             <a:avLst/>
@@ -13889,11 +14342,54 @@
             <a:r>
               <a:rPr sz="1900" i="0" b="0">
                 <a:solidFill>
+                  <a:srgbClr val="6E625B"/>
+                </a:solidFill>
+                <a:latin typeface="Calibri"/>
+              </a:rPr>
+              <a:t>Type F, moderate, serious</a:t>
+            </a:r>
+          </a:p>
+        </p:txBody>
+      </p:sp>
+      <p:sp>
+        <p:nvSpPr>
+          <p:cNvPr id="21" name="TextBox 20"/>
+          <p:cNvSpPr txBox="1"/>
+          <p:nvPr/>
+        </p:nvSpPr>
+        <p:spPr>
+          <a:xfrm>
+            <a:off x="548640" y="5358384"/>
+            <a:ext cx="11094415" cy="685800"/>
+          </a:xfrm>
+          <a:prstGeom prst="rect">
+            <a:avLst/>
+          </a:prstGeom>
+          <a:noFill/>
+        </p:spPr>
+        <p:txBody>
+          <a:bodyPr wrap="square" anchor="t" lIns="0" rIns="0" tIns="0" bIns="0">
+            <a:spAutoFit/>
+          </a:bodyPr>
+          <a:lstStyle/>
+          <a:p>
+            <a:r>
+              <a:rPr sz="1500" i="0" b="1">
+                <a:solidFill>
+                  <a:srgbClr val="2F6F7A"/>
+                </a:solidFill>
+                <a:latin typeface="Calibri"/>
+              </a:rPr>
+              <a:t>Why:  </a:t>
+            </a:r>
+            <a:r>
+              <a:rPr sz="1500" i="0" b="0">
+                <a:solidFill>
                   <a:srgbClr val="2B211C"/>
                 </a:solidFill>
                 <a:latin typeface="Calibri"/>
               </a:rPr>
-              <a:t>Type F, moderate, serious</a:t>
+              <a:t>Predictable pharmacology (Type A), treatment changed (moderate), no admission (not serious). B, C and D do not fit.</a:t>
             </a:r>
           </a:p>
         </p:txBody>
@@ -14006,7 +14502,7 @@
                 </a:solidFill>
                 <a:latin typeface="Calibri"/>
               </a:rPr>
-              <a:t>SECTION 10  ·  QUESTION 4 OF 5  ·  ANSWER</a:t>
+              <a:t>SECTION 10  ·  QUESTION 5 OF 5</a:t>
             </a:r>
           </a:p>
         </p:txBody>
@@ -14040,7 +14536,7 @@
                 </a:solidFill>
                 <a:latin typeface="Cambria"/>
               </a:rPr>
-              <a:t>Check your answer</a:t>
+              <a:t>Your turn</a:t>
             </a:r>
           </a:p>
         </p:txBody>
@@ -14109,7 +14605,7 @@
                 </a:solidFill>
                 <a:latin typeface="Calibri"/>
               </a:rPr>
-              <a:t>21 / 25</a:t>
+              <a:t>21 / 24</a:t>
             </a:r>
           </a:p>
         </p:txBody>
@@ -14123,7 +14619,7 @@
           <p:nvPr/>
         </p:nvPicPr>
         <p:blipFill>
-          <a:blip r:embed="rId2"/>
+          <a:blip r:embed="rId3"/>
           <a:stretch>
             <a:fillRect/>
           </a:stretch>
@@ -14167,7 +14663,7 @@
                 </a:solidFill>
                 <a:latin typeface="Calibri"/>
               </a:rPr>
-              <a:t>Mr Ahmed's swelling and raised creatinine after naproxen are best classified as:</a:t>
+              <a:t>What is the first step after finding his raised creatinine?</a:t>
             </a:r>
           </a:p>
         </p:txBody>
@@ -14180,8 +14676,8 @@
         </p:nvSpPr>
         <p:spPr>
           <a:xfrm>
-            <a:off x="548640" y="2606040"/>
-            <a:ext cx="11094415" cy="548640"/>
+            <a:off x="548640" y="2697480"/>
+            <a:ext cx="11094415" cy="640080"/>
           </a:xfrm>
           <a:prstGeom prst="roundRect">
             <a:avLst>
@@ -14189,7 +14685,7 @@
             </a:avLst>
           </a:prstGeom>
           <a:solidFill>
-            <a:srgbClr val="2F6F7A"/>
+            <a:srgbClr val="FAF4F2"/>
           </a:solidFill>
           <a:ln>
             <a:noFill/>
@@ -14226,14 +14722,14 @@
         </p:nvSpPr>
         <p:spPr>
           <a:xfrm>
-            <a:off x="713232" y="2670048"/>
+            <a:off x="713232" y="2807208"/>
             <a:ext cx="420624" cy="420624"/>
           </a:xfrm>
           <a:prstGeom prst="ellipse">
             <a:avLst/>
           </a:prstGeom>
           <a:solidFill>
-            <a:srgbClr val="FFFFFF"/>
+            <a:srgbClr val="A4472B"/>
           </a:solidFill>
           <a:ln>
             <a:noFill/>
@@ -14262,7 +14758,7 @@
             <a:r>
               <a:rPr sz="1500" i="0" b="1">
                 <a:solidFill>
-                  <a:srgbClr val="2F6F7A"/>
+                  <a:srgbClr val="FFFFFF"/>
                 </a:solidFill>
                 <a:latin typeface="Calibri"/>
               </a:rPr>
@@ -14279,8 +14775,8 @@
         </p:nvSpPr>
         <p:spPr>
           <a:xfrm>
-            <a:off x="1371600" y="2606040"/>
-            <a:ext cx="10088575" cy="548640"/>
+            <a:off x="1371600" y="2697480"/>
+            <a:ext cx="10088575" cy="640080"/>
           </a:xfrm>
           <a:prstGeom prst="rect">
             <a:avLst/>
@@ -14294,13 +14790,13 @@
           <a:lstStyle/>
           <a:p>
             <a:r>
-              <a:rPr sz="1900" i="0" b="1">
-                <a:solidFill>
-                  <a:srgbClr val="FFFFFF"/>
-                </a:solidFill>
-                <a:latin typeface="Calibri"/>
-              </a:rPr>
-              <a:t>Type A, moderate, not serious</a:t>
+              <a:rPr sz="1900" i="0" b="0">
+                <a:solidFill>
+                  <a:srgbClr val="2B211C"/>
+                </a:solidFill>
+                <a:latin typeface="Calibri"/>
+              </a:rPr>
+              <a:t>Report to the EPVC</a:t>
             </a:r>
           </a:p>
         </p:txBody>
@@ -14313,8 +14809,8 @@
         </p:nvSpPr>
         <p:spPr>
           <a:xfrm>
-            <a:off x="548640" y="3282696"/>
-            <a:ext cx="11094415" cy="548640"/>
+            <a:off x="548640" y="3465576"/>
+            <a:ext cx="11094415" cy="640080"/>
           </a:xfrm>
           <a:prstGeom prst="roundRect">
             <a:avLst>
@@ -14322,7 +14818,7 @@
             </a:avLst>
           </a:prstGeom>
           <a:solidFill>
-            <a:srgbClr val="F5F4F4"/>
+            <a:srgbClr val="FAF4F2"/>
           </a:solidFill>
           <a:ln>
             <a:noFill/>
@@ -14359,14 +14855,14 @@
         </p:nvSpPr>
         <p:spPr>
           <a:xfrm>
-            <a:off x="713232" y="3346703"/>
+            <a:off x="713232" y="3575304"/>
             <a:ext cx="420624" cy="420624"/>
           </a:xfrm>
           <a:prstGeom prst="ellipse">
             <a:avLst/>
           </a:prstGeom>
           <a:solidFill>
-            <a:srgbClr val="E2E0DE"/>
+            <a:srgbClr val="A4472B"/>
           </a:solidFill>
           <a:ln>
             <a:noFill/>
@@ -14395,7 +14891,7 @@
             <a:r>
               <a:rPr sz="1500" i="0" b="1">
                 <a:solidFill>
-                  <a:srgbClr val="6E625B"/>
+                  <a:srgbClr val="FFFFFF"/>
                 </a:solidFill>
                 <a:latin typeface="Calibri"/>
               </a:rPr>
@@ -14412,8 +14908,8 @@
         </p:nvSpPr>
         <p:spPr>
           <a:xfrm>
-            <a:off x="1371600" y="3282696"/>
-            <a:ext cx="10088575" cy="548640"/>
+            <a:off x="1371600" y="3465576"/>
+            <a:ext cx="10088575" cy="640080"/>
           </a:xfrm>
           <a:prstGeom prst="rect">
             <a:avLst/>
@@ -14429,11 +14925,11 @@
             <a:r>
               <a:rPr sz="1900" i="0" b="0">
                 <a:solidFill>
-                  <a:srgbClr val="6E625B"/>
-                </a:solidFill>
-                <a:latin typeface="Calibri"/>
-              </a:rPr>
-              <a:t>Type B, severe, serious</a:t>
+                  <a:srgbClr val="2B211C"/>
+                </a:solidFill>
+                <a:latin typeface="Calibri"/>
+              </a:rPr>
+              <a:t>Complete the Naranjo score</a:t>
             </a:r>
           </a:p>
         </p:txBody>
@@ -14446,8 +14942,8 @@
         </p:nvSpPr>
         <p:spPr>
           <a:xfrm>
-            <a:off x="548640" y="3959352"/>
-            <a:ext cx="11094415" cy="548640"/>
+            <a:off x="548640" y="4233672"/>
+            <a:ext cx="11094415" cy="640080"/>
           </a:xfrm>
           <a:prstGeom prst="roundRect">
             <a:avLst>
@@ -14455,7 +14951,7 @@
             </a:avLst>
           </a:prstGeom>
           <a:solidFill>
-            <a:srgbClr val="F5F4F4"/>
+            <a:srgbClr val="FAF4F2"/>
           </a:solidFill>
           <a:ln>
             <a:noFill/>
@@ -14492,14 +14988,14 @@
         </p:nvSpPr>
         <p:spPr>
           <a:xfrm>
-            <a:off x="713232" y="4023360"/>
+            <a:off x="713232" y="4343400"/>
             <a:ext cx="420624" cy="420624"/>
           </a:xfrm>
           <a:prstGeom prst="ellipse">
             <a:avLst/>
           </a:prstGeom>
           <a:solidFill>
-            <a:srgbClr val="E2E0DE"/>
+            <a:srgbClr val="A4472B"/>
           </a:solidFill>
           <a:ln>
             <a:noFill/>
@@ -14528,7 +15024,7 @@
             <a:r>
               <a:rPr sz="1500" i="0" b="1">
                 <a:solidFill>
-                  <a:srgbClr val="6E625B"/>
+                  <a:srgbClr val="FFFFFF"/>
                 </a:solidFill>
                 <a:latin typeface="Calibri"/>
               </a:rPr>
@@ -14545,8 +15041,8 @@
         </p:nvSpPr>
         <p:spPr>
           <a:xfrm>
-            <a:off x="1371600" y="3959352"/>
-            <a:ext cx="10088575" cy="548640"/>
+            <a:off x="1371600" y="4233672"/>
+            <a:ext cx="10088575" cy="640080"/>
           </a:xfrm>
           <a:prstGeom prst="rect">
             <a:avLst/>
@@ -14562,11 +15058,11 @@
             <a:r>
               <a:rPr sz="1900" i="0" b="0">
                 <a:solidFill>
-                  <a:srgbClr val="6E625B"/>
-                </a:solidFill>
-                <a:latin typeface="Calibri"/>
-              </a:rPr>
-              <a:t>Type E, mild, not serious</a:t>
+                  <a:srgbClr val="2B211C"/>
+                </a:solidFill>
+                <a:latin typeface="Calibri"/>
+              </a:rPr>
+              <a:t>Stop naproxen and contact the doctor</a:t>
             </a:r>
           </a:p>
         </p:txBody>
@@ -14579,8 +15075,8 @@
         </p:nvSpPr>
         <p:spPr>
           <a:xfrm>
-            <a:off x="548640" y="4636008"/>
-            <a:ext cx="11094415" cy="548640"/>
+            <a:off x="548640" y="5001768"/>
+            <a:ext cx="11094415" cy="640080"/>
           </a:xfrm>
           <a:prstGeom prst="roundRect">
             <a:avLst>
@@ -14588,7 +15084,7 @@
             </a:avLst>
           </a:prstGeom>
           <a:solidFill>
-            <a:srgbClr val="F5F4F4"/>
+            <a:srgbClr val="FAF4F2"/>
           </a:solidFill>
           <a:ln>
             <a:noFill/>
@@ -14625,14 +15121,14 @@
         </p:nvSpPr>
         <p:spPr>
           <a:xfrm>
-            <a:off x="713232" y="4700016"/>
+            <a:off x="713232" y="5111496"/>
             <a:ext cx="420624" cy="420624"/>
           </a:xfrm>
           <a:prstGeom prst="ellipse">
             <a:avLst/>
           </a:prstGeom>
           <a:solidFill>
-            <a:srgbClr val="E2E0DE"/>
+            <a:srgbClr val="A4472B"/>
           </a:solidFill>
           <a:ln>
             <a:noFill/>
@@ -14661,7 +15157,7 @@
             <a:r>
               <a:rPr sz="1500" i="0" b="1">
                 <a:solidFill>
-                  <a:srgbClr val="6E625B"/>
+                  <a:srgbClr val="FFFFFF"/>
                 </a:solidFill>
                 <a:latin typeface="Calibri"/>
               </a:rPr>
@@ -14678,8 +15174,8 @@
         </p:nvSpPr>
         <p:spPr>
           <a:xfrm>
-            <a:off x="1371600" y="4636008"/>
-            <a:ext cx="10088575" cy="548640"/>
+            <a:off x="1371600" y="5001768"/>
+            <a:ext cx="10088575" cy="640080"/>
           </a:xfrm>
           <a:prstGeom prst="rect">
             <a:avLst/>
@@ -14695,54 +15191,11 @@
             <a:r>
               <a:rPr sz="1900" i="0" b="0">
                 <a:solidFill>
-                  <a:srgbClr val="6E625B"/>
-                </a:solidFill>
-                <a:latin typeface="Calibri"/>
-              </a:rPr>
-              <a:t>Type F, moderate, serious</a:t>
-            </a:r>
-          </a:p>
-        </p:txBody>
-      </p:sp>
-      <p:sp>
-        <p:nvSpPr>
-          <p:cNvPr id="21" name="TextBox 20"/>
-          <p:cNvSpPr txBox="1"/>
-          <p:nvPr/>
-        </p:nvSpPr>
-        <p:spPr>
-          <a:xfrm>
-            <a:off x="548640" y="5358384"/>
-            <a:ext cx="11094415" cy="685800"/>
-          </a:xfrm>
-          <a:prstGeom prst="rect">
-            <a:avLst/>
-          </a:prstGeom>
-          <a:noFill/>
-        </p:spPr>
-        <p:txBody>
-          <a:bodyPr wrap="square" anchor="t" lIns="0" rIns="0" tIns="0" bIns="0">
-            <a:spAutoFit/>
-          </a:bodyPr>
-          <a:lstStyle/>
-          <a:p>
-            <a:r>
-              <a:rPr sz="1500" i="0" b="1">
-                <a:solidFill>
-                  <a:srgbClr val="2F6F7A"/>
-                </a:solidFill>
-                <a:latin typeface="Calibri"/>
-              </a:rPr>
-              <a:t>Why:  </a:t>
-            </a:r>
-            <a:r>
-              <a:rPr sz="1500" i="0" b="0">
-                <a:solidFill>
                   <a:srgbClr val="2B211C"/>
                 </a:solidFill>
                 <a:latin typeface="Calibri"/>
               </a:rPr>
-              <a:t>Predictable pharmacology (Type A), treatment changed (moderate), no admission (not serious). B, C and D do not fit.</a:t>
+              <a:t>Increase the naproxen dose</a:t>
             </a:r>
           </a:p>
         </p:txBody>
@@ -14855,7 +15308,7 @@
                 </a:solidFill>
                 <a:latin typeface="Calibri"/>
               </a:rPr>
-              <a:t>SECTION 10  ·  QUESTION 5 OF 5</a:t>
+              <a:t>SECTION 10  ·  QUESTION 5 OF 5  ·  ANSWER</a:t>
             </a:r>
           </a:p>
         </p:txBody>
@@ -14889,7 +15342,7 @@
                 </a:solidFill>
                 <a:latin typeface="Cambria"/>
               </a:rPr>
-              <a:t>Your turn</a:t>
+              <a:t>Check your answer</a:t>
             </a:r>
           </a:p>
         </p:txBody>
@@ -14958,7 +15411,7 @@
                 </a:solidFill>
                 <a:latin typeface="Calibri"/>
               </a:rPr>
-              <a:t>22 / 25</a:t>
+              <a:t>22 / 24</a:t>
             </a:r>
           </a:p>
         </p:txBody>
@@ -14972,7 +15425,7 @@
           <p:nvPr/>
         </p:nvPicPr>
         <p:blipFill>
-          <a:blip r:embed="rId3"/>
+          <a:blip r:embed="rId2"/>
           <a:stretch>
             <a:fillRect/>
           </a:stretch>
@@ -15029,8 +15482,8 @@
         </p:nvSpPr>
         <p:spPr>
           <a:xfrm>
-            <a:off x="548640" y="2697480"/>
-            <a:ext cx="11094415" cy="640080"/>
+            <a:off x="548640" y="2606040"/>
+            <a:ext cx="11094415" cy="548640"/>
           </a:xfrm>
           <a:prstGeom prst="roundRect">
             <a:avLst>
@@ -15038,7 +15491,7 @@
             </a:avLst>
           </a:prstGeom>
           <a:solidFill>
-            <a:srgbClr val="FAF4F2"/>
+            <a:srgbClr val="F5F4F4"/>
           </a:solidFill>
           <a:ln>
             <a:noFill/>
@@ -15075,14 +15528,14 @@
         </p:nvSpPr>
         <p:spPr>
           <a:xfrm>
-            <a:off x="713232" y="2807208"/>
+            <a:off x="713232" y="2670048"/>
             <a:ext cx="420624" cy="420624"/>
           </a:xfrm>
           <a:prstGeom prst="ellipse">
             <a:avLst/>
           </a:prstGeom>
           <a:solidFill>
-            <a:srgbClr val="A4472B"/>
+            <a:srgbClr val="E2E0DE"/>
           </a:solidFill>
           <a:ln>
             <a:noFill/>
@@ -15111,7 +15564,7 @@
             <a:r>
               <a:rPr sz="1500" i="0" b="1">
                 <a:solidFill>
-                  <a:srgbClr val="FFFFFF"/>
+                  <a:srgbClr val="6E625B"/>
                 </a:solidFill>
                 <a:latin typeface="Calibri"/>
               </a:rPr>
@@ -15128,8 +15581,8 @@
         </p:nvSpPr>
         <p:spPr>
           <a:xfrm>
-            <a:off x="1371600" y="2697480"/>
-            <a:ext cx="10088575" cy="640080"/>
+            <a:off x="1371600" y="2606040"/>
+            <a:ext cx="10088575" cy="548640"/>
           </a:xfrm>
           <a:prstGeom prst="rect">
             <a:avLst/>
@@ -15145,7 +15598,7 @@
             <a:r>
               <a:rPr sz="1900" i="0" b="0">
                 <a:solidFill>
-                  <a:srgbClr val="2B211C"/>
+                  <a:srgbClr val="6E625B"/>
                 </a:solidFill>
                 <a:latin typeface="Calibri"/>
               </a:rPr>
@@ -15162,8 +15615,8 @@
         </p:nvSpPr>
         <p:spPr>
           <a:xfrm>
-            <a:off x="548640" y="3465576"/>
-            <a:ext cx="11094415" cy="640080"/>
+            <a:off x="548640" y="3282696"/>
+            <a:ext cx="11094415" cy="548640"/>
           </a:xfrm>
           <a:prstGeom prst="roundRect">
             <a:avLst>
@@ -15171,7 +15624,7 @@
             </a:avLst>
           </a:prstGeom>
           <a:solidFill>
-            <a:srgbClr val="FAF4F2"/>
+            <a:srgbClr val="F5F4F4"/>
           </a:solidFill>
           <a:ln>
             <a:noFill/>
@@ -15208,14 +15661,14 @@
         </p:nvSpPr>
         <p:spPr>
           <a:xfrm>
-            <a:off x="713232" y="3575304"/>
+            <a:off x="713232" y="3346703"/>
             <a:ext cx="420624" cy="420624"/>
           </a:xfrm>
           <a:prstGeom prst="ellipse">
             <a:avLst/>
           </a:prstGeom>
           <a:solidFill>
-            <a:srgbClr val="A4472B"/>
+            <a:srgbClr val="E2E0DE"/>
           </a:solidFill>
           <a:ln>
             <a:noFill/>
@@ -15244,7 +15697,7 @@
             <a:r>
               <a:rPr sz="1500" i="0" b="1">
                 <a:solidFill>
-                  <a:srgbClr val="FFFFFF"/>
+                  <a:srgbClr val="6E625B"/>
                 </a:solidFill>
                 <a:latin typeface="Calibri"/>
               </a:rPr>
@@ -15261,8 +15714,8 @@
         </p:nvSpPr>
         <p:spPr>
           <a:xfrm>
-            <a:off x="1371600" y="3465576"/>
-            <a:ext cx="10088575" cy="640080"/>
+            <a:off x="1371600" y="3282696"/>
+            <a:ext cx="10088575" cy="548640"/>
           </a:xfrm>
           <a:prstGeom prst="rect">
             <a:avLst/>
@@ -15278,7 +15731,7 @@
             <a:r>
               <a:rPr sz="1900" i="0" b="0">
                 <a:solidFill>
-                  <a:srgbClr val="2B211C"/>
+                  <a:srgbClr val="6E625B"/>
                 </a:solidFill>
                 <a:latin typeface="Calibri"/>
               </a:rPr>
@@ -15295,8 +15748,8 @@
         </p:nvSpPr>
         <p:spPr>
           <a:xfrm>
-            <a:off x="548640" y="4233672"/>
-            <a:ext cx="11094415" cy="640080"/>
+            <a:off x="548640" y="3959352"/>
+            <a:ext cx="11094415" cy="548640"/>
           </a:xfrm>
           <a:prstGeom prst="roundRect">
             <a:avLst>
@@ -15304,7 +15757,7 @@
             </a:avLst>
           </a:prstGeom>
           <a:solidFill>
-            <a:srgbClr val="FAF4F2"/>
+            <a:srgbClr val="2F6F7A"/>
           </a:solidFill>
           <a:ln>
             <a:noFill/>
@@ -15341,14 +15794,14 @@
         </p:nvSpPr>
         <p:spPr>
           <a:xfrm>
-            <a:off x="713232" y="4343400"/>
+            <a:off x="713232" y="4023360"/>
             <a:ext cx="420624" cy="420624"/>
           </a:xfrm>
           <a:prstGeom prst="ellipse">
             <a:avLst/>
           </a:prstGeom>
           <a:solidFill>
-            <a:srgbClr val="A4472B"/>
+            <a:srgbClr val="FFFFFF"/>
           </a:solidFill>
           <a:ln>
             <a:noFill/>
@@ -15377,7 +15830,7 @@
             <a:r>
               <a:rPr sz="1500" i="0" b="1">
                 <a:solidFill>
-                  <a:srgbClr val="FFFFFF"/>
+                  <a:srgbClr val="2F6F7A"/>
                 </a:solidFill>
                 <a:latin typeface="Calibri"/>
               </a:rPr>
@@ -15394,8 +15847,8 @@
         </p:nvSpPr>
         <p:spPr>
           <a:xfrm>
-            <a:off x="1371600" y="4233672"/>
-            <a:ext cx="10088575" cy="640080"/>
+            <a:off x="1371600" y="3959352"/>
+            <a:ext cx="10088575" cy="548640"/>
           </a:xfrm>
           <a:prstGeom prst="rect">
             <a:avLst/>
@@ -15409,9 +15862,9 @@
           <a:lstStyle/>
           <a:p>
             <a:r>
-              <a:rPr sz="1900" i="0" b="0">
-                <a:solidFill>
-                  <a:srgbClr val="2B211C"/>
+              <a:rPr sz="1900" i="0" b="1">
+                <a:solidFill>
+                  <a:srgbClr val="FFFFFF"/>
                 </a:solidFill>
                 <a:latin typeface="Calibri"/>
               </a:rPr>
@@ -15428,8 +15881,8 @@
         </p:nvSpPr>
         <p:spPr>
           <a:xfrm>
-            <a:off x="548640" y="5001768"/>
-            <a:ext cx="11094415" cy="640080"/>
+            <a:off x="548640" y="4636008"/>
+            <a:ext cx="11094415" cy="548640"/>
           </a:xfrm>
           <a:prstGeom prst="roundRect">
             <a:avLst>
@@ -15437,7 +15890,7 @@
             </a:avLst>
           </a:prstGeom>
           <a:solidFill>
-            <a:srgbClr val="FAF4F2"/>
+            <a:srgbClr val="F5F4F4"/>
           </a:solidFill>
           <a:ln>
             <a:noFill/>
@@ -15474,14 +15927,14 @@
         </p:nvSpPr>
         <p:spPr>
           <a:xfrm>
-            <a:off x="713232" y="5111496"/>
+            <a:off x="713232" y="4700016"/>
             <a:ext cx="420624" cy="420624"/>
           </a:xfrm>
           <a:prstGeom prst="ellipse">
             <a:avLst/>
           </a:prstGeom>
           <a:solidFill>
-            <a:srgbClr val="A4472B"/>
+            <a:srgbClr val="E2E0DE"/>
           </a:solidFill>
           <a:ln>
             <a:noFill/>
@@ -15510,7 +15963,7 @@
             <a:r>
               <a:rPr sz="1500" i="0" b="1">
                 <a:solidFill>
-                  <a:srgbClr val="FFFFFF"/>
+                  <a:srgbClr val="6E625B"/>
                 </a:solidFill>
                 <a:latin typeface="Calibri"/>
               </a:rPr>
@@ -15527,8 +15980,8 @@
         </p:nvSpPr>
         <p:spPr>
           <a:xfrm>
-            <a:off x="1371600" y="5001768"/>
-            <a:ext cx="10088575" cy="640080"/>
+            <a:off x="1371600" y="4636008"/>
+            <a:ext cx="10088575" cy="548640"/>
           </a:xfrm>
           <a:prstGeom prst="rect">
             <a:avLst/>
@@ -15544,11 +15997,54 @@
             <a:r>
               <a:rPr sz="1900" i="0" b="0">
                 <a:solidFill>
+                  <a:srgbClr val="6E625B"/>
+                </a:solidFill>
+                <a:latin typeface="Calibri"/>
+              </a:rPr>
+              <a:t>Increase the naproxen dose</a:t>
+            </a:r>
+          </a:p>
+        </p:txBody>
+      </p:sp>
+      <p:sp>
+        <p:nvSpPr>
+          <p:cNvPr id="21" name="TextBox 20"/>
+          <p:cNvSpPr txBox="1"/>
+          <p:nvPr/>
+        </p:nvSpPr>
+        <p:spPr>
+          <a:xfrm>
+            <a:off x="548640" y="5358384"/>
+            <a:ext cx="11094415" cy="685800"/>
+          </a:xfrm>
+          <a:prstGeom prst="rect">
+            <a:avLst/>
+          </a:prstGeom>
+          <a:noFill/>
+        </p:spPr>
+        <p:txBody>
+          <a:bodyPr wrap="square" anchor="t" lIns="0" rIns="0" tIns="0" bIns="0">
+            <a:spAutoFit/>
+          </a:bodyPr>
+          <a:lstStyle/>
+          <a:p>
+            <a:r>
+              <a:rPr sz="1500" i="0" b="1">
+                <a:solidFill>
+                  <a:srgbClr val="2F6F7A"/>
+                </a:solidFill>
+                <a:latin typeface="Calibri"/>
+              </a:rPr>
+              <a:t>Why:  </a:t>
+            </a:r>
+            <a:r>
+              <a:rPr sz="1500" i="0" b="0">
+                <a:solidFill>
                   <a:srgbClr val="2B211C"/>
                 </a:solidFill>
                 <a:latin typeface="Calibri"/>
               </a:rPr>
-              <a:t>Increase the naproxen dose</a:t>
+              <a:t>Patient care comes first. A and B follow; D is harmful.</a:t>
             </a:r>
           </a:p>
         </p:txBody>
@@ -15581,20 +16077,20 @@
       <p:grpSpPr/>
       <p:sp>
         <p:nvSpPr>
-          <p:cNvPr id="2" name="Oval 1"/>
+          <p:cNvPr id="2" name="Rectangle 1"/>
           <p:cNvSpPr/>
           <p:nvPr/>
         </p:nvSpPr>
         <p:spPr>
           <a:xfrm>
-            <a:off x="548640" y="475488"/>
-            <a:ext cx="658368" cy="658368"/>
-          </a:xfrm>
-          <a:prstGeom prst="ellipse">
+            <a:off x="0" y="0"/>
+            <a:ext cx="3931920" cy="6858000"/>
+          </a:xfrm>
+          <a:prstGeom prst="rect">
             <a:avLst/>
           </a:prstGeom>
           <a:solidFill>
-            <a:srgbClr val="2F6F7A"/>
+            <a:srgbClr val="A4472B"/>
           </a:solidFill>
           <a:ln>
             <a:noFill/>
@@ -15616,19 +16112,10 @@
           </a:fontRef>
         </p:style>
         <p:txBody>
-          <a:bodyPr rtlCol="0" anchor="ctr" lIns="0" rIns="0" tIns="0" bIns="0"/>
+          <a:bodyPr rtlCol="0" anchor="ctr"/>
           <a:lstStyle/>
           <a:p>
             <a:pPr algn="ctr"/>
-            <a:r>
-              <a:rPr sz="1800" i="0" b="1">
-                <a:solidFill>
-                  <a:srgbClr val="FFFFFF"/>
-                </a:solidFill>
-                <a:latin typeface="Cambria"/>
-              </a:rPr>
-              <a:t>10</a:t>
-            </a:r>
           </a:p>
         </p:txBody>
       </p:sp>
@@ -15640,8 +16127,8 @@
         </p:nvSpPr>
         <p:spPr>
           <a:xfrm>
-            <a:off x="1417319" y="438912"/>
-            <a:ext cx="10180015" cy="292608"/>
+            <a:off x="548640" y="1188720"/>
+            <a:ext cx="2926080" cy="2377440"/>
           </a:xfrm>
           <a:prstGeom prst="rect">
             <a:avLst/>
@@ -15655,13 +16142,13 @@
           <a:lstStyle/>
           <a:p>
             <a:r>
-              <a:rPr sz="1200" i="0" b="1" spc="150">
-                <a:solidFill>
-                  <a:srgbClr val="2F6F7A"/>
-                </a:solidFill>
-                <a:latin typeface="Calibri"/>
-              </a:rPr>
-              <a:t>SECTION 10  ·  QUESTION 5 OF 5  ·  ANSWER</a:t>
+              <a:rPr sz="13000" i="0" b="1">
+                <a:solidFill>
+                  <a:srgbClr val="F1E3DF"/>
+                </a:solidFill>
+                <a:latin typeface="Cambria"/>
+              </a:rPr>
+              <a:t>?</a:t>
             </a:r>
           </a:p>
         </p:txBody>
@@ -15674,8 +16161,8 @@
         </p:nvSpPr>
         <p:spPr>
           <a:xfrm>
-            <a:off x="1417319" y="676656"/>
-            <a:ext cx="10180015" cy="640080"/>
+            <a:off x="548640" y="3977639"/>
+            <a:ext cx="3017520" cy="1280160"/>
           </a:xfrm>
           <a:prstGeom prst="rect">
             <a:avLst/>
@@ -15689,13 +16176,24 @@
           <a:lstStyle/>
           <a:p>
             <a:r>
-              <a:rPr sz="3200" i="0" b="1">
-                <a:solidFill>
-                  <a:srgbClr val="2B211C"/>
+              <a:rPr sz="3000" i="0" b="1">
+                <a:solidFill>
+                  <a:srgbClr val="FFFFFF"/>
                 </a:solidFill>
                 <a:latin typeface="Cambria"/>
               </a:rPr>
-              <a:t>Check your answer</a:t>
+              <a:t>Practice Case</a:t>
+            </a:r>
+          </a:p>
+          <a:p>
+            <a:r>
+              <a:rPr sz="1400" i="0" b="1" spc="150">
+                <a:solidFill>
+                  <a:srgbClr val="F1E3DF"/>
+                </a:solidFill>
+                <a:latin typeface="Calibri"/>
+              </a:rPr>
+              <a:t>Section 10</a:t>
             </a:r>
           </a:p>
         </p:txBody>
@@ -15708,7 +16206,41 @@
         </p:nvSpPr>
         <p:spPr>
           <a:xfrm>
-            <a:off x="548640" y="6419088"/>
+            <a:off x="4526280" y="822960"/>
+            <a:ext cx="7132320" cy="5120640"/>
+          </a:xfrm>
+          <a:prstGeom prst="rect">
+            <a:avLst/>
+          </a:prstGeom>
+          <a:noFill/>
+        </p:spPr>
+        <p:txBody>
+          <a:bodyPr wrap="square" anchor="ctr" lIns="0" rIns="0" tIns="0" bIns="0">
+            <a:spAutoFit/>
+          </a:bodyPr>
+          <a:lstStyle/>
+          <a:p>
+            <a:r>
+              <a:rPr sz="2200" i="0" b="0">
+                <a:solidFill>
+                  <a:srgbClr val="2B211C"/>
+                </a:solidFill>
+                <a:latin typeface="Calibri"/>
+              </a:rPr>
+              <a:t>Six months later, Mr Ahmed's brother (62, diabetic, on metformin and enalapril) asks the pharmacist for "the same painkiller" for his knee. (a) List the background details you need. (b) What would you advise? (c) Which source would you check first, and why?</a:t>
+            </a:r>
+          </a:p>
+        </p:txBody>
+      </p:sp>
+      <p:sp>
+        <p:nvSpPr>
+          <p:cNvPr id="6" name="TextBox 5"/>
+          <p:cNvSpPr txBox="1"/>
+          <p:nvPr/>
+        </p:nvSpPr>
+        <p:spPr>
+          <a:xfrm>
+            <a:off x="4526280" y="6419088"/>
             <a:ext cx="8229600" cy="274320"/>
           </a:xfrm>
           <a:prstGeom prst="rect">
@@ -15729,14 +16261,14 @@
                 </a:solidFill>
                 <a:latin typeface="Calibri"/>
               </a:rPr>
-              <a:t>Drug Information  ·  Section 10  ·  Applied Case: Answering a Real Drug Question</a:t>
-            </a:r>
-          </a:p>
-        </p:txBody>
-      </p:sp>
-      <p:sp>
-        <p:nvSpPr>
-          <p:cNvPr id="6" name="TextBox 5"/>
+              <a:t>Drug Information  ·  Applied Case: Answering a Real Drug Question</a:t>
+            </a:r>
+          </a:p>
+        </p:txBody>
+      </p:sp>
+      <p:sp>
+        <p:nvSpPr>
+          <p:cNvPr id="7" name="TextBox 6"/>
           <p:cNvSpPr txBox="1"/>
           <p:nvPr/>
         </p:nvSpPr>
@@ -15764,21 +16296,21 @@
                 </a:solidFill>
                 <a:latin typeface="Calibri"/>
               </a:rPr>
-              <a:t>23 / 25</a:t>
+              <a:t>23 / 24</a:t>
             </a:r>
           </a:p>
         </p:txBody>
       </p:sp>
       <p:pic>
         <p:nvPicPr>
-          <p:cNvPr id="7" name="Picture 6" descr="logo"/>
+          <p:cNvPr id="8" name="Picture 7" descr="logo"/>
           <p:cNvPicPr>
             <a:picLocks noChangeAspect="1"/>
           </p:cNvPicPr>
           <p:nvPr/>
         </p:nvPicPr>
         <p:blipFill>
-          <a:blip r:embed="rId2"/>
+          <a:blip r:embed="rId3"/>
           <a:stretch>
             <a:fillRect/>
           </a:stretch>
@@ -15793,615 +16325,6 @@
           </a:prstGeom>
         </p:spPr>
       </p:pic>
-      <p:sp>
-        <p:nvSpPr>
-          <p:cNvPr id="8" name="TextBox 7"/>
-          <p:cNvSpPr txBox="1"/>
-          <p:nvPr/>
-        </p:nvSpPr>
-        <p:spPr>
-          <a:xfrm>
-            <a:off x="548640" y="1554480"/>
-            <a:ext cx="11094415" cy="1005840"/>
-          </a:xfrm>
-          <a:prstGeom prst="rect">
-            <a:avLst/>
-          </a:prstGeom>
-          <a:noFill/>
-        </p:spPr>
-        <p:txBody>
-          <a:bodyPr wrap="square" anchor="t" lIns="0" rIns="0" tIns="0" bIns="0">
-            <a:spAutoFit/>
-          </a:bodyPr>
-          <a:lstStyle/>
-          <a:p>
-            <a:r>
-              <a:rPr sz="2400" i="0" b="1">
-                <a:solidFill>
-                  <a:srgbClr val="2B211C"/>
-                </a:solidFill>
-                <a:latin typeface="Calibri"/>
-              </a:rPr>
-              <a:t>What is the first step after finding his raised creatinine?</a:t>
-            </a:r>
-          </a:p>
-        </p:txBody>
-      </p:sp>
-      <p:sp>
-        <p:nvSpPr>
-          <p:cNvPr id="9" name="Rounded Rectangle 8"/>
-          <p:cNvSpPr/>
-          <p:nvPr/>
-        </p:nvSpPr>
-        <p:spPr>
-          <a:xfrm>
-            <a:off x="548640" y="2606040"/>
-            <a:ext cx="11094415" cy="548640"/>
-          </a:xfrm>
-          <a:prstGeom prst="roundRect">
-            <a:avLst>
-              <a:gd name="adj" fmla="val 18000"/>
-            </a:avLst>
-          </a:prstGeom>
-          <a:solidFill>
-            <a:srgbClr val="F5F4F4"/>
-          </a:solidFill>
-          <a:ln>
-            <a:noFill/>
-          </a:ln>
-          <a:effectLst/>
-        </p:spPr>
-        <p:style>
-          <a:lnRef idx="1">
-            <a:schemeClr val="accent1"/>
-          </a:lnRef>
-          <a:fillRef idx="3">
-            <a:schemeClr val="accent1"/>
-          </a:fillRef>
-          <a:effectRef idx="2">
-            <a:schemeClr val="accent1"/>
-          </a:effectRef>
-          <a:fontRef idx="minor">
-            <a:schemeClr val="lt1"/>
-          </a:fontRef>
-        </p:style>
-        <p:txBody>
-          <a:bodyPr rtlCol="0" anchor="ctr"/>
-          <a:lstStyle/>
-          <a:p>
-            <a:pPr algn="ctr"/>
-          </a:p>
-        </p:txBody>
-      </p:sp>
-      <p:sp>
-        <p:nvSpPr>
-          <p:cNvPr id="10" name="Oval 9"/>
-          <p:cNvSpPr/>
-          <p:nvPr/>
-        </p:nvSpPr>
-        <p:spPr>
-          <a:xfrm>
-            <a:off x="713232" y="2670048"/>
-            <a:ext cx="420624" cy="420624"/>
-          </a:xfrm>
-          <a:prstGeom prst="ellipse">
-            <a:avLst/>
-          </a:prstGeom>
-          <a:solidFill>
-            <a:srgbClr val="E2E0DE"/>
-          </a:solidFill>
-          <a:ln>
-            <a:noFill/>
-          </a:ln>
-          <a:effectLst/>
-        </p:spPr>
-        <p:style>
-          <a:lnRef idx="1">
-            <a:schemeClr val="accent1"/>
-          </a:lnRef>
-          <a:fillRef idx="3">
-            <a:schemeClr val="accent1"/>
-          </a:fillRef>
-          <a:effectRef idx="2">
-            <a:schemeClr val="accent1"/>
-          </a:effectRef>
-          <a:fontRef idx="minor">
-            <a:schemeClr val="lt1"/>
-          </a:fontRef>
-        </p:style>
-        <p:txBody>
-          <a:bodyPr rtlCol="0" anchor="ctr" lIns="0" rIns="0" tIns="0" bIns="0"/>
-          <a:lstStyle/>
-          <a:p>
-            <a:pPr algn="ctr"/>
-            <a:r>
-              <a:rPr sz="1500" i="0" b="1">
-                <a:solidFill>
-                  <a:srgbClr val="6E625B"/>
-                </a:solidFill>
-                <a:latin typeface="Calibri"/>
-              </a:rPr>
-              <a:t>A</a:t>
-            </a:r>
-          </a:p>
-        </p:txBody>
-      </p:sp>
-      <p:sp>
-        <p:nvSpPr>
-          <p:cNvPr id="11" name="TextBox 10"/>
-          <p:cNvSpPr txBox="1"/>
-          <p:nvPr/>
-        </p:nvSpPr>
-        <p:spPr>
-          <a:xfrm>
-            <a:off x="1371600" y="2606040"/>
-            <a:ext cx="10088575" cy="548640"/>
-          </a:xfrm>
-          <a:prstGeom prst="rect">
-            <a:avLst/>
-          </a:prstGeom>
-          <a:noFill/>
-        </p:spPr>
-        <p:txBody>
-          <a:bodyPr wrap="square" anchor="ctr" lIns="0" rIns="0" tIns="0" bIns="0">
-            <a:spAutoFit/>
-          </a:bodyPr>
-          <a:lstStyle/>
-          <a:p>
-            <a:r>
-              <a:rPr sz="1900" i="0" b="0">
-                <a:solidFill>
-                  <a:srgbClr val="6E625B"/>
-                </a:solidFill>
-                <a:latin typeface="Calibri"/>
-              </a:rPr>
-              <a:t>Report to the EPVC</a:t>
-            </a:r>
-          </a:p>
-        </p:txBody>
-      </p:sp>
-      <p:sp>
-        <p:nvSpPr>
-          <p:cNvPr id="12" name="Rounded Rectangle 11"/>
-          <p:cNvSpPr/>
-          <p:nvPr/>
-        </p:nvSpPr>
-        <p:spPr>
-          <a:xfrm>
-            <a:off x="548640" y="3282696"/>
-            <a:ext cx="11094415" cy="548640"/>
-          </a:xfrm>
-          <a:prstGeom prst="roundRect">
-            <a:avLst>
-              <a:gd name="adj" fmla="val 18000"/>
-            </a:avLst>
-          </a:prstGeom>
-          <a:solidFill>
-            <a:srgbClr val="F5F4F4"/>
-          </a:solidFill>
-          <a:ln>
-            <a:noFill/>
-          </a:ln>
-          <a:effectLst/>
-        </p:spPr>
-        <p:style>
-          <a:lnRef idx="1">
-            <a:schemeClr val="accent1"/>
-          </a:lnRef>
-          <a:fillRef idx="3">
-            <a:schemeClr val="accent1"/>
-          </a:fillRef>
-          <a:effectRef idx="2">
-            <a:schemeClr val="accent1"/>
-          </a:effectRef>
-          <a:fontRef idx="minor">
-            <a:schemeClr val="lt1"/>
-          </a:fontRef>
-        </p:style>
-        <p:txBody>
-          <a:bodyPr rtlCol="0" anchor="ctr"/>
-          <a:lstStyle/>
-          <a:p>
-            <a:pPr algn="ctr"/>
-          </a:p>
-        </p:txBody>
-      </p:sp>
-      <p:sp>
-        <p:nvSpPr>
-          <p:cNvPr id="13" name="Oval 12"/>
-          <p:cNvSpPr/>
-          <p:nvPr/>
-        </p:nvSpPr>
-        <p:spPr>
-          <a:xfrm>
-            <a:off x="713232" y="3346703"/>
-            <a:ext cx="420624" cy="420624"/>
-          </a:xfrm>
-          <a:prstGeom prst="ellipse">
-            <a:avLst/>
-          </a:prstGeom>
-          <a:solidFill>
-            <a:srgbClr val="E2E0DE"/>
-          </a:solidFill>
-          <a:ln>
-            <a:noFill/>
-          </a:ln>
-          <a:effectLst/>
-        </p:spPr>
-        <p:style>
-          <a:lnRef idx="1">
-            <a:schemeClr val="accent1"/>
-          </a:lnRef>
-          <a:fillRef idx="3">
-            <a:schemeClr val="accent1"/>
-          </a:fillRef>
-          <a:effectRef idx="2">
-            <a:schemeClr val="accent1"/>
-          </a:effectRef>
-          <a:fontRef idx="minor">
-            <a:schemeClr val="lt1"/>
-          </a:fontRef>
-        </p:style>
-        <p:txBody>
-          <a:bodyPr rtlCol="0" anchor="ctr" lIns="0" rIns="0" tIns="0" bIns="0"/>
-          <a:lstStyle/>
-          <a:p>
-            <a:pPr algn="ctr"/>
-            <a:r>
-              <a:rPr sz="1500" i="0" b="1">
-                <a:solidFill>
-                  <a:srgbClr val="6E625B"/>
-                </a:solidFill>
-                <a:latin typeface="Calibri"/>
-              </a:rPr>
-              <a:t>B</a:t>
-            </a:r>
-          </a:p>
-        </p:txBody>
-      </p:sp>
-      <p:sp>
-        <p:nvSpPr>
-          <p:cNvPr id="14" name="TextBox 13"/>
-          <p:cNvSpPr txBox="1"/>
-          <p:nvPr/>
-        </p:nvSpPr>
-        <p:spPr>
-          <a:xfrm>
-            <a:off x="1371600" y="3282696"/>
-            <a:ext cx="10088575" cy="548640"/>
-          </a:xfrm>
-          <a:prstGeom prst="rect">
-            <a:avLst/>
-          </a:prstGeom>
-          <a:noFill/>
-        </p:spPr>
-        <p:txBody>
-          <a:bodyPr wrap="square" anchor="ctr" lIns="0" rIns="0" tIns="0" bIns="0">
-            <a:spAutoFit/>
-          </a:bodyPr>
-          <a:lstStyle/>
-          <a:p>
-            <a:r>
-              <a:rPr sz="1900" i="0" b="0">
-                <a:solidFill>
-                  <a:srgbClr val="6E625B"/>
-                </a:solidFill>
-                <a:latin typeface="Calibri"/>
-              </a:rPr>
-              <a:t>Complete the Naranjo score</a:t>
-            </a:r>
-          </a:p>
-        </p:txBody>
-      </p:sp>
-      <p:sp>
-        <p:nvSpPr>
-          <p:cNvPr id="15" name="Rounded Rectangle 14"/>
-          <p:cNvSpPr/>
-          <p:nvPr/>
-        </p:nvSpPr>
-        <p:spPr>
-          <a:xfrm>
-            <a:off x="548640" y="3959352"/>
-            <a:ext cx="11094415" cy="548640"/>
-          </a:xfrm>
-          <a:prstGeom prst="roundRect">
-            <a:avLst>
-              <a:gd name="adj" fmla="val 18000"/>
-            </a:avLst>
-          </a:prstGeom>
-          <a:solidFill>
-            <a:srgbClr val="2F6F7A"/>
-          </a:solidFill>
-          <a:ln>
-            <a:noFill/>
-          </a:ln>
-          <a:effectLst/>
-        </p:spPr>
-        <p:style>
-          <a:lnRef idx="1">
-            <a:schemeClr val="accent1"/>
-          </a:lnRef>
-          <a:fillRef idx="3">
-            <a:schemeClr val="accent1"/>
-          </a:fillRef>
-          <a:effectRef idx="2">
-            <a:schemeClr val="accent1"/>
-          </a:effectRef>
-          <a:fontRef idx="minor">
-            <a:schemeClr val="lt1"/>
-          </a:fontRef>
-        </p:style>
-        <p:txBody>
-          <a:bodyPr rtlCol="0" anchor="ctr"/>
-          <a:lstStyle/>
-          <a:p>
-            <a:pPr algn="ctr"/>
-          </a:p>
-        </p:txBody>
-      </p:sp>
-      <p:sp>
-        <p:nvSpPr>
-          <p:cNvPr id="16" name="Oval 15"/>
-          <p:cNvSpPr/>
-          <p:nvPr/>
-        </p:nvSpPr>
-        <p:spPr>
-          <a:xfrm>
-            <a:off x="713232" y="4023360"/>
-            <a:ext cx="420624" cy="420624"/>
-          </a:xfrm>
-          <a:prstGeom prst="ellipse">
-            <a:avLst/>
-          </a:prstGeom>
-          <a:solidFill>
-            <a:srgbClr val="FFFFFF"/>
-          </a:solidFill>
-          <a:ln>
-            <a:noFill/>
-          </a:ln>
-          <a:effectLst/>
-        </p:spPr>
-        <p:style>
-          <a:lnRef idx="1">
-            <a:schemeClr val="accent1"/>
-          </a:lnRef>
-          <a:fillRef idx="3">
-            <a:schemeClr val="accent1"/>
-          </a:fillRef>
-          <a:effectRef idx="2">
-            <a:schemeClr val="accent1"/>
-          </a:effectRef>
-          <a:fontRef idx="minor">
-            <a:schemeClr val="lt1"/>
-          </a:fontRef>
-        </p:style>
-        <p:txBody>
-          <a:bodyPr rtlCol="0" anchor="ctr" lIns="0" rIns="0" tIns="0" bIns="0"/>
-          <a:lstStyle/>
-          <a:p>
-            <a:pPr algn="ctr"/>
-            <a:r>
-              <a:rPr sz="1500" i="0" b="1">
-                <a:solidFill>
-                  <a:srgbClr val="2F6F7A"/>
-                </a:solidFill>
-                <a:latin typeface="Calibri"/>
-              </a:rPr>
-              <a:t>C</a:t>
-            </a:r>
-          </a:p>
-        </p:txBody>
-      </p:sp>
-      <p:sp>
-        <p:nvSpPr>
-          <p:cNvPr id="17" name="TextBox 16"/>
-          <p:cNvSpPr txBox="1"/>
-          <p:nvPr/>
-        </p:nvSpPr>
-        <p:spPr>
-          <a:xfrm>
-            <a:off x="1371600" y="3959352"/>
-            <a:ext cx="10088575" cy="548640"/>
-          </a:xfrm>
-          <a:prstGeom prst="rect">
-            <a:avLst/>
-          </a:prstGeom>
-          <a:noFill/>
-        </p:spPr>
-        <p:txBody>
-          <a:bodyPr wrap="square" anchor="ctr" lIns="0" rIns="0" tIns="0" bIns="0">
-            <a:spAutoFit/>
-          </a:bodyPr>
-          <a:lstStyle/>
-          <a:p>
-            <a:r>
-              <a:rPr sz="1900" i="0" b="1">
-                <a:solidFill>
-                  <a:srgbClr val="FFFFFF"/>
-                </a:solidFill>
-                <a:latin typeface="Calibri"/>
-              </a:rPr>
-              <a:t>Stop naproxen and contact the doctor</a:t>
-            </a:r>
-          </a:p>
-        </p:txBody>
-      </p:sp>
-      <p:sp>
-        <p:nvSpPr>
-          <p:cNvPr id="18" name="Rounded Rectangle 17"/>
-          <p:cNvSpPr/>
-          <p:nvPr/>
-        </p:nvSpPr>
-        <p:spPr>
-          <a:xfrm>
-            <a:off x="548640" y="4636008"/>
-            <a:ext cx="11094415" cy="548640"/>
-          </a:xfrm>
-          <a:prstGeom prst="roundRect">
-            <a:avLst>
-              <a:gd name="adj" fmla="val 18000"/>
-            </a:avLst>
-          </a:prstGeom>
-          <a:solidFill>
-            <a:srgbClr val="F5F4F4"/>
-          </a:solidFill>
-          <a:ln>
-            <a:noFill/>
-          </a:ln>
-          <a:effectLst/>
-        </p:spPr>
-        <p:style>
-          <a:lnRef idx="1">
-            <a:schemeClr val="accent1"/>
-          </a:lnRef>
-          <a:fillRef idx="3">
-            <a:schemeClr val="accent1"/>
-          </a:fillRef>
-          <a:effectRef idx="2">
-            <a:schemeClr val="accent1"/>
-          </a:effectRef>
-          <a:fontRef idx="minor">
-            <a:schemeClr val="lt1"/>
-          </a:fontRef>
-        </p:style>
-        <p:txBody>
-          <a:bodyPr rtlCol="0" anchor="ctr"/>
-          <a:lstStyle/>
-          <a:p>
-            <a:pPr algn="ctr"/>
-          </a:p>
-        </p:txBody>
-      </p:sp>
-      <p:sp>
-        <p:nvSpPr>
-          <p:cNvPr id="19" name="Oval 18"/>
-          <p:cNvSpPr/>
-          <p:nvPr/>
-        </p:nvSpPr>
-        <p:spPr>
-          <a:xfrm>
-            <a:off x="713232" y="4700016"/>
-            <a:ext cx="420624" cy="420624"/>
-          </a:xfrm>
-          <a:prstGeom prst="ellipse">
-            <a:avLst/>
-          </a:prstGeom>
-          <a:solidFill>
-            <a:srgbClr val="E2E0DE"/>
-          </a:solidFill>
-          <a:ln>
-            <a:noFill/>
-          </a:ln>
-          <a:effectLst/>
-        </p:spPr>
-        <p:style>
-          <a:lnRef idx="1">
-            <a:schemeClr val="accent1"/>
-          </a:lnRef>
-          <a:fillRef idx="3">
-            <a:schemeClr val="accent1"/>
-          </a:fillRef>
-          <a:effectRef idx="2">
-            <a:schemeClr val="accent1"/>
-          </a:effectRef>
-          <a:fontRef idx="minor">
-            <a:schemeClr val="lt1"/>
-          </a:fontRef>
-        </p:style>
-        <p:txBody>
-          <a:bodyPr rtlCol="0" anchor="ctr" lIns="0" rIns="0" tIns="0" bIns="0"/>
-          <a:lstStyle/>
-          <a:p>
-            <a:pPr algn="ctr"/>
-            <a:r>
-              <a:rPr sz="1500" i="0" b="1">
-                <a:solidFill>
-                  <a:srgbClr val="6E625B"/>
-                </a:solidFill>
-                <a:latin typeface="Calibri"/>
-              </a:rPr>
-              <a:t>D</a:t>
-            </a:r>
-          </a:p>
-        </p:txBody>
-      </p:sp>
-      <p:sp>
-        <p:nvSpPr>
-          <p:cNvPr id="20" name="TextBox 19"/>
-          <p:cNvSpPr txBox="1"/>
-          <p:nvPr/>
-        </p:nvSpPr>
-        <p:spPr>
-          <a:xfrm>
-            <a:off x="1371600" y="4636008"/>
-            <a:ext cx="10088575" cy="548640"/>
-          </a:xfrm>
-          <a:prstGeom prst="rect">
-            <a:avLst/>
-          </a:prstGeom>
-          <a:noFill/>
-        </p:spPr>
-        <p:txBody>
-          <a:bodyPr wrap="square" anchor="ctr" lIns="0" rIns="0" tIns="0" bIns="0">
-            <a:spAutoFit/>
-          </a:bodyPr>
-          <a:lstStyle/>
-          <a:p>
-            <a:r>
-              <a:rPr sz="1900" i="0" b="0">
-                <a:solidFill>
-                  <a:srgbClr val="6E625B"/>
-                </a:solidFill>
-                <a:latin typeface="Calibri"/>
-              </a:rPr>
-              <a:t>Increase the naproxen dose</a:t>
-            </a:r>
-          </a:p>
-        </p:txBody>
-      </p:sp>
-      <p:sp>
-        <p:nvSpPr>
-          <p:cNvPr id="21" name="TextBox 20"/>
-          <p:cNvSpPr txBox="1"/>
-          <p:nvPr/>
-        </p:nvSpPr>
-        <p:spPr>
-          <a:xfrm>
-            <a:off x="548640" y="5358384"/>
-            <a:ext cx="11094415" cy="685800"/>
-          </a:xfrm>
-          <a:prstGeom prst="rect">
-            <a:avLst/>
-          </a:prstGeom>
-          <a:noFill/>
-        </p:spPr>
-        <p:txBody>
-          <a:bodyPr wrap="square" anchor="t" lIns="0" rIns="0" tIns="0" bIns="0">
-            <a:spAutoFit/>
-          </a:bodyPr>
-          <a:lstStyle/>
-          <a:p>
-            <a:r>
-              <a:rPr sz="1500" i="0" b="1">
-                <a:solidFill>
-                  <a:srgbClr val="2F6F7A"/>
-                </a:solidFill>
-                <a:latin typeface="Calibri"/>
-              </a:rPr>
-              <a:t>Why:  </a:t>
-            </a:r>
-            <a:r>
-              <a:rPr sz="1500" i="0" b="0">
-                <a:solidFill>
-                  <a:srgbClr val="2B211C"/>
-                </a:solidFill>
-                <a:latin typeface="Calibri"/>
-              </a:rPr>
-              <a:t>Patient care comes first. A and B follow; D is harmful.</a:t>
-            </a:r>
-          </a:p>
-        </p:txBody>
-      </p:sp>
     </p:spTree>
   </p:cSld>
   <p:clrMapOvr>
@@ -16411,282 +16334,6 @@
 </file>
 
 <file path=ppt/slides/slide24.xml><?xml version="1.0" encoding="utf-8"?>
-<p:sld xmlns:a="http://schemas.openxmlformats.org/drawingml/2006/main" xmlns:p="http://schemas.openxmlformats.org/presentationml/2006/main" xmlns:r="http://schemas.openxmlformats.org/officeDocument/2006/relationships">
-  <p:cSld>
-    <p:bg>
-      <p:bgPr>
-        <a:solidFill>
-          <a:srgbClr val="FFFFFF"/>
-        </a:solidFill>
-        <a:effectLst/>
-      </p:bgPr>
-    </p:bg>
-    <p:spTree>
-      <p:nvGrpSpPr>
-        <p:cNvPr id="1" name=""/>
-        <p:cNvGrpSpPr/>
-        <p:nvPr/>
-      </p:nvGrpSpPr>
-      <p:grpSpPr/>
-      <p:sp>
-        <p:nvSpPr>
-          <p:cNvPr id="2" name="Rectangle 1"/>
-          <p:cNvSpPr/>
-          <p:nvPr/>
-        </p:nvSpPr>
-        <p:spPr>
-          <a:xfrm>
-            <a:off x="0" y="0"/>
-            <a:ext cx="3931920" cy="6858000"/>
-          </a:xfrm>
-          <a:prstGeom prst="rect">
-            <a:avLst/>
-          </a:prstGeom>
-          <a:solidFill>
-            <a:srgbClr val="A4472B"/>
-          </a:solidFill>
-          <a:ln>
-            <a:noFill/>
-          </a:ln>
-          <a:effectLst/>
-        </p:spPr>
-        <p:style>
-          <a:lnRef idx="1">
-            <a:schemeClr val="accent1"/>
-          </a:lnRef>
-          <a:fillRef idx="3">
-            <a:schemeClr val="accent1"/>
-          </a:fillRef>
-          <a:effectRef idx="2">
-            <a:schemeClr val="accent1"/>
-          </a:effectRef>
-          <a:fontRef idx="minor">
-            <a:schemeClr val="lt1"/>
-          </a:fontRef>
-        </p:style>
-        <p:txBody>
-          <a:bodyPr rtlCol="0" anchor="ctr"/>
-          <a:lstStyle/>
-          <a:p>
-            <a:pPr algn="ctr"/>
-          </a:p>
-        </p:txBody>
-      </p:sp>
-      <p:sp>
-        <p:nvSpPr>
-          <p:cNvPr id="3" name="TextBox 2"/>
-          <p:cNvSpPr txBox="1"/>
-          <p:nvPr/>
-        </p:nvSpPr>
-        <p:spPr>
-          <a:xfrm>
-            <a:off x="548640" y="1188720"/>
-            <a:ext cx="2926080" cy="2377440"/>
-          </a:xfrm>
-          <a:prstGeom prst="rect">
-            <a:avLst/>
-          </a:prstGeom>
-          <a:noFill/>
-        </p:spPr>
-        <p:txBody>
-          <a:bodyPr wrap="square" anchor="t" lIns="0" rIns="0" tIns="0" bIns="0">
-            <a:spAutoFit/>
-          </a:bodyPr>
-          <a:lstStyle/>
-          <a:p>
-            <a:r>
-              <a:rPr sz="13000" i="0" b="1">
-                <a:solidFill>
-                  <a:srgbClr val="F1E3DF"/>
-                </a:solidFill>
-                <a:latin typeface="Cambria"/>
-              </a:rPr>
-              <a:t>?</a:t>
-            </a:r>
-          </a:p>
-        </p:txBody>
-      </p:sp>
-      <p:sp>
-        <p:nvSpPr>
-          <p:cNvPr id="4" name="TextBox 3"/>
-          <p:cNvSpPr txBox="1"/>
-          <p:nvPr/>
-        </p:nvSpPr>
-        <p:spPr>
-          <a:xfrm>
-            <a:off x="548640" y="3977639"/>
-            <a:ext cx="3017520" cy="1280160"/>
-          </a:xfrm>
-          <a:prstGeom prst="rect">
-            <a:avLst/>
-          </a:prstGeom>
-          <a:noFill/>
-        </p:spPr>
-        <p:txBody>
-          <a:bodyPr wrap="square" anchor="t" lIns="0" rIns="0" tIns="0" bIns="0">
-            <a:spAutoFit/>
-          </a:bodyPr>
-          <a:lstStyle/>
-          <a:p>
-            <a:r>
-              <a:rPr sz="3000" i="0" b="1">
-                <a:solidFill>
-                  <a:srgbClr val="FFFFFF"/>
-                </a:solidFill>
-                <a:latin typeface="Cambria"/>
-              </a:rPr>
-              <a:t>Practice Case</a:t>
-            </a:r>
-          </a:p>
-          <a:p>
-            <a:r>
-              <a:rPr sz="1400" i="0" b="1" spc="150">
-                <a:solidFill>
-                  <a:srgbClr val="F1E3DF"/>
-                </a:solidFill>
-                <a:latin typeface="Calibri"/>
-              </a:rPr>
-              <a:t>Section 10</a:t>
-            </a:r>
-          </a:p>
-        </p:txBody>
-      </p:sp>
-      <p:sp>
-        <p:nvSpPr>
-          <p:cNvPr id="5" name="TextBox 4"/>
-          <p:cNvSpPr txBox="1"/>
-          <p:nvPr/>
-        </p:nvSpPr>
-        <p:spPr>
-          <a:xfrm>
-            <a:off x="4526280" y="822960"/>
-            <a:ext cx="7132320" cy="5120640"/>
-          </a:xfrm>
-          <a:prstGeom prst="rect">
-            <a:avLst/>
-          </a:prstGeom>
-          <a:noFill/>
-        </p:spPr>
-        <p:txBody>
-          <a:bodyPr wrap="square" anchor="ctr" lIns="0" rIns="0" tIns="0" bIns="0">
-            <a:spAutoFit/>
-          </a:bodyPr>
-          <a:lstStyle/>
-          <a:p>
-            <a:r>
-              <a:rPr sz="2200" i="0" b="0">
-                <a:solidFill>
-                  <a:srgbClr val="2B211C"/>
-                </a:solidFill>
-                <a:latin typeface="Calibri"/>
-              </a:rPr>
-              <a:t>Six months later, Mr Ahmed's brother (62, diabetic, on metformin and enalapril) asks the pharmacist for "the same painkiller" for his knee. (a) List the background details you need. (b) What would you advise? (c) Which source would you check first, and why?</a:t>
-            </a:r>
-          </a:p>
-        </p:txBody>
-      </p:sp>
-      <p:sp>
-        <p:nvSpPr>
-          <p:cNvPr id="6" name="TextBox 5"/>
-          <p:cNvSpPr txBox="1"/>
-          <p:nvPr/>
-        </p:nvSpPr>
-        <p:spPr>
-          <a:xfrm>
-            <a:off x="4526280" y="6419088"/>
-            <a:ext cx="8229600" cy="274320"/>
-          </a:xfrm>
-          <a:prstGeom prst="rect">
-            <a:avLst/>
-          </a:prstGeom>
-          <a:noFill/>
-        </p:spPr>
-        <p:txBody>
-          <a:bodyPr wrap="square" anchor="t" lIns="0" rIns="0" tIns="0" bIns="0">
-            <a:spAutoFit/>
-          </a:bodyPr>
-          <a:lstStyle/>
-          <a:p>
-            <a:r>
-              <a:rPr sz="1200" i="0" b="0">
-                <a:solidFill>
-                  <a:srgbClr val="6E625B"/>
-                </a:solidFill>
-                <a:latin typeface="Calibri"/>
-              </a:rPr>
-              <a:t>Drug Information  ·  Applied Case: Answering a Real Drug Question</a:t>
-            </a:r>
-          </a:p>
-        </p:txBody>
-      </p:sp>
-      <p:sp>
-        <p:nvSpPr>
-          <p:cNvPr id="7" name="TextBox 6"/>
-          <p:cNvSpPr txBox="1"/>
-          <p:nvPr/>
-        </p:nvSpPr>
-        <p:spPr>
-          <a:xfrm>
-            <a:off x="10058400" y="6419088"/>
-            <a:ext cx="1097280" cy="274320"/>
-          </a:xfrm>
-          <a:prstGeom prst="rect">
-            <a:avLst/>
-          </a:prstGeom>
-          <a:noFill/>
-        </p:spPr>
-        <p:txBody>
-          <a:bodyPr wrap="square" anchor="t" lIns="0" rIns="0" tIns="0" bIns="0">
-            <a:spAutoFit/>
-          </a:bodyPr>
-          <a:lstStyle/>
-          <a:p>
-            <a:pPr algn="r"/>
-            <a:r>
-              <a:rPr sz="1200" i="0" b="1">
-                <a:solidFill>
-                  <a:srgbClr val="6E625B"/>
-                </a:solidFill>
-                <a:latin typeface="Calibri"/>
-              </a:rPr>
-              <a:t>24 / 25</a:t>
-            </a:r>
-          </a:p>
-        </p:txBody>
-      </p:sp>
-      <p:pic>
-        <p:nvPicPr>
-          <p:cNvPr id="8" name="Picture 7" descr="logo"/>
-          <p:cNvPicPr>
-            <a:picLocks noChangeAspect="1"/>
-          </p:cNvPicPr>
-          <p:nvPr/>
-        </p:nvPicPr>
-        <p:blipFill>
-          <a:blip r:embed="rId3"/>
-          <a:stretch>
-            <a:fillRect/>
-          </a:stretch>
-        </p:blipFill>
-        <p:spPr>
-          <a:xfrm>
-            <a:off x="11247120" y="6309360"/>
-            <a:ext cx="384048" cy="384048"/>
-          </a:xfrm>
-          <a:prstGeom prst="rect">
-            <a:avLst/>
-          </a:prstGeom>
-        </p:spPr>
-      </p:pic>
-    </p:spTree>
-  </p:cSld>
-  <p:clrMapOvr>
-    <a:masterClrMapping/>
-  </p:clrMapOvr>
-</p:sld>
-</file>
-
-<file path=ppt/slides/slide25.xml><?xml version="1.0" encoding="utf-8"?>
 <p:sld xmlns:a="http://schemas.openxmlformats.org/drawingml/2006/main" xmlns:p="http://schemas.openxmlformats.org/presentationml/2006/main" xmlns:r="http://schemas.openxmlformats.org/officeDocument/2006/relationships">
   <p:cSld>
     <p:bg>
@@ -17379,7 +17026,7 @@
                 </a:solidFill>
                 <a:latin typeface="Calibri"/>
               </a:rPr>
-              <a:t>03 / 25</a:t>
+              <a:t>03 / 24</a:t>
             </a:r>
           </a:p>
         </p:txBody>
@@ -18054,7 +17701,7 @@
                 </a:solidFill>
                 <a:latin typeface="Calibri"/>
               </a:rPr>
-              <a:t>04 / 25</a:t>
+              <a:t>04 / 24</a:t>
             </a:r>
           </a:p>
         </p:txBody>
@@ -18636,7 +18283,7 @@
                 </a:solidFill>
                 <a:latin typeface="Calibri"/>
               </a:rPr>
-              <a:t>05 / 25</a:t>
+              <a:t>05 / 24</a:t>
             </a:r>
           </a:p>
         </p:txBody>
@@ -18674,7 +18321,7 @@
         <p:spPr>
           <a:xfrm>
             <a:off x="548640" y="1554480"/>
-            <a:ext cx="11094415" cy="4617720"/>
+            <a:ext cx="4480560" cy="4617720"/>
           </a:xfrm>
           <a:prstGeom prst="rect">
             <a:avLst/>
@@ -18693,7 +18340,7 @@
               </a:spcAft>
             </a:pPr>
             <a:r>
-              <a:rPr sz="2100" i="0" b="0">
+              <a:rPr sz="1700" i="0" b="0">
                 <a:solidFill>
                   <a:srgbClr val="2B211C"/>
                 </a:solidFill>
@@ -18709,7 +18356,7 @@
               </a:spcAft>
             </a:pPr>
             <a:r>
-              <a:rPr sz="2100" i="0" b="0">
+              <a:rPr sz="1700" i="0" b="0">
                 <a:solidFill>
                   <a:srgbClr val="2B211C"/>
                 </a:solidFill>
@@ -18720,257 +18367,17 @@
           </a:p>
         </p:txBody>
       </p:sp>
-    </p:spTree>
-  </p:cSld>
-  <p:clrMapOvr>
-    <a:masterClrMapping/>
-  </p:clrMapOvr>
-</p:sld>
-</file>
-
-<file path=ppt/slides/slide6.xml><?xml version="1.0" encoding="utf-8"?>
-<p:sld xmlns:a="http://schemas.openxmlformats.org/drawingml/2006/main" xmlns:p="http://schemas.openxmlformats.org/presentationml/2006/main" xmlns:r="http://schemas.openxmlformats.org/officeDocument/2006/relationships">
-  <p:cSld>
-    <p:bg>
-      <p:bgPr>
-        <a:solidFill>
-          <a:srgbClr val="FFFFFF"/>
-        </a:solidFill>
-        <a:effectLst/>
-      </p:bgPr>
-    </p:bg>
-    <p:spTree>
-      <p:nvGrpSpPr>
-        <p:cNvPr id="1" name=""/>
-        <p:cNvGrpSpPr/>
-        <p:nvPr/>
-      </p:nvGrpSpPr>
-      <p:grpSpPr/>
-      <p:sp>
-        <p:nvSpPr>
-          <p:cNvPr id="2" name="Oval 1"/>
-          <p:cNvSpPr/>
-          <p:nvPr/>
-        </p:nvSpPr>
-        <p:spPr>
-          <a:xfrm>
-            <a:off x="548640" y="475488"/>
-            <a:ext cx="658368" cy="658368"/>
-          </a:xfrm>
-          <a:prstGeom prst="ellipse">
-            <a:avLst/>
-          </a:prstGeom>
-          <a:solidFill>
-            <a:srgbClr val="2F6F7A"/>
-          </a:solidFill>
-          <a:ln>
-            <a:noFill/>
-          </a:ln>
-          <a:effectLst/>
-        </p:spPr>
-        <p:style>
-          <a:lnRef idx="1">
-            <a:schemeClr val="accent1"/>
-          </a:lnRef>
-          <a:fillRef idx="3">
-            <a:schemeClr val="accent1"/>
-          </a:fillRef>
-          <a:effectRef idx="2">
-            <a:schemeClr val="accent1"/>
-          </a:effectRef>
-          <a:fontRef idx="minor">
-            <a:schemeClr val="lt1"/>
-          </a:fontRef>
-        </p:style>
-        <p:txBody>
-          <a:bodyPr rtlCol="0" anchor="ctr" lIns="0" rIns="0" tIns="0" bIns="0"/>
-          <a:lstStyle/>
-          <a:p>
-            <a:pPr algn="ctr"/>
-            <a:r>
-              <a:rPr sz="1800" i="0" b="1">
-                <a:solidFill>
-                  <a:srgbClr val="FFFFFF"/>
-                </a:solidFill>
-                <a:latin typeface="Cambria"/>
-              </a:rPr>
-              <a:t>10</a:t>
-            </a:r>
-          </a:p>
-        </p:txBody>
-      </p:sp>
-      <p:sp>
-        <p:nvSpPr>
-          <p:cNvPr id="3" name="TextBox 2"/>
-          <p:cNvSpPr txBox="1"/>
-          <p:nvPr/>
-        </p:nvSpPr>
-        <p:spPr>
-          <a:xfrm>
-            <a:off x="1417319" y="438912"/>
-            <a:ext cx="10180015" cy="292608"/>
-          </a:xfrm>
-          <a:prstGeom prst="rect">
-            <a:avLst/>
-          </a:prstGeom>
-          <a:noFill/>
-        </p:spPr>
-        <p:txBody>
-          <a:bodyPr wrap="square" anchor="t" lIns="0" rIns="0" tIns="0" bIns="0">
-            <a:spAutoFit/>
-          </a:bodyPr>
-          <a:lstStyle/>
-          <a:p>
-            <a:r>
-              <a:rPr sz="1200" i="0" b="1" spc="150">
-                <a:solidFill>
-                  <a:srgbClr val="2F6F7A"/>
-                </a:solidFill>
-                <a:latin typeface="Calibri"/>
-              </a:rPr>
-              <a:t>SECTION 10</a:t>
-            </a:r>
-          </a:p>
-        </p:txBody>
-      </p:sp>
-      <p:sp>
-        <p:nvSpPr>
-          <p:cNvPr id="4" name="TextBox 3"/>
-          <p:cNvSpPr txBox="1"/>
-          <p:nvPr/>
-        </p:nvSpPr>
-        <p:spPr>
-          <a:xfrm>
-            <a:off x="1417319" y="676656"/>
-            <a:ext cx="10180015" cy="640080"/>
-          </a:xfrm>
-          <a:prstGeom prst="rect">
-            <a:avLst/>
-          </a:prstGeom>
-          <a:noFill/>
-        </p:spPr>
-        <p:txBody>
-          <a:bodyPr wrap="square" anchor="t" lIns="0" rIns="0" tIns="0" bIns="0">
-            <a:spAutoFit/>
-          </a:bodyPr>
-          <a:lstStyle/>
-          <a:p>
-            <a:r>
-              <a:rPr sz="3200" i="0" b="1">
-                <a:solidFill>
-                  <a:srgbClr val="2B211C"/>
-                </a:solidFill>
-                <a:latin typeface="Cambria"/>
-              </a:rPr>
-              <a:t>Step by Step: The Request</a:t>
-            </a:r>
-          </a:p>
-        </p:txBody>
-      </p:sp>
-      <p:sp>
-        <p:nvSpPr>
-          <p:cNvPr id="5" name="TextBox 4"/>
-          <p:cNvSpPr txBox="1"/>
-          <p:nvPr/>
-        </p:nvSpPr>
-        <p:spPr>
-          <a:xfrm>
-            <a:off x="548640" y="6419088"/>
-            <a:ext cx="8229600" cy="274320"/>
-          </a:xfrm>
-          <a:prstGeom prst="rect">
-            <a:avLst/>
-          </a:prstGeom>
-          <a:noFill/>
-        </p:spPr>
-        <p:txBody>
-          <a:bodyPr wrap="square" anchor="t" lIns="0" rIns="0" tIns="0" bIns="0">
-            <a:spAutoFit/>
-          </a:bodyPr>
-          <a:lstStyle/>
-          <a:p>
-            <a:r>
-              <a:rPr sz="1200" i="0" b="0">
-                <a:solidFill>
-                  <a:srgbClr val="6E625B"/>
-                </a:solidFill>
-                <a:latin typeface="Calibri"/>
-              </a:rPr>
-              <a:t>Drug Information  ·  Section 10  ·  Applied Case: Answering a Real Drug Question</a:t>
-            </a:r>
-          </a:p>
-        </p:txBody>
-      </p:sp>
-      <p:sp>
-        <p:nvSpPr>
-          <p:cNvPr id="6" name="TextBox 5"/>
-          <p:cNvSpPr txBox="1"/>
-          <p:nvPr/>
-        </p:nvSpPr>
-        <p:spPr>
-          <a:xfrm>
-            <a:off x="10058400" y="6419088"/>
-            <a:ext cx="1097280" cy="274320"/>
-          </a:xfrm>
-          <a:prstGeom prst="rect">
-            <a:avLst/>
-          </a:prstGeom>
-          <a:noFill/>
-        </p:spPr>
-        <p:txBody>
-          <a:bodyPr wrap="square" anchor="t" lIns="0" rIns="0" tIns="0" bIns="0">
-            <a:spAutoFit/>
-          </a:bodyPr>
-          <a:lstStyle/>
-          <a:p>
-            <a:pPr algn="r"/>
-            <a:r>
-              <a:rPr sz="1200" i="0" b="1">
-                <a:solidFill>
-                  <a:srgbClr val="6E625B"/>
-                </a:solidFill>
-                <a:latin typeface="Calibri"/>
-              </a:rPr>
-              <a:t>06 / 25</a:t>
-            </a:r>
-          </a:p>
-        </p:txBody>
-      </p:sp>
-      <p:pic>
-        <p:nvPicPr>
-          <p:cNvPr id="7" name="Picture 6" descr="logo"/>
-          <p:cNvPicPr>
-            <a:picLocks noChangeAspect="1"/>
-          </p:cNvPicPr>
-          <p:nvPr/>
-        </p:nvPicPr>
-        <p:blipFill>
-          <a:blip r:embed="rId3"/>
-          <a:stretch>
-            <a:fillRect/>
-          </a:stretch>
-        </p:blipFill>
-        <p:spPr>
-          <a:xfrm>
-            <a:off x="11247120" y="6309360"/>
-            <a:ext cx="384048" cy="384048"/>
-          </a:xfrm>
-          <a:prstGeom prst="rect">
-            <a:avLst/>
-          </a:prstGeom>
-        </p:spPr>
-      </p:pic>
       <p:graphicFrame>
         <p:nvGraphicFramePr>
-          <p:cNvPr id="8" name="Table 7"/>
+          <p:cNvPr id="9" name="Table 8"/>
           <p:cNvGraphicFramePr>
             <a:graphicFrameLocks noGrp="1"/>
           </p:cNvGraphicFramePr>
           <p:nvPr/>
         </p:nvGraphicFramePr>
         <p:xfrm>
-          <a:off x="548640" y="1554480"/>
-          <a:ext cx="11094414" cy="4617720"/>
+          <a:off x="5394959" y="1554480"/>
+          <a:ext cx="6248094" cy="4617720"/>
         </p:xfrm>
         <a:graphic>
           <a:graphicData uri="http://schemas.openxmlformats.org/drawingml/2006/table">
@@ -18979,8 +18386,8 @@
                 <a:tableStyleId>{5C22544A-7EE6-4342-B048-85BDC9FD1C3A}</a:tableStyleId>
               </a:tblPr>
               <a:tblGrid>
-                <a:gridCol w="2894195"/>
-                <a:gridCol w="8200219"/>
+                <a:gridCol w="1629937"/>
+                <a:gridCol w="4618157"/>
               </a:tblGrid>
               <a:tr h="577215">
                 <a:tc>
@@ -18989,7 +18396,7 @@
                     <a:lstStyle/>
                     <a:p>
                       <a:r>
-                        <a:rPr sz="1500" i="0" b="1">
+                        <a:rPr sz="1300" i="0" b="1">
                           <a:solidFill>
                             <a:srgbClr val="FFFFFF"/>
                           </a:solidFill>
@@ -19011,7 +18418,7 @@
                     <a:lstStyle/>
                     <a:p>
                       <a:r>
-                        <a:rPr sz="1500" i="0" b="1">
+                        <a:rPr sz="1300" i="0" b="1">
                           <a:solidFill>
                             <a:srgbClr val="FFFFFF"/>
                           </a:solidFill>
@@ -19035,7 +18442,7 @@
                     <a:lstStyle/>
                     <a:p>
                       <a:r>
-                        <a:rPr sz="1600" i="0" b="1">
+                        <a:rPr sz="1400" i="0" b="1">
                           <a:solidFill>
                             <a:srgbClr val="2B211C"/>
                           </a:solidFill>
@@ -19057,7 +18464,7 @@
                     <a:lstStyle/>
                     <a:p>
                       <a:r>
-                        <a:rPr sz="1600" i="0" b="0">
+                        <a:rPr sz="1400" i="0" b="0">
                           <a:solidFill>
                             <a:srgbClr val="2B211C"/>
                           </a:solidFill>
@@ -19081,7 +18488,7 @@
                     <a:lstStyle/>
                     <a:p>
                       <a:r>
-                        <a:rPr sz="1600" i="0" b="1">
+                        <a:rPr sz="1400" i="0" b="1">
                           <a:solidFill>
                             <a:srgbClr val="2B211C"/>
                           </a:solidFill>
@@ -19103,7 +18510,7 @@
                     <a:lstStyle/>
                     <a:p>
                       <a:r>
-                        <a:rPr sz="1600" i="0" b="0">
+                        <a:rPr sz="1400" i="0" b="0">
                           <a:solidFill>
                             <a:srgbClr val="2B211C"/>
                           </a:solidFill>
@@ -19127,7 +18534,7 @@
                     <a:lstStyle/>
                     <a:p>
                       <a:r>
-                        <a:rPr sz="1600" i="0" b="1">
+                        <a:rPr sz="1400" i="0" b="1">
                           <a:solidFill>
                             <a:srgbClr val="2B211C"/>
                           </a:solidFill>
@@ -19149,7 +18556,7 @@
                     <a:lstStyle/>
                     <a:p>
                       <a:r>
-                        <a:rPr sz="1600" i="0" b="0">
+                        <a:rPr sz="1400" i="0" b="0">
                           <a:solidFill>
                             <a:srgbClr val="2B211C"/>
                           </a:solidFill>
@@ -19173,7 +18580,7 @@
                     <a:lstStyle/>
                     <a:p>
                       <a:r>
-                        <a:rPr sz="1600" i="0" b="1">
+                        <a:rPr sz="1400" i="0" b="1">
                           <a:solidFill>
                             <a:srgbClr val="2B211C"/>
                           </a:solidFill>
@@ -19195,7 +18602,7 @@
                     <a:lstStyle/>
                     <a:p>
                       <a:r>
-                        <a:rPr sz="1600" i="0" b="0">
+                        <a:rPr sz="1400" i="0" b="0">
                           <a:solidFill>
                             <a:srgbClr val="2B211C"/>
                           </a:solidFill>
@@ -19219,7 +18626,7 @@
                     <a:lstStyle/>
                     <a:p>
                       <a:r>
-                        <a:rPr sz="1600" i="0" b="1">
+                        <a:rPr sz="1400" i="0" b="1">
                           <a:solidFill>
                             <a:srgbClr val="2B211C"/>
                           </a:solidFill>
@@ -19241,7 +18648,7 @@
                     <a:lstStyle/>
                     <a:p>
                       <a:r>
-                        <a:rPr sz="1600" i="0" b="0">
+                        <a:rPr sz="1400" i="0" b="0">
                           <a:solidFill>
                             <a:srgbClr val="2B211C"/>
                           </a:solidFill>
@@ -19265,7 +18672,7 @@
                     <a:lstStyle/>
                     <a:p>
                       <a:r>
-                        <a:rPr sz="1600" i="0" b="1">
+                        <a:rPr sz="1400" i="0" b="1">
                           <a:solidFill>
                             <a:srgbClr val="2B211C"/>
                           </a:solidFill>
@@ -19287,7 +18694,7 @@
                     <a:lstStyle/>
                     <a:p>
                       <a:r>
-                        <a:rPr sz="1600" i="0" b="0">
+                        <a:rPr sz="1400" i="0" b="0">
                           <a:solidFill>
                             <a:srgbClr val="2B211C"/>
                           </a:solidFill>
@@ -19311,7 +18718,7 @@
                     <a:lstStyle/>
                     <a:p>
                       <a:r>
-                        <a:rPr sz="1600" i="0" b="1">
+                        <a:rPr sz="1400" i="0" b="1">
                           <a:solidFill>
                             <a:srgbClr val="2B211C"/>
                           </a:solidFill>
@@ -19333,7 +18740,7 @@
                     <a:lstStyle/>
                     <a:p>
                       <a:r>
-                        <a:rPr sz="1600" i="0" b="0">
+                        <a:rPr sz="1400" i="0" b="0">
                           <a:solidFill>
                             <a:srgbClr val="2B211C"/>
                           </a:solidFill>
@@ -19362,6 +18769,362 @@
 </p:sld>
 </file>
 
+<file path=ppt/slides/slide6.xml><?xml version="1.0" encoding="utf-8"?>
+<p:sld xmlns:a="http://schemas.openxmlformats.org/drawingml/2006/main" xmlns:p="http://schemas.openxmlformats.org/presentationml/2006/main" xmlns:r="http://schemas.openxmlformats.org/officeDocument/2006/relationships">
+  <p:cSld>
+    <p:bg>
+      <p:bgPr>
+        <a:solidFill>
+          <a:srgbClr val="FFFFFF"/>
+        </a:solidFill>
+        <a:effectLst/>
+      </p:bgPr>
+    </p:bg>
+    <p:spTree>
+      <p:nvGrpSpPr>
+        <p:cNvPr id="1" name=""/>
+        <p:cNvGrpSpPr/>
+        <p:nvPr/>
+      </p:nvGrpSpPr>
+      <p:grpSpPr/>
+      <p:sp>
+        <p:nvSpPr>
+          <p:cNvPr id="2" name="Oval 1"/>
+          <p:cNvSpPr/>
+          <p:nvPr/>
+        </p:nvSpPr>
+        <p:spPr>
+          <a:xfrm>
+            <a:off x="548640" y="475488"/>
+            <a:ext cx="658368" cy="658368"/>
+          </a:xfrm>
+          <a:prstGeom prst="ellipse">
+            <a:avLst/>
+          </a:prstGeom>
+          <a:solidFill>
+            <a:srgbClr val="2F6F7A"/>
+          </a:solidFill>
+          <a:ln>
+            <a:noFill/>
+          </a:ln>
+          <a:effectLst/>
+        </p:spPr>
+        <p:style>
+          <a:lnRef idx="1">
+            <a:schemeClr val="accent1"/>
+          </a:lnRef>
+          <a:fillRef idx="3">
+            <a:schemeClr val="accent1"/>
+          </a:fillRef>
+          <a:effectRef idx="2">
+            <a:schemeClr val="accent1"/>
+          </a:effectRef>
+          <a:fontRef idx="minor">
+            <a:schemeClr val="lt1"/>
+          </a:fontRef>
+        </p:style>
+        <p:txBody>
+          <a:bodyPr rtlCol="0" anchor="ctr" lIns="0" rIns="0" tIns="0" bIns="0"/>
+          <a:lstStyle/>
+          <a:p>
+            <a:pPr algn="ctr"/>
+            <a:r>
+              <a:rPr sz="1800" i="0" b="1">
+                <a:solidFill>
+                  <a:srgbClr val="FFFFFF"/>
+                </a:solidFill>
+                <a:latin typeface="Cambria"/>
+              </a:rPr>
+              <a:t>10</a:t>
+            </a:r>
+          </a:p>
+        </p:txBody>
+      </p:sp>
+      <p:sp>
+        <p:nvSpPr>
+          <p:cNvPr id="3" name="TextBox 2"/>
+          <p:cNvSpPr txBox="1"/>
+          <p:nvPr/>
+        </p:nvSpPr>
+        <p:spPr>
+          <a:xfrm>
+            <a:off x="1417319" y="438912"/>
+            <a:ext cx="10180015" cy="292608"/>
+          </a:xfrm>
+          <a:prstGeom prst="rect">
+            <a:avLst/>
+          </a:prstGeom>
+          <a:noFill/>
+        </p:spPr>
+        <p:txBody>
+          <a:bodyPr wrap="square" anchor="t" lIns="0" rIns="0" tIns="0" bIns="0">
+            <a:spAutoFit/>
+          </a:bodyPr>
+          <a:lstStyle/>
+          <a:p>
+            <a:r>
+              <a:rPr sz="1200" i="0" b="1" spc="150">
+                <a:solidFill>
+                  <a:srgbClr val="2F6F7A"/>
+                </a:solidFill>
+                <a:latin typeface="Calibri"/>
+              </a:rPr>
+              <a:t>SECTION 10</a:t>
+            </a:r>
+          </a:p>
+        </p:txBody>
+      </p:sp>
+      <p:sp>
+        <p:nvSpPr>
+          <p:cNvPr id="4" name="TextBox 3"/>
+          <p:cNvSpPr txBox="1"/>
+          <p:nvPr/>
+        </p:nvSpPr>
+        <p:spPr>
+          <a:xfrm>
+            <a:off x="1417319" y="676656"/>
+            <a:ext cx="10180015" cy="640080"/>
+          </a:xfrm>
+          <a:prstGeom prst="rect">
+            <a:avLst/>
+          </a:prstGeom>
+          <a:noFill/>
+        </p:spPr>
+        <p:txBody>
+          <a:bodyPr wrap="square" anchor="t" lIns="0" rIns="0" tIns="0" bIns="0">
+            <a:spAutoFit/>
+          </a:bodyPr>
+          <a:lstStyle/>
+          <a:p>
+            <a:r>
+              <a:rPr sz="3200" i="0" b="1">
+                <a:solidFill>
+                  <a:srgbClr val="2B211C"/>
+                </a:solidFill>
+                <a:latin typeface="Cambria"/>
+              </a:rPr>
+              <a:t>Appraising the review in brief</a:t>
+            </a:r>
+          </a:p>
+        </p:txBody>
+      </p:sp>
+      <p:sp>
+        <p:nvSpPr>
+          <p:cNvPr id="5" name="TextBox 4"/>
+          <p:cNvSpPr txBox="1"/>
+          <p:nvPr/>
+        </p:nvSpPr>
+        <p:spPr>
+          <a:xfrm>
+            <a:off x="548640" y="6419088"/>
+            <a:ext cx="8229600" cy="274320"/>
+          </a:xfrm>
+          <a:prstGeom prst="rect">
+            <a:avLst/>
+          </a:prstGeom>
+          <a:noFill/>
+        </p:spPr>
+        <p:txBody>
+          <a:bodyPr wrap="square" anchor="t" lIns="0" rIns="0" tIns="0" bIns="0">
+            <a:spAutoFit/>
+          </a:bodyPr>
+          <a:lstStyle/>
+          <a:p>
+            <a:r>
+              <a:rPr sz="1200" i="0" b="0">
+                <a:solidFill>
+                  <a:srgbClr val="6E625B"/>
+                </a:solidFill>
+                <a:latin typeface="Calibri"/>
+              </a:rPr>
+              <a:t>Drug Information  ·  Section 10  ·  Applied Case: Answering a Real Drug Question</a:t>
+            </a:r>
+          </a:p>
+        </p:txBody>
+      </p:sp>
+      <p:sp>
+        <p:nvSpPr>
+          <p:cNvPr id="6" name="TextBox 5"/>
+          <p:cNvSpPr txBox="1"/>
+          <p:nvPr/>
+        </p:nvSpPr>
+        <p:spPr>
+          <a:xfrm>
+            <a:off x="10058400" y="6419088"/>
+            <a:ext cx="1097280" cy="274320"/>
+          </a:xfrm>
+          <a:prstGeom prst="rect">
+            <a:avLst/>
+          </a:prstGeom>
+          <a:noFill/>
+        </p:spPr>
+        <p:txBody>
+          <a:bodyPr wrap="square" anchor="t" lIns="0" rIns="0" tIns="0" bIns="0">
+            <a:spAutoFit/>
+          </a:bodyPr>
+          <a:lstStyle/>
+          <a:p>
+            <a:pPr algn="r"/>
+            <a:r>
+              <a:rPr sz="1200" i="0" b="1">
+                <a:solidFill>
+                  <a:srgbClr val="6E625B"/>
+                </a:solidFill>
+                <a:latin typeface="Calibri"/>
+              </a:rPr>
+              <a:t>06 / 24</a:t>
+            </a:r>
+          </a:p>
+        </p:txBody>
+      </p:sp>
+      <p:pic>
+        <p:nvPicPr>
+          <p:cNvPr id="7" name="Picture 6" descr="logo"/>
+          <p:cNvPicPr>
+            <a:picLocks noChangeAspect="1"/>
+          </p:cNvPicPr>
+          <p:nvPr/>
+        </p:nvPicPr>
+        <p:blipFill>
+          <a:blip r:embed="rId3"/>
+          <a:stretch>
+            <a:fillRect/>
+          </a:stretch>
+        </p:blipFill>
+        <p:spPr>
+          <a:xfrm>
+            <a:off x="11247120" y="6309360"/>
+            <a:ext cx="384048" cy="384048"/>
+          </a:xfrm>
+          <a:prstGeom prst="rect">
+            <a:avLst/>
+          </a:prstGeom>
+        </p:spPr>
+      </p:pic>
+      <p:sp>
+        <p:nvSpPr>
+          <p:cNvPr id="8" name="TextBox 7"/>
+          <p:cNvSpPr txBox="1"/>
+          <p:nvPr/>
+        </p:nvSpPr>
+        <p:spPr>
+          <a:xfrm>
+            <a:off x="548640" y="1554480"/>
+            <a:ext cx="11094415" cy="4617720"/>
+          </a:xfrm>
+          <a:prstGeom prst="rect">
+            <a:avLst/>
+          </a:prstGeom>
+          <a:noFill/>
+        </p:spPr>
+        <p:txBody>
+          <a:bodyPr wrap="square" anchor="t" lIns="0" rIns="0" tIns="0" bIns="0">
+            <a:spAutoFit/>
+          </a:bodyPr>
+          <a:lstStyle/>
+          <a:p>
+            <a:pPr>
+              <a:spcAft>
+                <a:spcPts val="800"/>
+              </a:spcAft>
+            </a:pPr>
+            <a:r>
+              <a:rPr sz="1800" i="0" b="1">
+                <a:solidFill>
+                  <a:srgbClr val="2B211C"/>
+                </a:solidFill>
+                <a:latin typeface="Calibri"/>
+              </a:rPr>
+              <a:t>Tertiary (Chapter 2).</a:t>
+            </a:r>
+            <a:r>
+              <a:rPr sz="1800" i="0" b="0">
+                <a:solidFill>
+                  <a:srgbClr val="2B211C"/>
+                </a:solidFill>
+                <a:latin typeface="Calibri"/>
+              </a:rPr>
+              <a:t> The BNF and Lexicomp give doses, cautions and interactions. Paracetamol is the first choice for mild pain. NSAIDs can raise blood pressure, reduce the effect of ACE inhibitors, harm the kidneys and cause stomach ulcers. Naproxen or ibuprofen at the lowest effective dose for the shortest time carries a lower cardiovascular risk than some other NSAIDs. A proton-pump inhibitor is advised for patients with a history of dyspepsia who need an NSAID.</a:t>
+            </a:r>
+          </a:p>
+          <a:p>
+            <a:pPr>
+              <a:spcAft>
+                <a:spcPts val="800"/>
+              </a:spcAft>
+            </a:pPr>
+            <a:r>
+              <a:rPr sz="1800" i="0" b="1">
+                <a:solidFill>
+                  <a:srgbClr val="2B211C"/>
+                </a:solidFill>
+                <a:latin typeface="Calibri"/>
+              </a:rPr>
+              <a:t>Secondary.</a:t>
+            </a:r>
+            <a:r>
+              <a:rPr sz="1800" i="0" b="0">
+                <a:solidFill>
+                  <a:srgbClr val="2B211C"/>
+                </a:solidFill>
+                <a:latin typeface="Calibri"/>
+              </a:rPr>
+              <a:t> A PubMed search for frozen shoulder AND corticosteroid injection, filtered to systematic reviews, finds a recent meta-analysis.</a:t>
+            </a:r>
+          </a:p>
+          <a:p>
+            <a:pPr>
+              <a:spcAft>
+                <a:spcPts val="800"/>
+              </a:spcAft>
+            </a:pPr>
+            <a:r>
+              <a:rPr sz="1800" i="0" b="1">
+                <a:solidFill>
+                  <a:srgbClr val="2B211C"/>
+                </a:solidFill>
+                <a:latin typeface="Calibri"/>
+              </a:rPr>
+              <a:t>Primary / review evidence (Chapters 3 and 6).</a:t>
+            </a:r>
+            <a:r>
+              <a:rPr sz="1800" i="0" b="0">
+                <a:solidFill>
+                  <a:srgbClr val="2B211C"/>
+                </a:solidFill>
+                <a:latin typeface="Calibri"/>
+              </a:rPr>
+              <a:t> The review pooled randomised trials. Intra-articular corticosteroid injection gave better pain and movement in the </a:t>
+            </a:r>
+            <a:r>
+              <a:rPr sz="1800" i="0" b="1">
+                <a:solidFill>
+                  <a:srgbClr val="2B211C"/>
+                </a:solidFill>
+                <a:latin typeface="Calibri"/>
+              </a:rPr>
+              <a:t>early</a:t>
+            </a:r>
+            <a:r>
+              <a:rPr sz="1800" i="0" b="0">
+                <a:solidFill>
+                  <a:srgbClr val="2B211C"/>
+                </a:solidFill>
+                <a:latin typeface="Calibri"/>
+              </a:rPr>
+              <a:t> months than no injection. The benefit became smaller over time. Combining injection with home exercise did better than exercise alone in the short term.</a:t>
+            </a:r>
+          </a:p>
+        </p:txBody>
+      </p:sp>
+    </p:spTree>
+  </p:cSld>
+  <p:clrMapOvr>
+    <a:masterClrMapping/>
+  </p:clrMapOvr>
+</p:sld>
+</file>
+
 <file path=ppt/slides/slide7.xml><?xml version="1.0" encoding="utf-8"?>
 <p:sld xmlns:a="http://schemas.openxmlformats.org/drawingml/2006/main" xmlns:p="http://schemas.openxmlformats.org/presentationml/2006/main" xmlns:r="http://schemas.openxmlformats.org/officeDocument/2006/relationships">
   <p:cSld>
@@ -19565,363 +19328,7 @@
                 </a:solidFill>
                 <a:latin typeface="Calibri"/>
               </a:rPr>
-              <a:t>07 / 25</a:t>
-            </a:r>
-          </a:p>
-        </p:txBody>
-      </p:sp>
-      <p:pic>
-        <p:nvPicPr>
-          <p:cNvPr id="7" name="Picture 6" descr="logo"/>
-          <p:cNvPicPr>
-            <a:picLocks noChangeAspect="1"/>
-          </p:cNvPicPr>
-          <p:nvPr/>
-        </p:nvPicPr>
-        <p:blipFill>
-          <a:blip r:embed="rId3"/>
-          <a:stretch>
-            <a:fillRect/>
-          </a:stretch>
-        </p:blipFill>
-        <p:spPr>
-          <a:xfrm>
-            <a:off x="11247120" y="6309360"/>
-            <a:ext cx="384048" cy="384048"/>
-          </a:xfrm>
-          <a:prstGeom prst="rect">
-            <a:avLst/>
-          </a:prstGeom>
-        </p:spPr>
-      </p:pic>
-      <p:sp>
-        <p:nvSpPr>
-          <p:cNvPr id="8" name="TextBox 7"/>
-          <p:cNvSpPr txBox="1"/>
-          <p:nvPr/>
-        </p:nvSpPr>
-        <p:spPr>
-          <a:xfrm>
-            <a:off x="548640" y="1554480"/>
-            <a:ext cx="11094415" cy="4617720"/>
-          </a:xfrm>
-          <a:prstGeom prst="rect">
-            <a:avLst/>
-          </a:prstGeom>
-          <a:noFill/>
-        </p:spPr>
-        <p:txBody>
-          <a:bodyPr wrap="square" anchor="t" lIns="0" rIns="0" tIns="0" bIns="0">
-            <a:spAutoFit/>
-          </a:bodyPr>
-          <a:lstStyle/>
-          <a:p>
-            <a:pPr>
-              <a:spcAft>
-                <a:spcPts val="800"/>
-              </a:spcAft>
-            </a:pPr>
-            <a:r>
-              <a:rPr sz="1800" i="0" b="1">
-                <a:solidFill>
-                  <a:srgbClr val="2B211C"/>
-                </a:solidFill>
-                <a:latin typeface="Calibri"/>
-              </a:rPr>
-              <a:t>Tertiary (Chapter 2).</a:t>
-            </a:r>
-            <a:r>
-              <a:rPr sz="1800" i="0" b="0">
-                <a:solidFill>
-                  <a:srgbClr val="2B211C"/>
-                </a:solidFill>
-                <a:latin typeface="Calibri"/>
-              </a:rPr>
-              <a:t> The BNF and Lexicomp give doses, cautions and interactions. Paracetamol is the first choice for mild pain. NSAIDs can raise blood pressure, reduce the effect of ACE inhibitors, harm the kidneys and cause stomach ulcers. Naproxen or ibuprofen at the lowest effective dose for the shortest time carries a lower cardiovascular risk than some other NSAIDs. A proton-pump inhibitor is advised for patients with a history of dyspepsia who need an NSAID.</a:t>
-            </a:r>
-          </a:p>
-          <a:p>
-            <a:pPr>
-              <a:spcAft>
-                <a:spcPts val="800"/>
-              </a:spcAft>
-            </a:pPr>
-            <a:r>
-              <a:rPr sz="1800" i="0" b="1">
-                <a:solidFill>
-                  <a:srgbClr val="2B211C"/>
-                </a:solidFill>
-                <a:latin typeface="Calibri"/>
-              </a:rPr>
-              <a:t>Secondary.</a:t>
-            </a:r>
-            <a:r>
-              <a:rPr sz="1800" i="0" b="0">
-                <a:solidFill>
-                  <a:srgbClr val="2B211C"/>
-                </a:solidFill>
-                <a:latin typeface="Calibri"/>
-              </a:rPr>
-              <a:t> A PubMed search for frozen shoulder AND corticosteroid injection, filtered to systematic reviews, finds a recent meta-analysis.</a:t>
-            </a:r>
-          </a:p>
-          <a:p>
-            <a:pPr>
-              <a:spcAft>
-                <a:spcPts val="800"/>
-              </a:spcAft>
-            </a:pPr>
-            <a:r>
-              <a:rPr sz="1800" i="0" b="1">
-                <a:solidFill>
-                  <a:srgbClr val="2B211C"/>
-                </a:solidFill>
-                <a:latin typeface="Calibri"/>
-              </a:rPr>
-              <a:t>Primary / review evidence (Chapters 3 and 6).</a:t>
-            </a:r>
-            <a:r>
-              <a:rPr sz="1800" i="0" b="0">
-                <a:solidFill>
-                  <a:srgbClr val="2B211C"/>
-                </a:solidFill>
-                <a:latin typeface="Calibri"/>
-              </a:rPr>
-              <a:t> The review pooled randomised trials. Intra-articular corticosteroid injection gave better pain and movement in the </a:t>
-            </a:r>
-            <a:r>
-              <a:rPr sz="1800" i="0" b="1">
-                <a:solidFill>
-                  <a:srgbClr val="2B211C"/>
-                </a:solidFill>
-                <a:latin typeface="Calibri"/>
-              </a:rPr>
-              <a:t>early</a:t>
-            </a:r>
-            <a:r>
-              <a:rPr sz="1800" i="0" b="0">
-                <a:solidFill>
-                  <a:srgbClr val="2B211C"/>
-                </a:solidFill>
-                <a:latin typeface="Calibri"/>
-              </a:rPr>
-              <a:t> months than no injection. The benefit became smaller over time. Combining injection with home exercise did better than exercise alone in the short term.</a:t>
-            </a:r>
-          </a:p>
-        </p:txBody>
-      </p:sp>
-    </p:spTree>
-  </p:cSld>
-  <p:clrMapOvr>
-    <a:masterClrMapping/>
-  </p:clrMapOvr>
-</p:sld>
-</file>
-
-<file path=ppt/slides/slide8.xml><?xml version="1.0" encoding="utf-8"?>
-<p:sld xmlns:a="http://schemas.openxmlformats.org/drawingml/2006/main" xmlns:p="http://schemas.openxmlformats.org/presentationml/2006/main" xmlns:r="http://schemas.openxmlformats.org/officeDocument/2006/relationships">
-  <p:cSld>
-    <p:bg>
-      <p:bgPr>
-        <a:solidFill>
-          <a:srgbClr val="FFFFFF"/>
-        </a:solidFill>
-        <a:effectLst/>
-      </p:bgPr>
-    </p:bg>
-    <p:spTree>
-      <p:nvGrpSpPr>
-        <p:cNvPr id="1" name=""/>
-        <p:cNvGrpSpPr/>
-        <p:nvPr/>
-      </p:nvGrpSpPr>
-      <p:grpSpPr/>
-      <p:sp>
-        <p:nvSpPr>
-          <p:cNvPr id="2" name="Oval 1"/>
-          <p:cNvSpPr/>
-          <p:nvPr/>
-        </p:nvSpPr>
-        <p:spPr>
-          <a:xfrm>
-            <a:off x="548640" y="475488"/>
-            <a:ext cx="658368" cy="658368"/>
-          </a:xfrm>
-          <a:prstGeom prst="ellipse">
-            <a:avLst/>
-          </a:prstGeom>
-          <a:solidFill>
-            <a:srgbClr val="2F6F7A"/>
-          </a:solidFill>
-          <a:ln>
-            <a:noFill/>
-          </a:ln>
-          <a:effectLst/>
-        </p:spPr>
-        <p:style>
-          <a:lnRef idx="1">
-            <a:schemeClr val="accent1"/>
-          </a:lnRef>
-          <a:fillRef idx="3">
-            <a:schemeClr val="accent1"/>
-          </a:fillRef>
-          <a:effectRef idx="2">
-            <a:schemeClr val="accent1"/>
-          </a:effectRef>
-          <a:fontRef idx="minor">
-            <a:schemeClr val="lt1"/>
-          </a:fontRef>
-        </p:style>
-        <p:txBody>
-          <a:bodyPr rtlCol="0" anchor="ctr" lIns="0" rIns="0" tIns="0" bIns="0"/>
-          <a:lstStyle/>
-          <a:p>
-            <a:pPr algn="ctr"/>
-            <a:r>
-              <a:rPr sz="1800" i="0" b="1">
-                <a:solidFill>
-                  <a:srgbClr val="FFFFFF"/>
-                </a:solidFill>
-                <a:latin typeface="Cambria"/>
-              </a:rPr>
-              <a:t>10</a:t>
-            </a:r>
-          </a:p>
-        </p:txBody>
-      </p:sp>
-      <p:sp>
-        <p:nvSpPr>
-          <p:cNvPr id="3" name="TextBox 2"/>
-          <p:cNvSpPr txBox="1"/>
-          <p:nvPr/>
-        </p:nvSpPr>
-        <p:spPr>
-          <a:xfrm>
-            <a:off x="1417319" y="438912"/>
-            <a:ext cx="10180015" cy="292608"/>
-          </a:xfrm>
-          <a:prstGeom prst="rect">
-            <a:avLst/>
-          </a:prstGeom>
-          <a:noFill/>
-        </p:spPr>
-        <p:txBody>
-          <a:bodyPr wrap="square" anchor="t" lIns="0" rIns="0" tIns="0" bIns="0">
-            <a:spAutoFit/>
-          </a:bodyPr>
-          <a:lstStyle/>
-          <a:p>
-            <a:r>
-              <a:rPr sz="1200" i="0" b="1" spc="150">
-                <a:solidFill>
-                  <a:srgbClr val="2F6F7A"/>
-                </a:solidFill>
-                <a:latin typeface="Calibri"/>
-              </a:rPr>
-              <a:t>SECTION 10</a:t>
-            </a:r>
-          </a:p>
-        </p:txBody>
-      </p:sp>
-      <p:sp>
-        <p:nvSpPr>
-          <p:cNvPr id="4" name="TextBox 3"/>
-          <p:cNvSpPr txBox="1"/>
-          <p:nvPr/>
-        </p:nvSpPr>
-        <p:spPr>
-          <a:xfrm>
-            <a:off x="1417319" y="676656"/>
-            <a:ext cx="10180015" cy="640080"/>
-          </a:xfrm>
-          <a:prstGeom prst="rect">
-            <a:avLst/>
-          </a:prstGeom>
-          <a:noFill/>
-        </p:spPr>
-        <p:txBody>
-          <a:bodyPr wrap="square" anchor="t" lIns="0" rIns="0" tIns="0" bIns="0">
-            <a:spAutoFit/>
-          </a:bodyPr>
-          <a:lstStyle/>
-          <a:p>
-            <a:r>
-              <a:rPr sz="3200" i="0" b="1">
-                <a:solidFill>
-                  <a:srgbClr val="2B211C"/>
-                </a:solidFill>
-                <a:latin typeface="Cambria"/>
-              </a:rPr>
-              <a:t>Appraising the review in brief</a:t>
-            </a:r>
-          </a:p>
-        </p:txBody>
-      </p:sp>
-      <p:sp>
-        <p:nvSpPr>
-          <p:cNvPr id="5" name="TextBox 4"/>
-          <p:cNvSpPr txBox="1"/>
-          <p:nvPr/>
-        </p:nvSpPr>
-        <p:spPr>
-          <a:xfrm>
-            <a:off x="548640" y="6419088"/>
-            <a:ext cx="8229600" cy="274320"/>
-          </a:xfrm>
-          <a:prstGeom prst="rect">
-            <a:avLst/>
-          </a:prstGeom>
-          <a:noFill/>
-        </p:spPr>
-        <p:txBody>
-          <a:bodyPr wrap="square" anchor="t" lIns="0" rIns="0" tIns="0" bIns="0">
-            <a:spAutoFit/>
-          </a:bodyPr>
-          <a:lstStyle/>
-          <a:p>
-            <a:r>
-              <a:rPr sz="1200" i="0" b="0">
-                <a:solidFill>
-                  <a:srgbClr val="6E625B"/>
-                </a:solidFill>
-                <a:latin typeface="Calibri"/>
-              </a:rPr>
-              <a:t>Drug Information  ·  Section 10  ·  Applied Case: Answering a Real Drug Question</a:t>
-            </a:r>
-          </a:p>
-        </p:txBody>
-      </p:sp>
-      <p:sp>
-        <p:nvSpPr>
-          <p:cNvPr id="6" name="TextBox 5"/>
-          <p:cNvSpPr txBox="1"/>
-          <p:nvPr/>
-        </p:nvSpPr>
-        <p:spPr>
-          <a:xfrm>
-            <a:off x="10058400" y="6419088"/>
-            <a:ext cx="1097280" cy="274320"/>
-          </a:xfrm>
-          <a:prstGeom prst="rect">
-            <a:avLst/>
-          </a:prstGeom>
-          <a:noFill/>
-        </p:spPr>
-        <p:txBody>
-          <a:bodyPr wrap="square" anchor="t" lIns="0" rIns="0" tIns="0" bIns="0">
-            <a:spAutoFit/>
-          </a:bodyPr>
-          <a:lstStyle/>
-          <a:p>
-            <a:pPr algn="r"/>
-            <a:r>
-              <a:rPr sz="1200" i="0" b="1">
-                <a:solidFill>
-                  <a:srgbClr val="6E625B"/>
-                </a:solidFill>
-                <a:latin typeface="Calibri"/>
-              </a:rPr>
-              <a:t>08 / 25</a:t>
+              <a:t>07 / 24</a:t>
             </a:r>
           </a:p>
         </p:txBody>
@@ -20260,6 +19667,819 @@
 </p:sld>
 </file>
 
+<file path=ppt/slides/slide8.xml><?xml version="1.0" encoding="utf-8"?>
+<p:sld xmlns:a="http://schemas.openxmlformats.org/drawingml/2006/main" xmlns:p="http://schemas.openxmlformats.org/presentationml/2006/main" xmlns:r="http://schemas.openxmlformats.org/officeDocument/2006/relationships">
+  <p:cSld>
+    <p:bg>
+      <p:bgPr>
+        <a:solidFill>
+          <a:srgbClr val="FFFFFF"/>
+        </a:solidFill>
+        <a:effectLst/>
+      </p:bgPr>
+    </p:bg>
+    <p:spTree>
+      <p:nvGrpSpPr>
+        <p:cNvPr id="1" name=""/>
+        <p:cNvGrpSpPr/>
+        <p:nvPr/>
+      </p:nvGrpSpPr>
+      <p:grpSpPr/>
+      <p:sp>
+        <p:nvSpPr>
+          <p:cNvPr id="2" name="Oval 1"/>
+          <p:cNvSpPr/>
+          <p:nvPr/>
+        </p:nvSpPr>
+        <p:spPr>
+          <a:xfrm>
+            <a:off x="548640" y="475488"/>
+            <a:ext cx="658368" cy="658368"/>
+          </a:xfrm>
+          <a:prstGeom prst="ellipse">
+            <a:avLst/>
+          </a:prstGeom>
+          <a:solidFill>
+            <a:srgbClr val="2F6F7A"/>
+          </a:solidFill>
+          <a:ln>
+            <a:noFill/>
+          </a:ln>
+          <a:effectLst/>
+        </p:spPr>
+        <p:style>
+          <a:lnRef idx="1">
+            <a:schemeClr val="accent1"/>
+          </a:lnRef>
+          <a:fillRef idx="3">
+            <a:schemeClr val="accent1"/>
+          </a:fillRef>
+          <a:effectRef idx="2">
+            <a:schemeClr val="accent1"/>
+          </a:effectRef>
+          <a:fontRef idx="minor">
+            <a:schemeClr val="lt1"/>
+          </a:fontRef>
+        </p:style>
+        <p:txBody>
+          <a:bodyPr rtlCol="0" anchor="ctr" lIns="0" rIns="0" tIns="0" bIns="0"/>
+          <a:lstStyle/>
+          <a:p>
+            <a:pPr algn="ctr"/>
+            <a:r>
+              <a:rPr sz="1800" i="0" b="1">
+                <a:solidFill>
+                  <a:srgbClr val="FFFFFF"/>
+                </a:solidFill>
+                <a:latin typeface="Cambria"/>
+              </a:rPr>
+              <a:t>10</a:t>
+            </a:r>
+          </a:p>
+        </p:txBody>
+      </p:sp>
+      <p:sp>
+        <p:nvSpPr>
+          <p:cNvPr id="3" name="TextBox 2"/>
+          <p:cNvSpPr txBox="1"/>
+          <p:nvPr/>
+        </p:nvSpPr>
+        <p:spPr>
+          <a:xfrm>
+            <a:off x="1417319" y="438912"/>
+            <a:ext cx="10180015" cy="292608"/>
+          </a:xfrm>
+          <a:prstGeom prst="rect">
+            <a:avLst/>
+          </a:prstGeom>
+          <a:noFill/>
+        </p:spPr>
+        <p:txBody>
+          <a:bodyPr wrap="square" anchor="t" lIns="0" rIns="0" tIns="0" bIns="0">
+            <a:spAutoFit/>
+          </a:bodyPr>
+          <a:lstStyle/>
+          <a:p>
+            <a:r>
+              <a:rPr sz="1200" i="0" b="1" spc="150">
+                <a:solidFill>
+                  <a:srgbClr val="2F6F7A"/>
+                </a:solidFill>
+                <a:latin typeface="Calibri"/>
+              </a:rPr>
+              <a:t>SECTION 10</a:t>
+            </a:r>
+          </a:p>
+        </p:txBody>
+      </p:sp>
+      <p:sp>
+        <p:nvSpPr>
+          <p:cNvPr id="4" name="TextBox 3"/>
+          <p:cNvSpPr txBox="1"/>
+          <p:nvPr/>
+        </p:nvSpPr>
+        <p:spPr>
+          <a:xfrm>
+            <a:off x="1417319" y="676656"/>
+            <a:ext cx="10180015" cy="640080"/>
+          </a:xfrm>
+          <a:prstGeom prst="rect">
+            <a:avLst/>
+          </a:prstGeom>
+          <a:noFill/>
+        </p:spPr>
+        <p:txBody>
+          <a:bodyPr wrap="square" anchor="t" lIns="0" rIns="0" tIns="0" bIns="0">
+            <a:spAutoFit/>
+          </a:bodyPr>
+          <a:lstStyle/>
+          <a:p>
+            <a:r>
+              <a:rPr sz="3200" i="0" b="1">
+                <a:solidFill>
+                  <a:srgbClr val="2B211C"/>
+                </a:solidFill>
+                <a:latin typeface="Cambria"/>
+              </a:rPr>
+              <a:t>The Answer</a:t>
+            </a:r>
+          </a:p>
+        </p:txBody>
+      </p:sp>
+      <p:sp>
+        <p:nvSpPr>
+          <p:cNvPr id="5" name="TextBox 4"/>
+          <p:cNvSpPr txBox="1"/>
+          <p:nvPr/>
+        </p:nvSpPr>
+        <p:spPr>
+          <a:xfrm>
+            <a:off x="548640" y="6419088"/>
+            <a:ext cx="8229600" cy="274320"/>
+          </a:xfrm>
+          <a:prstGeom prst="rect">
+            <a:avLst/>
+          </a:prstGeom>
+          <a:noFill/>
+        </p:spPr>
+        <p:txBody>
+          <a:bodyPr wrap="square" anchor="t" lIns="0" rIns="0" tIns="0" bIns="0">
+            <a:spAutoFit/>
+          </a:bodyPr>
+          <a:lstStyle/>
+          <a:p>
+            <a:r>
+              <a:rPr sz="1200" i="0" b="0">
+                <a:solidFill>
+                  <a:srgbClr val="6E625B"/>
+                </a:solidFill>
+                <a:latin typeface="Calibri"/>
+              </a:rPr>
+              <a:t>Drug Information  ·  Section 10  ·  Applied Case: Answering a Real Drug Question</a:t>
+            </a:r>
+          </a:p>
+        </p:txBody>
+      </p:sp>
+      <p:sp>
+        <p:nvSpPr>
+          <p:cNvPr id="6" name="TextBox 5"/>
+          <p:cNvSpPr txBox="1"/>
+          <p:nvPr/>
+        </p:nvSpPr>
+        <p:spPr>
+          <a:xfrm>
+            <a:off x="10058400" y="6419088"/>
+            <a:ext cx="1097280" cy="274320"/>
+          </a:xfrm>
+          <a:prstGeom prst="rect">
+            <a:avLst/>
+          </a:prstGeom>
+          <a:noFill/>
+        </p:spPr>
+        <p:txBody>
+          <a:bodyPr wrap="square" anchor="t" lIns="0" rIns="0" tIns="0" bIns="0">
+            <a:spAutoFit/>
+          </a:bodyPr>
+          <a:lstStyle/>
+          <a:p>
+            <a:pPr algn="r"/>
+            <a:r>
+              <a:rPr sz="1200" i="0" b="1">
+                <a:solidFill>
+                  <a:srgbClr val="6E625B"/>
+                </a:solidFill>
+                <a:latin typeface="Calibri"/>
+              </a:rPr>
+              <a:t>08 / 24</a:t>
+            </a:r>
+          </a:p>
+        </p:txBody>
+      </p:sp>
+      <p:pic>
+        <p:nvPicPr>
+          <p:cNvPr id="7" name="Picture 6" descr="logo"/>
+          <p:cNvPicPr>
+            <a:picLocks noChangeAspect="1"/>
+          </p:cNvPicPr>
+          <p:nvPr/>
+        </p:nvPicPr>
+        <p:blipFill>
+          <a:blip r:embed="rId3"/>
+          <a:stretch>
+            <a:fillRect/>
+          </a:stretch>
+        </p:blipFill>
+        <p:spPr>
+          <a:xfrm>
+            <a:off x="11247120" y="6309360"/>
+            <a:ext cx="384048" cy="384048"/>
+          </a:xfrm>
+          <a:prstGeom prst="rect">
+            <a:avLst/>
+          </a:prstGeom>
+        </p:spPr>
+      </p:pic>
+      <p:sp>
+        <p:nvSpPr>
+          <p:cNvPr id="8" name="TextBox 7"/>
+          <p:cNvSpPr txBox="1"/>
+          <p:nvPr/>
+        </p:nvSpPr>
+        <p:spPr>
+          <a:xfrm>
+            <a:off x="548640" y="1554480"/>
+            <a:ext cx="11094415" cy="498348"/>
+          </a:xfrm>
+          <a:prstGeom prst="rect">
+            <a:avLst/>
+          </a:prstGeom>
+          <a:noFill/>
+        </p:spPr>
+        <p:txBody>
+          <a:bodyPr wrap="square" anchor="t" lIns="0" rIns="0" tIns="0" bIns="0">
+            <a:spAutoFit/>
+          </a:bodyPr>
+          <a:lstStyle/>
+          <a:p>
+            <a:pPr>
+              <a:spcAft>
+                <a:spcPts val="800"/>
+              </a:spcAft>
+            </a:pPr>
+            <a:r>
+              <a:rPr sz="1800" i="0" b="0">
+                <a:solidFill>
+                  <a:srgbClr val="2B211C"/>
+                </a:solidFill>
+                <a:latin typeface="Calibri"/>
+              </a:rPr>
+              <a:t>The pharmacist writes back to the physiotherapist and the doctor:</a:t>
+            </a:r>
+          </a:p>
+        </p:txBody>
+      </p:sp>
+      <p:sp>
+        <p:nvSpPr>
+          <p:cNvPr id="9" name="Oval 8"/>
+          <p:cNvSpPr/>
+          <p:nvPr/>
+        </p:nvSpPr>
+        <p:spPr>
+          <a:xfrm>
+            <a:off x="548640" y="2253996"/>
+            <a:ext cx="402336" cy="402336"/>
+          </a:xfrm>
+          <a:prstGeom prst="ellipse">
+            <a:avLst/>
+          </a:prstGeom>
+          <a:solidFill>
+            <a:srgbClr val="E6EEEF"/>
+          </a:solidFill>
+          <a:ln>
+            <a:noFill/>
+          </a:ln>
+          <a:effectLst/>
+        </p:spPr>
+        <p:style>
+          <a:lnRef idx="1">
+            <a:schemeClr val="accent1"/>
+          </a:lnRef>
+          <a:fillRef idx="3">
+            <a:schemeClr val="accent1"/>
+          </a:fillRef>
+          <a:effectRef idx="2">
+            <a:schemeClr val="accent1"/>
+          </a:effectRef>
+          <a:fontRef idx="minor">
+            <a:schemeClr val="lt1"/>
+          </a:fontRef>
+        </p:style>
+        <p:txBody>
+          <a:bodyPr rtlCol="0" anchor="ctr" lIns="0" rIns="0" tIns="0" bIns="0"/>
+          <a:lstStyle/>
+          <a:p>
+            <a:pPr algn="ctr"/>
+            <a:r>
+              <a:rPr sz="1300" i="0" b="1">
+                <a:solidFill>
+                  <a:srgbClr val="2F6F7A"/>
+                </a:solidFill>
+                <a:latin typeface="Calibri"/>
+              </a:rPr>
+              <a:t>1</a:t>
+            </a:r>
+          </a:p>
+        </p:txBody>
+      </p:sp>
+      <p:sp>
+        <p:nvSpPr>
+          <p:cNvPr id="10" name="TextBox 9"/>
+          <p:cNvSpPr txBox="1"/>
+          <p:nvPr/>
+        </p:nvSpPr>
+        <p:spPr>
+          <a:xfrm>
+            <a:off x="1143000" y="2272284"/>
+            <a:ext cx="10500055" cy="805078"/>
+          </a:xfrm>
+          <a:prstGeom prst="rect">
+            <a:avLst/>
+          </a:prstGeom>
+          <a:noFill/>
+        </p:spPr>
+        <p:txBody>
+          <a:bodyPr wrap="square" anchor="t" lIns="0" rIns="0" tIns="0" bIns="0">
+            <a:spAutoFit/>
+          </a:bodyPr>
+          <a:lstStyle/>
+          <a:p>
+            <a:r>
+              <a:rPr sz="2000" i="0" b="1">
+                <a:solidFill>
+                  <a:srgbClr val="2B211C"/>
+                </a:solidFill>
+                <a:latin typeface="Calibri"/>
+              </a:rPr>
+              <a:t>Paracetamol</a:t>
+            </a:r>
+            <a:r>
+              <a:rPr sz="2000" i="0" b="0">
+                <a:solidFill>
+                  <a:srgbClr val="2B211C"/>
+                </a:solidFill>
+                <a:latin typeface="Calibri"/>
+              </a:rPr>
+              <a:t> 1 g up to four times a day (maximum 4 g a day) before exercise sessions.</a:t>
+            </a:r>
+          </a:p>
+        </p:txBody>
+      </p:sp>
+      <p:sp>
+        <p:nvSpPr>
+          <p:cNvPr id="11" name="Oval 10"/>
+          <p:cNvSpPr/>
+          <p:nvPr/>
+        </p:nvSpPr>
+        <p:spPr>
+          <a:xfrm>
+            <a:off x="548640" y="3104794"/>
+            <a:ext cx="402336" cy="402336"/>
+          </a:xfrm>
+          <a:prstGeom prst="ellipse">
+            <a:avLst/>
+          </a:prstGeom>
+          <a:solidFill>
+            <a:srgbClr val="E6EEEF"/>
+          </a:solidFill>
+          <a:ln>
+            <a:noFill/>
+          </a:ln>
+          <a:effectLst/>
+        </p:spPr>
+        <p:style>
+          <a:lnRef idx="1">
+            <a:schemeClr val="accent1"/>
+          </a:lnRef>
+          <a:fillRef idx="3">
+            <a:schemeClr val="accent1"/>
+          </a:fillRef>
+          <a:effectRef idx="2">
+            <a:schemeClr val="accent1"/>
+          </a:effectRef>
+          <a:fontRef idx="minor">
+            <a:schemeClr val="lt1"/>
+          </a:fontRef>
+        </p:style>
+        <p:txBody>
+          <a:bodyPr rtlCol="0" anchor="ctr" lIns="0" rIns="0" tIns="0" bIns="0"/>
+          <a:lstStyle/>
+          <a:p>
+            <a:pPr algn="ctr"/>
+            <a:r>
+              <a:rPr sz="1300" i="0" b="1">
+                <a:solidFill>
+                  <a:srgbClr val="2F6F7A"/>
+                </a:solidFill>
+                <a:latin typeface="Calibri"/>
+              </a:rPr>
+              <a:t>2</a:t>
+            </a:r>
+          </a:p>
+        </p:txBody>
+      </p:sp>
+      <p:sp>
+        <p:nvSpPr>
+          <p:cNvPr id="12" name="TextBox 11"/>
+          <p:cNvSpPr txBox="1"/>
+          <p:nvPr/>
+        </p:nvSpPr>
+        <p:spPr>
+          <a:xfrm>
+            <a:off x="1143000" y="3123082"/>
+            <a:ext cx="10500055" cy="805078"/>
+          </a:xfrm>
+          <a:prstGeom prst="rect">
+            <a:avLst/>
+          </a:prstGeom>
+          <a:noFill/>
+        </p:spPr>
+        <p:txBody>
+          <a:bodyPr wrap="square" anchor="t" lIns="0" rIns="0" tIns="0" bIns="0">
+            <a:spAutoFit/>
+          </a:bodyPr>
+          <a:lstStyle/>
+          <a:p>
+            <a:r>
+              <a:rPr sz="2000" i="0" b="0">
+                <a:solidFill>
+                  <a:srgbClr val="2B211C"/>
+                </a:solidFill>
+                <a:latin typeface="Calibri"/>
+              </a:rPr>
+              <a:t>If this is not enough, </a:t>
+            </a:r>
+            <a:r>
+              <a:rPr sz="2000" i="0" b="1">
+                <a:solidFill>
+                  <a:srgbClr val="2B211C"/>
+                </a:solidFill>
+                <a:latin typeface="Calibri"/>
+              </a:rPr>
+              <a:t>naproxen</a:t>
+            </a:r>
+            <a:r>
+              <a:rPr sz="2000" i="0" b="0">
+                <a:solidFill>
+                  <a:srgbClr val="2B211C"/>
+                </a:solidFill>
+                <a:latin typeface="Calibri"/>
+              </a:rPr>
+              <a:t> 250-500 mg twice daily with food, for up to two weeks, </a:t>
+            </a:r>
+            <a:r>
+              <a:rPr sz="2000" i="0" b="1">
+                <a:solidFill>
+                  <a:srgbClr val="2B211C"/>
+                </a:solidFill>
+                <a:latin typeface="Calibri"/>
+              </a:rPr>
+              <a:t>with omeprazole</a:t>
+            </a:r>
+            <a:r>
+              <a:rPr sz="2000" i="0" b="0">
+                <a:solidFill>
+                  <a:srgbClr val="2B211C"/>
+                </a:solidFill>
+                <a:latin typeface="Calibri"/>
+              </a:rPr>
+              <a:t> 20 mg daily for stomach protection.</a:t>
+            </a:r>
+          </a:p>
+        </p:txBody>
+      </p:sp>
+      <p:sp>
+        <p:nvSpPr>
+          <p:cNvPr id="13" name="Oval 12"/>
+          <p:cNvSpPr/>
+          <p:nvPr/>
+        </p:nvSpPr>
+        <p:spPr>
+          <a:xfrm>
+            <a:off x="548640" y="3955592"/>
+            <a:ext cx="402336" cy="402336"/>
+          </a:xfrm>
+          <a:prstGeom prst="ellipse">
+            <a:avLst/>
+          </a:prstGeom>
+          <a:solidFill>
+            <a:srgbClr val="E6EEEF"/>
+          </a:solidFill>
+          <a:ln>
+            <a:noFill/>
+          </a:ln>
+          <a:effectLst/>
+        </p:spPr>
+        <p:style>
+          <a:lnRef idx="1">
+            <a:schemeClr val="accent1"/>
+          </a:lnRef>
+          <a:fillRef idx="3">
+            <a:schemeClr val="accent1"/>
+          </a:fillRef>
+          <a:effectRef idx="2">
+            <a:schemeClr val="accent1"/>
+          </a:effectRef>
+          <a:fontRef idx="minor">
+            <a:schemeClr val="lt1"/>
+          </a:fontRef>
+        </p:style>
+        <p:txBody>
+          <a:bodyPr rtlCol="0" anchor="ctr" lIns="0" rIns="0" tIns="0" bIns="0"/>
+          <a:lstStyle/>
+          <a:p>
+            <a:pPr algn="ctr"/>
+            <a:r>
+              <a:rPr sz="1300" i="0" b="1">
+                <a:solidFill>
+                  <a:srgbClr val="2F6F7A"/>
+                </a:solidFill>
+                <a:latin typeface="Calibri"/>
+              </a:rPr>
+              <a:t>3</a:t>
+            </a:r>
+          </a:p>
+        </p:txBody>
+      </p:sp>
+      <p:sp>
+        <p:nvSpPr>
+          <p:cNvPr id="14" name="TextBox 13"/>
+          <p:cNvSpPr txBox="1"/>
+          <p:nvPr/>
+        </p:nvSpPr>
+        <p:spPr>
+          <a:xfrm>
+            <a:off x="1143000" y="3973880"/>
+            <a:ext cx="10500055" cy="805078"/>
+          </a:xfrm>
+          <a:prstGeom prst="rect">
+            <a:avLst/>
+          </a:prstGeom>
+          <a:noFill/>
+        </p:spPr>
+        <p:txBody>
+          <a:bodyPr wrap="square" anchor="t" lIns="0" rIns="0" tIns="0" bIns="0">
+            <a:spAutoFit/>
+          </a:bodyPr>
+          <a:lstStyle/>
+          <a:p>
+            <a:r>
+              <a:rPr sz="2000" i="0" b="0">
+                <a:solidFill>
+                  <a:srgbClr val="2B211C"/>
+                </a:solidFill>
+                <a:latin typeface="Calibri"/>
+              </a:rPr>
+              <a:t>Because of lisinopril, check </a:t>
+            </a:r>
+            <a:r>
+              <a:rPr sz="2000" i="0" b="1">
+                <a:solidFill>
+                  <a:srgbClr val="2B211C"/>
+                </a:solidFill>
+                <a:latin typeface="Calibri"/>
+              </a:rPr>
+              <a:t>blood pressure</a:t>
+            </a:r>
+            <a:r>
+              <a:rPr sz="2000" i="0" b="0">
+                <a:solidFill>
+                  <a:srgbClr val="2B211C"/>
+                </a:solidFill>
+                <a:latin typeface="Calibri"/>
+              </a:rPr>
+              <a:t> and </a:t>
+            </a:r>
+            <a:r>
+              <a:rPr sz="2000" i="0" b="1">
+                <a:solidFill>
+                  <a:srgbClr val="2B211C"/>
+                </a:solidFill>
+                <a:latin typeface="Calibri"/>
+              </a:rPr>
+              <a:t>kidney function</a:t>
+            </a:r>
+            <a:r>
+              <a:rPr sz="2000" i="0" b="0">
+                <a:solidFill>
+                  <a:srgbClr val="2B211C"/>
+                </a:solidFill>
+                <a:latin typeface="Calibri"/>
+              </a:rPr>
+              <a:t> within one to two weeks of starting naproxen.</a:t>
+            </a:r>
+          </a:p>
+        </p:txBody>
+      </p:sp>
+      <p:sp>
+        <p:nvSpPr>
+          <p:cNvPr id="15" name="Oval 14"/>
+          <p:cNvSpPr/>
+          <p:nvPr/>
+        </p:nvSpPr>
+        <p:spPr>
+          <a:xfrm>
+            <a:off x="548640" y="4806391"/>
+            <a:ext cx="402336" cy="402336"/>
+          </a:xfrm>
+          <a:prstGeom prst="ellipse">
+            <a:avLst/>
+          </a:prstGeom>
+          <a:solidFill>
+            <a:srgbClr val="E6EEEF"/>
+          </a:solidFill>
+          <a:ln>
+            <a:noFill/>
+          </a:ln>
+          <a:effectLst/>
+        </p:spPr>
+        <p:style>
+          <a:lnRef idx="1">
+            <a:schemeClr val="accent1"/>
+          </a:lnRef>
+          <a:fillRef idx="3">
+            <a:schemeClr val="accent1"/>
+          </a:fillRef>
+          <a:effectRef idx="2">
+            <a:schemeClr val="accent1"/>
+          </a:effectRef>
+          <a:fontRef idx="minor">
+            <a:schemeClr val="lt1"/>
+          </a:fontRef>
+        </p:style>
+        <p:txBody>
+          <a:bodyPr rtlCol="0" anchor="ctr" lIns="0" rIns="0" tIns="0" bIns="0"/>
+          <a:lstStyle/>
+          <a:p>
+            <a:pPr algn="ctr"/>
+            <a:r>
+              <a:rPr sz="1300" i="0" b="1">
+                <a:solidFill>
+                  <a:srgbClr val="2F6F7A"/>
+                </a:solidFill>
+                <a:latin typeface="Calibri"/>
+              </a:rPr>
+              <a:t>4</a:t>
+            </a:r>
+          </a:p>
+        </p:txBody>
+      </p:sp>
+      <p:sp>
+        <p:nvSpPr>
+          <p:cNvPr id="16" name="TextBox 15"/>
+          <p:cNvSpPr txBox="1"/>
+          <p:nvPr/>
+        </p:nvSpPr>
+        <p:spPr>
+          <a:xfrm>
+            <a:off x="1143000" y="4824679"/>
+            <a:ext cx="10500055" cy="805078"/>
+          </a:xfrm>
+          <a:prstGeom prst="rect">
+            <a:avLst/>
+          </a:prstGeom>
+          <a:noFill/>
+        </p:spPr>
+        <p:txBody>
+          <a:bodyPr wrap="square" anchor="t" lIns="0" rIns="0" tIns="0" bIns="0">
+            <a:spAutoFit/>
+          </a:bodyPr>
+          <a:lstStyle/>
+          <a:p>
+            <a:r>
+              <a:rPr sz="2000" i="0" b="0">
+                <a:solidFill>
+                  <a:srgbClr val="2B211C"/>
+                </a:solidFill>
+                <a:latin typeface="Calibri"/>
+              </a:rPr>
+              <a:t>A </a:t>
+            </a:r>
+            <a:r>
+              <a:rPr sz="2000" i="0" b="1">
+                <a:solidFill>
+                  <a:srgbClr val="2B211C"/>
+                </a:solidFill>
+                <a:latin typeface="Calibri"/>
+              </a:rPr>
+              <a:t>corticosteroid injection</a:t>
+            </a:r>
+            <a:r>
+              <a:rPr sz="2000" i="0" b="0">
+                <a:solidFill>
+                  <a:srgbClr val="2B211C"/>
+                </a:solidFill>
+                <a:latin typeface="Calibri"/>
+              </a:rPr>
+              <a:t> can be considered by the doctor for short-term relief to help him exercise; evidence supports early benefit.</a:t>
+            </a:r>
+          </a:p>
+        </p:txBody>
+      </p:sp>
+      <p:sp>
+        <p:nvSpPr>
+          <p:cNvPr id="17" name="Oval 16"/>
+          <p:cNvSpPr/>
+          <p:nvPr/>
+        </p:nvSpPr>
+        <p:spPr>
+          <a:xfrm>
+            <a:off x="548640" y="5657189"/>
+            <a:ext cx="402336" cy="402336"/>
+          </a:xfrm>
+          <a:prstGeom prst="ellipse">
+            <a:avLst/>
+          </a:prstGeom>
+          <a:solidFill>
+            <a:srgbClr val="E6EEEF"/>
+          </a:solidFill>
+          <a:ln>
+            <a:noFill/>
+          </a:ln>
+          <a:effectLst/>
+        </p:spPr>
+        <p:style>
+          <a:lnRef idx="1">
+            <a:schemeClr val="accent1"/>
+          </a:lnRef>
+          <a:fillRef idx="3">
+            <a:schemeClr val="accent1"/>
+          </a:fillRef>
+          <a:effectRef idx="2">
+            <a:schemeClr val="accent1"/>
+          </a:effectRef>
+          <a:fontRef idx="minor">
+            <a:schemeClr val="lt1"/>
+          </a:fontRef>
+        </p:style>
+        <p:txBody>
+          <a:bodyPr rtlCol="0" anchor="ctr" lIns="0" rIns="0" tIns="0" bIns="0"/>
+          <a:lstStyle/>
+          <a:p>
+            <a:pPr algn="ctr"/>
+            <a:r>
+              <a:rPr sz="1300" i="0" b="1">
+                <a:solidFill>
+                  <a:srgbClr val="2F6F7A"/>
+                </a:solidFill>
+                <a:latin typeface="Calibri"/>
+              </a:rPr>
+              <a:t>5</a:t>
+            </a:r>
+          </a:p>
+        </p:txBody>
+      </p:sp>
+      <p:sp>
+        <p:nvSpPr>
+          <p:cNvPr id="18" name="TextBox 17"/>
+          <p:cNvSpPr txBox="1"/>
+          <p:nvPr/>
+        </p:nvSpPr>
+        <p:spPr>
+          <a:xfrm>
+            <a:off x="1143000" y="5675477"/>
+            <a:ext cx="10500055" cy="487578"/>
+          </a:xfrm>
+          <a:prstGeom prst="rect">
+            <a:avLst/>
+          </a:prstGeom>
+          <a:noFill/>
+        </p:spPr>
+        <p:txBody>
+          <a:bodyPr wrap="square" anchor="t" lIns="0" rIns="0" tIns="0" bIns="0">
+            <a:spAutoFit/>
+          </a:bodyPr>
+          <a:lstStyle/>
+          <a:p>
+            <a:r>
+              <a:rPr sz="2000" i="0" b="0">
+                <a:solidFill>
+                  <a:srgbClr val="2B211C"/>
+                </a:solidFill>
+                <a:latin typeface="Calibri"/>
+              </a:rPr>
+              <a:t>Heat before exercise and the home programme remain the core of treatment.</a:t>
+            </a:r>
+          </a:p>
+        </p:txBody>
+      </p:sp>
+    </p:spTree>
+  </p:cSld>
+  <p:clrMapOvr>
+    <a:masterClrMapping/>
+  </p:clrMapOvr>
+</p:sld>
+</file>
+
 <file path=ppt/slides/slide9.xml><?xml version="1.0" encoding="utf-8"?>
 <p:sld xmlns:a="http://schemas.openxmlformats.org/drawingml/2006/main" xmlns:p="http://schemas.openxmlformats.org/presentationml/2006/main" xmlns:r="http://schemas.openxmlformats.org/officeDocument/2006/relationships">
   <p:cSld>
@@ -20280,16 +20500,16 @@
       <p:grpSpPr/>
       <p:sp>
         <p:nvSpPr>
-          <p:cNvPr id="2" name="Oval 1"/>
+          <p:cNvPr id="2" name="Rectangle 1"/>
           <p:cNvSpPr/>
           <p:nvPr/>
         </p:nvSpPr>
         <p:spPr>
           <a:xfrm>
-            <a:off x="548640" y="475488"/>
-            <a:ext cx="658368" cy="658368"/>
-          </a:xfrm>
-          <a:prstGeom prst="ellipse">
+            <a:off x="0" y="0"/>
+            <a:ext cx="3931920" cy="6858000"/>
+          </a:xfrm>
+          <a:prstGeom prst="rect">
             <a:avLst/>
           </a:prstGeom>
           <a:solidFill>
@@ -20315,19 +20535,10 @@
           </a:fontRef>
         </p:style>
         <p:txBody>
-          <a:bodyPr rtlCol="0" anchor="ctr" lIns="0" rIns="0" tIns="0" bIns="0"/>
+          <a:bodyPr rtlCol="0" anchor="ctr"/>
           <a:lstStyle/>
           <a:p>
             <a:pPr algn="ctr"/>
-            <a:r>
-              <a:rPr sz="1800" i="0" b="1">
-                <a:solidFill>
-                  <a:srgbClr val="FFFFFF"/>
-                </a:solidFill>
-                <a:latin typeface="Cambria"/>
-              </a:rPr>
-              <a:t>10</a:t>
-            </a:r>
           </a:p>
         </p:txBody>
       </p:sp>
@@ -20339,8 +20550,8 @@
         </p:nvSpPr>
         <p:spPr>
           <a:xfrm>
-            <a:off x="1417319" y="438912"/>
-            <a:ext cx="10180015" cy="292608"/>
+            <a:off x="548640" y="1188720"/>
+            <a:ext cx="2926080" cy="2377440"/>
           </a:xfrm>
           <a:prstGeom prst="rect">
             <a:avLst/>
@@ -20354,13 +20565,13 @@
           <a:lstStyle/>
           <a:p>
             <a:r>
-              <a:rPr sz="1200" i="0" b="1" spc="150">
-                <a:solidFill>
-                  <a:srgbClr val="2F6F7A"/>
-                </a:solidFill>
-                <a:latin typeface="Calibri"/>
-              </a:rPr>
-              <a:t>SECTION 10</a:t>
+              <a:rPr sz="13000" i="0" b="1">
+                <a:solidFill>
+                  <a:srgbClr val="E6EEEF"/>
+                </a:solidFill>
+                <a:latin typeface="Cambria"/>
+              </a:rPr>
+              <a:t>℞</a:t>
             </a:r>
           </a:p>
         </p:txBody>
@@ -20373,8 +20584,8 @@
         </p:nvSpPr>
         <p:spPr>
           <a:xfrm>
-            <a:off x="1417319" y="676656"/>
-            <a:ext cx="10180015" cy="640080"/>
+            <a:off x="548640" y="3977639"/>
+            <a:ext cx="3017520" cy="1280160"/>
           </a:xfrm>
           <a:prstGeom prst="rect">
             <a:avLst/>
@@ -20388,13 +20599,24 @@
           <a:lstStyle/>
           <a:p>
             <a:r>
-              <a:rPr sz="3200" i="0" b="1">
-                <a:solidFill>
-                  <a:srgbClr val="2B211C"/>
+              <a:rPr sz="3000" i="0" b="1">
+                <a:solidFill>
+                  <a:srgbClr val="FFFFFF"/>
                 </a:solidFill>
                 <a:latin typeface="Cambria"/>
               </a:rPr>
-              <a:t>The Answer</a:t>
+              <a:t>At the Pharmacy</a:t>
+            </a:r>
+          </a:p>
+          <a:p>
+            <a:r>
+              <a:rPr sz="1400" i="0" b="1" spc="150">
+                <a:solidFill>
+                  <a:srgbClr val="E6EEEF"/>
+                </a:solidFill>
+                <a:latin typeface="Calibri"/>
+              </a:rPr>
+              <a:t>Section 10</a:t>
             </a:r>
           </a:p>
         </p:txBody>
@@ -20407,7 +20629,41 @@
         </p:nvSpPr>
         <p:spPr>
           <a:xfrm>
-            <a:off x="548640" y="6419088"/>
+            <a:off x="4526280" y="822960"/>
+            <a:ext cx="7132320" cy="5120640"/>
+          </a:xfrm>
+          <a:prstGeom prst="rect">
+            <a:avLst/>
+          </a:prstGeom>
+          <a:noFill/>
+        </p:spPr>
+        <p:txBody>
+          <a:bodyPr wrap="square" anchor="ctr" lIns="0" rIns="0" tIns="0" bIns="0">
+            <a:spAutoFit/>
+          </a:bodyPr>
+          <a:lstStyle/>
+          <a:p>
+            <a:r>
+              <a:rPr sz="2200" i="0" b="0">
+                <a:solidFill>
+                  <a:srgbClr val="2B211C"/>
+                </a:solidFill>
+                <a:latin typeface="Calibri"/>
+              </a:rPr>
+              <a:t>Mr Ahmed comes in with his prescription. You explain how to take naproxen with food and omeprazole. You also tell him to stop naproxen and call if he notices black stools, ankle swelling or much less urine. You record the counselling in the pharmacy notes.</a:t>
+            </a:r>
+          </a:p>
+        </p:txBody>
+      </p:sp>
+      <p:sp>
+        <p:nvSpPr>
+          <p:cNvPr id="6" name="TextBox 5"/>
+          <p:cNvSpPr txBox="1"/>
+          <p:nvPr/>
+        </p:nvSpPr>
+        <p:spPr>
+          <a:xfrm>
+            <a:off x="4526280" y="6419088"/>
             <a:ext cx="8229600" cy="274320"/>
           </a:xfrm>
           <a:prstGeom prst="rect">
@@ -20428,14 +20684,14 @@
                 </a:solidFill>
                 <a:latin typeface="Calibri"/>
               </a:rPr>
-              <a:t>Drug Information  ·  Section 10  ·  Applied Case: Answering a Real Drug Question</a:t>
-            </a:r>
-          </a:p>
-        </p:txBody>
-      </p:sp>
-      <p:sp>
-        <p:nvSpPr>
-          <p:cNvPr id="6" name="TextBox 5"/>
+              <a:t>Drug Information  ·  Applied Case: Answering a Real Drug Question</a:t>
+            </a:r>
+          </a:p>
+        </p:txBody>
+      </p:sp>
+      <p:sp>
+        <p:nvSpPr>
+          <p:cNvPr id="7" name="TextBox 6"/>
           <p:cNvSpPr txBox="1"/>
           <p:nvPr/>
         </p:nvSpPr>
@@ -20463,14 +20719,14 @@
                 </a:solidFill>
                 <a:latin typeface="Calibri"/>
               </a:rPr>
-              <a:t>09 / 25</a:t>
+              <a:t>09 / 24</a:t>
             </a:r>
           </a:p>
         </p:txBody>
       </p:sp>
       <p:pic>
         <p:nvPicPr>
-          <p:cNvPr id="7" name="Picture 6" descr="logo"/>
+          <p:cNvPr id="8" name="Picture 7" descr="logo"/>
           <p:cNvPicPr>
             <a:picLocks noChangeAspect="1"/>
           </p:cNvPicPr>
@@ -20492,579 +20748,6 @@
           </a:prstGeom>
         </p:spPr>
       </p:pic>
-      <p:sp>
-        <p:nvSpPr>
-          <p:cNvPr id="8" name="TextBox 7"/>
-          <p:cNvSpPr txBox="1"/>
-          <p:nvPr/>
-        </p:nvSpPr>
-        <p:spPr>
-          <a:xfrm>
-            <a:off x="548640" y="1554480"/>
-            <a:ext cx="11094415" cy="498348"/>
-          </a:xfrm>
-          <a:prstGeom prst="rect">
-            <a:avLst/>
-          </a:prstGeom>
-          <a:noFill/>
-        </p:spPr>
-        <p:txBody>
-          <a:bodyPr wrap="square" anchor="t" lIns="0" rIns="0" tIns="0" bIns="0">
-            <a:spAutoFit/>
-          </a:bodyPr>
-          <a:lstStyle/>
-          <a:p>
-            <a:pPr>
-              <a:spcAft>
-                <a:spcPts val="800"/>
-              </a:spcAft>
-            </a:pPr>
-            <a:r>
-              <a:rPr sz="1800" i="0" b="0">
-                <a:solidFill>
-                  <a:srgbClr val="2B211C"/>
-                </a:solidFill>
-                <a:latin typeface="Calibri"/>
-              </a:rPr>
-              <a:t>The pharmacist writes back to the physiotherapist and the doctor:</a:t>
-            </a:r>
-          </a:p>
-        </p:txBody>
-      </p:sp>
-      <p:sp>
-        <p:nvSpPr>
-          <p:cNvPr id="9" name="Oval 8"/>
-          <p:cNvSpPr/>
-          <p:nvPr/>
-        </p:nvSpPr>
-        <p:spPr>
-          <a:xfrm>
-            <a:off x="548640" y="2253996"/>
-            <a:ext cx="402336" cy="402336"/>
-          </a:xfrm>
-          <a:prstGeom prst="ellipse">
-            <a:avLst/>
-          </a:prstGeom>
-          <a:solidFill>
-            <a:srgbClr val="E6EEEF"/>
-          </a:solidFill>
-          <a:ln>
-            <a:noFill/>
-          </a:ln>
-          <a:effectLst/>
-        </p:spPr>
-        <p:style>
-          <a:lnRef idx="1">
-            <a:schemeClr val="accent1"/>
-          </a:lnRef>
-          <a:fillRef idx="3">
-            <a:schemeClr val="accent1"/>
-          </a:fillRef>
-          <a:effectRef idx="2">
-            <a:schemeClr val="accent1"/>
-          </a:effectRef>
-          <a:fontRef idx="minor">
-            <a:schemeClr val="lt1"/>
-          </a:fontRef>
-        </p:style>
-        <p:txBody>
-          <a:bodyPr rtlCol="0" anchor="ctr" lIns="0" rIns="0" tIns="0" bIns="0"/>
-          <a:lstStyle/>
-          <a:p>
-            <a:pPr algn="ctr"/>
-            <a:r>
-              <a:rPr sz="1300" i="0" b="1">
-                <a:solidFill>
-                  <a:srgbClr val="2F6F7A"/>
-                </a:solidFill>
-                <a:latin typeface="Calibri"/>
-              </a:rPr>
-              <a:t>1</a:t>
-            </a:r>
-          </a:p>
-        </p:txBody>
-      </p:sp>
-      <p:sp>
-        <p:nvSpPr>
-          <p:cNvPr id="10" name="TextBox 9"/>
-          <p:cNvSpPr txBox="1"/>
-          <p:nvPr/>
-        </p:nvSpPr>
-        <p:spPr>
-          <a:xfrm>
-            <a:off x="1143000" y="2272284"/>
-            <a:ext cx="10500055" cy="805078"/>
-          </a:xfrm>
-          <a:prstGeom prst="rect">
-            <a:avLst/>
-          </a:prstGeom>
-          <a:noFill/>
-        </p:spPr>
-        <p:txBody>
-          <a:bodyPr wrap="square" anchor="t" lIns="0" rIns="0" tIns="0" bIns="0">
-            <a:spAutoFit/>
-          </a:bodyPr>
-          <a:lstStyle/>
-          <a:p>
-            <a:r>
-              <a:rPr sz="2000" i="0" b="1">
-                <a:solidFill>
-                  <a:srgbClr val="2B211C"/>
-                </a:solidFill>
-                <a:latin typeface="Calibri"/>
-              </a:rPr>
-              <a:t>Paracetamol</a:t>
-            </a:r>
-            <a:r>
-              <a:rPr sz="2000" i="0" b="0">
-                <a:solidFill>
-                  <a:srgbClr val="2B211C"/>
-                </a:solidFill>
-                <a:latin typeface="Calibri"/>
-              </a:rPr>
-              <a:t> 1 g up to four times a day (maximum 4 g a day) before exercise sessions.</a:t>
-            </a:r>
-          </a:p>
-        </p:txBody>
-      </p:sp>
-      <p:sp>
-        <p:nvSpPr>
-          <p:cNvPr id="11" name="Oval 10"/>
-          <p:cNvSpPr/>
-          <p:nvPr/>
-        </p:nvSpPr>
-        <p:spPr>
-          <a:xfrm>
-            <a:off x="548640" y="3104794"/>
-            <a:ext cx="402336" cy="402336"/>
-          </a:xfrm>
-          <a:prstGeom prst="ellipse">
-            <a:avLst/>
-          </a:prstGeom>
-          <a:solidFill>
-            <a:srgbClr val="E6EEEF"/>
-          </a:solidFill>
-          <a:ln>
-            <a:noFill/>
-          </a:ln>
-          <a:effectLst/>
-        </p:spPr>
-        <p:style>
-          <a:lnRef idx="1">
-            <a:schemeClr val="accent1"/>
-          </a:lnRef>
-          <a:fillRef idx="3">
-            <a:schemeClr val="accent1"/>
-          </a:fillRef>
-          <a:effectRef idx="2">
-            <a:schemeClr val="accent1"/>
-          </a:effectRef>
-          <a:fontRef idx="minor">
-            <a:schemeClr val="lt1"/>
-          </a:fontRef>
-        </p:style>
-        <p:txBody>
-          <a:bodyPr rtlCol="0" anchor="ctr" lIns="0" rIns="0" tIns="0" bIns="0"/>
-          <a:lstStyle/>
-          <a:p>
-            <a:pPr algn="ctr"/>
-            <a:r>
-              <a:rPr sz="1300" i="0" b="1">
-                <a:solidFill>
-                  <a:srgbClr val="2F6F7A"/>
-                </a:solidFill>
-                <a:latin typeface="Calibri"/>
-              </a:rPr>
-              <a:t>2</a:t>
-            </a:r>
-          </a:p>
-        </p:txBody>
-      </p:sp>
-      <p:sp>
-        <p:nvSpPr>
-          <p:cNvPr id="12" name="TextBox 11"/>
-          <p:cNvSpPr txBox="1"/>
-          <p:nvPr/>
-        </p:nvSpPr>
-        <p:spPr>
-          <a:xfrm>
-            <a:off x="1143000" y="3123082"/>
-            <a:ext cx="10500055" cy="805078"/>
-          </a:xfrm>
-          <a:prstGeom prst="rect">
-            <a:avLst/>
-          </a:prstGeom>
-          <a:noFill/>
-        </p:spPr>
-        <p:txBody>
-          <a:bodyPr wrap="square" anchor="t" lIns="0" rIns="0" tIns="0" bIns="0">
-            <a:spAutoFit/>
-          </a:bodyPr>
-          <a:lstStyle/>
-          <a:p>
-            <a:r>
-              <a:rPr sz="2000" i="0" b="0">
-                <a:solidFill>
-                  <a:srgbClr val="2B211C"/>
-                </a:solidFill>
-                <a:latin typeface="Calibri"/>
-              </a:rPr>
-              <a:t>If this is not enough, </a:t>
-            </a:r>
-            <a:r>
-              <a:rPr sz="2000" i="0" b="1">
-                <a:solidFill>
-                  <a:srgbClr val="2B211C"/>
-                </a:solidFill>
-                <a:latin typeface="Calibri"/>
-              </a:rPr>
-              <a:t>naproxen</a:t>
-            </a:r>
-            <a:r>
-              <a:rPr sz="2000" i="0" b="0">
-                <a:solidFill>
-                  <a:srgbClr val="2B211C"/>
-                </a:solidFill>
-                <a:latin typeface="Calibri"/>
-              </a:rPr>
-              <a:t> 250-500 mg twice daily with food, for up to two weeks, </a:t>
-            </a:r>
-            <a:r>
-              <a:rPr sz="2000" i="0" b="1">
-                <a:solidFill>
-                  <a:srgbClr val="2B211C"/>
-                </a:solidFill>
-                <a:latin typeface="Calibri"/>
-              </a:rPr>
-              <a:t>with omeprazole</a:t>
-            </a:r>
-            <a:r>
-              <a:rPr sz="2000" i="0" b="0">
-                <a:solidFill>
-                  <a:srgbClr val="2B211C"/>
-                </a:solidFill>
-                <a:latin typeface="Calibri"/>
-              </a:rPr>
-              <a:t> 20 mg daily for stomach protection.</a:t>
-            </a:r>
-          </a:p>
-        </p:txBody>
-      </p:sp>
-      <p:sp>
-        <p:nvSpPr>
-          <p:cNvPr id="13" name="Oval 12"/>
-          <p:cNvSpPr/>
-          <p:nvPr/>
-        </p:nvSpPr>
-        <p:spPr>
-          <a:xfrm>
-            <a:off x="548640" y="3955592"/>
-            <a:ext cx="402336" cy="402336"/>
-          </a:xfrm>
-          <a:prstGeom prst="ellipse">
-            <a:avLst/>
-          </a:prstGeom>
-          <a:solidFill>
-            <a:srgbClr val="E6EEEF"/>
-          </a:solidFill>
-          <a:ln>
-            <a:noFill/>
-          </a:ln>
-          <a:effectLst/>
-        </p:spPr>
-        <p:style>
-          <a:lnRef idx="1">
-            <a:schemeClr val="accent1"/>
-          </a:lnRef>
-          <a:fillRef idx="3">
-            <a:schemeClr val="accent1"/>
-          </a:fillRef>
-          <a:effectRef idx="2">
-            <a:schemeClr val="accent1"/>
-          </a:effectRef>
-          <a:fontRef idx="minor">
-            <a:schemeClr val="lt1"/>
-          </a:fontRef>
-        </p:style>
-        <p:txBody>
-          <a:bodyPr rtlCol="0" anchor="ctr" lIns="0" rIns="0" tIns="0" bIns="0"/>
-          <a:lstStyle/>
-          <a:p>
-            <a:pPr algn="ctr"/>
-            <a:r>
-              <a:rPr sz="1300" i="0" b="1">
-                <a:solidFill>
-                  <a:srgbClr val="2F6F7A"/>
-                </a:solidFill>
-                <a:latin typeface="Calibri"/>
-              </a:rPr>
-              <a:t>3</a:t>
-            </a:r>
-          </a:p>
-        </p:txBody>
-      </p:sp>
-      <p:sp>
-        <p:nvSpPr>
-          <p:cNvPr id="14" name="TextBox 13"/>
-          <p:cNvSpPr txBox="1"/>
-          <p:nvPr/>
-        </p:nvSpPr>
-        <p:spPr>
-          <a:xfrm>
-            <a:off x="1143000" y="3973880"/>
-            <a:ext cx="10500055" cy="805078"/>
-          </a:xfrm>
-          <a:prstGeom prst="rect">
-            <a:avLst/>
-          </a:prstGeom>
-          <a:noFill/>
-        </p:spPr>
-        <p:txBody>
-          <a:bodyPr wrap="square" anchor="t" lIns="0" rIns="0" tIns="0" bIns="0">
-            <a:spAutoFit/>
-          </a:bodyPr>
-          <a:lstStyle/>
-          <a:p>
-            <a:r>
-              <a:rPr sz="2000" i="0" b="0">
-                <a:solidFill>
-                  <a:srgbClr val="2B211C"/>
-                </a:solidFill>
-                <a:latin typeface="Calibri"/>
-              </a:rPr>
-              <a:t>Because of lisinopril, check </a:t>
-            </a:r>
-            <a:r>
-              <a:rPr sz="2000" i="0" b="1">
-                <a:solidFill>
-                  <a:srgbClr val="2B211C"/>
-                </a:solidFill>
-                <a:latin typeface="Calibri"/>
-              </a:rPr>
-              <a:t>blood pressure</a:t>
-            </a:r>
-            <a:r>
-              <a:rPr sz="2000" i="0" b="0">
-                <a:solidFill>
-                  <a:srgbClr val="2B211C"/>
-                </a:solidFill>
-                <a:latin typeface="Calibri"/>
-              </a:rPr>
-              <a:t> and </a:t>
-            </a:r>
-            <a:r>
-              <a:rPr sz="2000" i="0" b="1">
-                <a:solidFill>
-                  <a:srgbClr val="2B211C"/>
-                </a:solidFill>
-                <a:latin typeface="Calibri"/>
-              </a:rPr>
-              <a:t>kidney function</a:t>
-            </a:r>
-            <a:r>
-              <a:rPr sz="2000" i="0" b="0">
-                <a:solidFill>
-                  <a:srgbClr val="2B211C"/>
-                </a:solidFill>
-                <a:latin typeface="Calibri"/>
-              </a:rPr>
-              <a:t> within one to two weeks of starting naproxen.</a:t>
-            </a:r>
-          </a:p>
-        </p:txBody>
-      </p:sp>
-      <p:sp>
-        <p:nvSpPr>
-          <p:cNvPr id="15" name="Oval 14"/>
-          <p:cNvSpPr/>
-          <p:nvPr/>
-        </p:nvSpPr>
-        <p:spPr>
-          <a:xfrm>
-            <a:off x="548640" y="4806391"/>
-            <a:ext cx="402336" cy="402336"/>
-          </a:xfrm>
-          <a:prstGeom prst="ellipse">
-            <a:avLst/>
-          </a:prstGeom>
-          <a:solidFill>
-            <a:srgbClr val="E6EEEF"/>
-          </a:solidFill>
-          <a:ln>
-            <a:noFill/>
-          </a:ln>
-          <a:effectLst/>
-        </p:spPr>
-        <p:style>
-          <a:lnRef idx="1">
-            <a:schemeClr val="accent1"/>
-          </a:lnRef>
-          <a:fillRef idx="3">
-            <a:schemeClr val="accent1"/>
-          </a:fillRef>
-          <a:effectRef idx="2">
-            <a:schemeClr val="accent1"/>
-          </a:effectRef>
-          <a:fontRef idx="minor">
-            <a:schemeClr val="lt1"/>
-          </a:fontRef>
-        </p:style>
-        <p:txBody>
-          <a:bodyPr rtlCol="0" anchor="ctr" lIns="0" rIns="0" tIns="0" bIns="0"/>
-          <a:lstStyle/>
-          <a:p>
-            <a:pPr algn="ctr"/>
-            <a:r>
-              <a:rPr sz="1300" i="0" b="1">
-                <a:solidFill>
-                  <a:srgbClr val="2F6F7A"/>
-                </a:solidFill>
-                <a:latin typeface="Calibri"/>
-              </a:rPr>
-              <a:t>4</a:t>
-            </a:r>
-          </a:p>
-        </p:txBody>
-      </p:sp>
-      <p:sp>
-        <p:nvSpPr>
-          <p:cNvPr id="16" name="TextBox 15"/>
-          <p:cNvSpPr txBox="1"/>
-          <p:nvPr/>
-        </p:nvSpPr>
-        <p:spPr>
-          <a:xfrm>
-            <a:off x="1143000" y="4824679"/>
-            <a:ext cx="10500055" cy="805078"/>
-          </a:xfrm>
-          <a:prstGeom prst="rect">
-            <a:avLst/>
-          </a:prstGeom>
-          <a:noFill/>
-        </p:spPr>
-        <p:txBody>
-          <a:bodyPr wrap="square" anchor="t" lIns="0" rIns="0" tIns="0" bIns="0">
-            <a:spAutoFit/>
-          </a:bodyPr>
-          <a:lstStyle/>
-          <a:p>
-            <a:r>
-              <a:rPr sz="2000" i="0" b="0">
-                <a:solidFill>
-                  <a:srgbClr val="2B211C"/>
-                </a:solidFill>
-                <a:latin typeface="Calibri"/>
-              </a:rPr>
-              <a:t>A </a:t>
-            </a:r>
-            <a:r>
-              <a:rPr sz="2000" i="0" b="1">
-                <a:solidFill>
-                  <a:srgbClr val="2B211C"/>
-                </a:solidFill>
-                <a:latin typeface="Calibri"/>
-              </a:rPr>
-              <a:t>corticosteroid injection</a:t>
-            </a:r>
-            <a:r>
-              <a:rPr sz="2000" i="0" b="0">
-                <a:solidFill>
-                  <a:srgbClr val="2B211C"/>
-                </a:solidFill>
-                <a:latin typeface="Calibri"/>
-              </a:rPr>
-              <a:t> can be considered by the doctor for short-term relief to help him exercise; evidence supports early benefit.</a:t>
-            </a:r>
-          </a:p>
-        </p:txBody>
-      </p:sp>
-      <p:sp>
-        <p:nvSpPr>
-          <p:cNvPr id="17" name="Oval 16"/>
-          <p:cNvSpPr/>
-          <p:nvPr/>
-        </p:nvSpPr>
-        <p:spPr>
-          <a:xfrm>
-            <a:off x="548640" y="5657189"/>
-            <a:ext cx="402336" cy="402336"/>
-          </a:xfrm>
-          <a:prstGeom prst="ellipse">
-            <a:avLst/>
-          </a:prstGeom>
-          <a:solidFill>
-            <a:srgbClr val="E6EEEF"/>
-          </a:solidFill>
-          <a:ln>
-            <a:noFill/>
-          </a:ln>
-          <a:effectLst/>
-        </p:spPr>
-        <p:style>
-          <a:lnRef idx="1">
-            <a:schemeClr val="accent1"/>
-          </a:lnRef>
-          <a:fillRef idx="3">
-            <a:schemeClr val="accent1"/>
-          </a:fillRef>
-          <a:effectRef idx="2">
-            <a:schemeClr val="accent1"/>
-          </a:effectRef>
-          <a:fontRef idx="minor">
-            <a:schemeClr val="lt1"/>
-          </a:fontRef>
-        </p:style>
-        <p:txBody>
-          <a:bodyPr rtlCol="0" anchor="ctr" lIns="0" rIns="0" tIns="0" bIns="0"/>
-          <a:lstStyle/>
-          <a:p>
-            <a:pPr algn="ctr"/>
-            <a:r>
-              <a:rPr sz="1300" i="0" b="1">
-                <a:solidFill>
-                  <a:srgbClr val="2F6F7A"/>
-                </a:solidFill>
-                <a:latin typeface="Calibri"/>
-              </a:rPr>
-              <a:t>5</a:t>
-            </a:r>
-          </a:p>
-        </p:txBody>
-      </p:sp>
-      <p:sp>
-        <p:nvSpPr>
-          <p:cNvPr id="18" name="TextBox 17"/>
-          <p:cNvSpPr txBox="1"/>
-          <p:nvPr/>
-        </p:nvSpPr>
-        <p:spPr>
-          <a:xfrm>
-            <a:off x="1143000" y="5675477"/>
-            <a:ext cx="10500055" cy="487578"/>
-          </a:xfrm>
-          <a:prstGeom prst="rect">
-            <a:avLst/>
-          </a:prstGeom>
-          <a:noFill/>
-        </p:spPr>
-        <p:txBody>
-          <a:bodyPr wrap="square" anchor="t" lIns="0" rIns="0" tIns="0" bIns="0">
-            <a:spAutoFit/>
-          </a:bodyPr>
-          <a:lstStyle/>
-          <a:p>
-            <a:r>
-              <a:rPr sz="2000" i="0" b="0">
-                <a:solidFill>
-                  <a:srgbClr val="2B211C"/>
-                </a:solidFill>
-                <a:latin typeface="Calibri"/>
-              </a:rPr>
-              <a:t>Heat before exercise and the home programme remain the core of treatment.</a:t>
-            </a:r>
-          </a:p>
-        </p:txBody>
-      </p:sp>
     </p:spTree>
   </p:cSld>
   <p:clrMapOvr>

--- a/projects/drug-information-practical/slides/ch10-applied-case.pptx
+++ b/projects/drug-information-practical/slides/ch10-applied-case.pptx
@@ -5493,7 +5493,7 @@
     <p:bg>
       <p:bgPr>
         <a:solidFill>
-          <a:srgbClr val="FFFFFF"/>
+          <a:srgbClr val="F5EDE3"/>
         </a:solidFill>
         <a:effectLst/>
       </p:bgPr>
@@ -5874,7 +5874,7 @@
     <p:bg>
       <p:bgPr>
         <a:solidFill>
-          <a:srgbClr val="FFFFFF"/>
+          <a:srgbClr val="F5EDE3"/>
         </a:solidFill>
         <a:effectLst/>
       </p:bgPr>
@@ -6675,7 +6675,7 @@
     <p:bg>
       <p:bgPr>
         <a:solidFill>
-          <a:srgbClr val="FFFFFF"/>
+          <a:srgbClr val="F5EDE3"/>
         </a:solidFill>
         <a:effectLst/>
       </p:bgPr>
@@ -7050,7 +7050,7 @@
     <p:bg>
       <p:bgPr>
         <a:solidFill>
-          <a:srgbClr val="FFFFFF"/>
+          <a:srgbClr val="F5EDE3"/>
         </a:solidFill>
         <a:effectLst/>
       </p:bgPr>
@@ -7856,7 +7856,7 @@
     <p:bg>
       <p:bgPr>
         <a:solidFill>
-          <a:srgbClr val="FFFFFF"/>
+          <a:srgbClr val="F5EDE3"/>
         </a:solidFill>
         <a:effectLst/>
       </p:bgPr>
@@ -8705,7 +8705,7 @@
     <p:bg>
       <p:bgPr>
         <a:solidFill>
-          <a:srgbClr val="FFFFFF"/>
+          <a:srgbClr val="F5EDE3"/>
         </a:solidFill>
         <a:effectLst/>
       </p:bgPr>
@@ -9511,7 +9511,7 @@
     <p:bg>
       <p:bgPr>
         <a:solidFill>
-          <a:srgbClr val="FFFFFF"/>
+          <a:srgbClr val="F5EDE3"/>
         </a:solidFill>
         <a:effectLst/>
       </p:bgPr>
@@ -10360,7 +10360,7 @@
     <p:bg>
       <p:bgPr>
         <a:solidFill>
-          <a:srgbClr val="FFFFFF"/>
+          <a:srgbClr val="F5EDE3"/>
         </a:solidFill>
         <a:effectLst/>
       </p:bgPr>
@@ -11166,7 +11166,7 @@
     <p:bg>
       <p:bgPr>
         <a:solidFill>
-          <a:srgbClr val="FFFFFF"/>
+          <a:srgbClr val="F5EDE3"/>
         </a:solidFill>
         <a:effectLst/>
       </p:bgPr>
@@ -12015,7 +12015,7 @@
     <p:bg>
       <p:bgPr>
         <a:solidFill>
-          <a:srgbClr val="FFFFFF"/>
+          <a:srgbClr val="F5EDE3"/>
         </a:solidFill>
         <a:effectLst/>
       </p:bgPr>
@@ -12821,7 +12821,7 @@
     <p:bg>
       <p:bgPr>
         <a:solidFill>
-          <a:srgbClr val="FFFFFF"/>
+          <a:srgbClr val="F5EDE3"/>
         </a:solidFill>
         <a:effectLst/>
       </p:bgPr>
@@ -13559,7 +13559,7 @@
     <p:bg>
       <p:bgPr>
         <a:solidFill>
-          <a:srgbClr val="FFFFFF"/>
+          <a:srgbClr val="F5EDE3"/>
         </a:solidFill>
         <a:effectLst/>
       </p:bgPr>
@@ -14408,7 +14408,7 @@
     <p:bg>
       <p:bgPr>
         <a:solidFill>
-          <a:srgbClr val="FFFFFF"/>
+          <a:srgbClr val="F5EDE3"/>
         </a:solidFill>
         <a:effectLst/>
       </p:bgPr>
@@ -15214,7 +15214,7 @@
     <p:bg>
       <p:bgPr>
         <a:solidFill>
-          <a:srgbClr val="FFFFFF"/>
+          <a:srgbClr val="F5EDE3"/>
         </a:solidFill>
         <a:effectLst/>
       </p:bgPr>
@@ -16063,7 +16063,7 @@
     <p:bg>
       <p:bgPr>
         <a:solidFill>
-          <a:srgbClr val="FFFFFF"/>
+          <a:srgbClr val="F5EDE3"/>
         </a:solidFill>
         <a:effectLst/>
       </p:bgPr>
@@ -16829,7 +16829,7 @@
     <p:bg>
       <p:bgPr>
         <a:solidFill>
-          <a:srgbClr val="FFFFFF"/>
+          <a:srgbClr val="F5EDE3"/>
         </a:solidFill>
         <a:effectLst/>
       </p:bgPr>
@@ -17504,7 +17504,7 @@
     <p:bg>
       <p:bgPr>
         <a:solidFill>
-          <a:srgbClr val="FFFFFF"/>
+          <a:srgbClr val="F5EDE3"/>
         </a:solidFill>
         <a:effectLst/>
       </p:bgPr>
@@ -18086,7 +18086,7 @@
     <p:bg>
       <p:bgPr>
         <a:solidFill>
-          <a:srgbClr val="FFFFFF"/>
+          <a:srgbClr val="F5EDE3"/>
         </a:solidFill>
         <a:effectLst/>
       </p:bgPr>
@@ -18775,7 +18775,7 @@
     <p:bg>
       <p:bgPr>
         <a:solidFill>
-          <a:srgbClr val="FFFFFF"/>
+          <a:srgbClr val="F5EDE3"/>
         </a:solidFill>
         <a:effectLst/>
       </p:bgPr>
@@ -19131,7 +19131,7 @@
     <p:bg>
       <p:bgPr>
         <a:solidFill>
-          <a:srgbClr val="FFFFFF"/>
+          <a:srgbClr val="F5EDE3"/>
         </a:solidFill>
         <a:effectLst/>
       </p:bgPr>
@@ -19673,7 +19673,7 @@
     <p:bg>
       <p:bgPr>
         <a:solidFill>
-          <a:srgbClr val="FFFFFF"/>
+          <a:srgbClr val="F5EDE3"/>
         </a:solidFill>
         <a:effectLst/>
       </p:bgPr>
@@ -20486,7 +20486,7 @@
     <p:bg>
       <p:bgPr>
         <a:solidFill>
-          <a:srgbClr val="FFFFFF"/>
+          <a:srgbClr val="F5EDE3"/>
         </a:solidFill>
         <a:effectLst/>
       </p:bgPr>
